--- a/docs/presentation/pilot_20261022.pptx
+++ b/docs/presentation/pilot_20261022.pptx
@@ -4192,7 +4192,7 @@
                 </a:solidFill>
                 <a:latin typeface="Aptos"/>
               </a:rPr>
-              <a:t>Только Python; ревизия ConDefects закреплена в конфиге. Пилот — шесть заранее выбранных задач dev. Тесты: Test.zip или зеркало AtCoder.</a:t>
+              <a:t>Только Python; ревизия ConDefects закреплена в конфиге. Пилот — 30 задач dev, по 10 на уровень. Тесты: Test.zip или зеркало AtCoder.</a:t>
             </a:r>
           </a:p>
         </p:txBody>
@@ -8738,7 +8738,7 @@
                 </a:solidFill>
                 <a:latin typeface="Aptos"/>
               </a:rPr>
-              <a:t>Карточки: реальные сохранённые трассы 6-задачного пилота; сводные числа выше — для 30 задач.</a:t>
+              <a:t>Карточки — трассы 6-задачного пилота (лимит 30 000); сводка — 30 задач (лимит 60 000).</a:t>
             </a:r>
           </a:p>
         </p:txBody>

--- a/docs/presentation/pilot_20261022.pptx
+++ b/docs/presentation/pilot_20261022.pptx
@@ -7841,7 +7841,7 @@
                 </a:solidFill>
                 <a:latin typeface="Aptos"/>
               </a:rPr>
-              <a:t>abc223_f · workflow</a:t>
+              <a:t>abc288_d · workflow</a:t>
             </a:r>
           </a:p>
         </p:txBody>
@@ -7876,7 +7876,7 @@
                 </a:solidFill>
                 <a:latin typeface="Aptos"/>
               </a:rPr>
-              <a:t>Первая попытка не прошла полный набор тестов.</a:t>
+              <a:t>Логика исправлена, но 44 из 46 тестов — TLE.</a:t>
             </a:r>
           </a:p>
         </p:txBody>
@@ -7959,7 +7959,7 @@
                 </a:solidFill>
                 <a:latin typeface="Consolas"/>
               </a:rPr>
-              <a:t>attempt #1 → failed</a:t>
+              <a:t>attempt #1 → 44 TLE</a:t>
             </a:r>
             <a:br/>
             <a:r>
@@ -7969,7 +7969,7 @@
                 </a:solidFill>
                 <a:latin typeface="Consolas"/>
               </a:rPr>
-              <a:t>attempt #2 → passed_all</a:t>
+              <a:t>attempt #2 → 46 AC</a:t>
             </a:r>
           </a:p>
         </p:txBody>
@@ -8004,7 +8004,7 @@
                 </a:solidFill>
                 <a:latin typeface="Aptos"/>
               </a:rPr>
-              <a:t>Обратная связь позволила изменить патч.</a:t>
+              <a:t>По отчёту о TLE ускорен ввод-вывод.</a:t>
             </a:r>
           </a:p>
         </p:txBody>
@@ -8168,7 +8168,7 @@
                 </a:solidFill>
                 <a:latin typeface="Aptos"/>
               </a:rPr>
-              <a:t>abc225_d · MAS</a:t>
+              <a:t>abc223_d · MAS</a:t>
             </a:r>
           </a:p>
         </p:txBody>
@@ -8306,7 +8306,7 @@
                 </a:solidFill>
                 <a:latin typeface="Consolas"/>
               </a:rPr>
-              <a:t>checker: run_tests → AC</a:t>
+              <a:t>checker: run_tests → 22 AC</a:t>
             </a:r>
           </a:p>
         </p:txBody>
@@ -8505,7 +8505,7 @@
                 </a:solidFill>
                 <a:latin typeface="Aptos"/>
               </a:rPr>
-              <a:t>abc223_d · MAS</a:t>
+              <a:t>abc225_d · MAS</a:t>
             </a:r>
           </a:p>
         </p:txBody>
@@ -8540,7 +8540,7 @@
                 </a:solidFill>
                 <a:latin typeface="Aptos"/>
               </a:rPr>
-              <a:t>Исследователь получил пять тестов и выполнил три трассировки.</a:t>
+              <a:t>Исследователь запросил тест, запуск и две трассировки.</a:t>
             </a:r>
           </a:p>
         </p:txBody>
@@ -8623,7 +8623,7 @@
                 </a:solidFill>
                 <a:latin typeface="Consolas"/>
               </a:rPr>
-              <a:t>get_test ×5 + trace ×3</a:t>
+              <a:t>get_test + run_program + trace ×2</a:t>
             </a:r>
             <a:br/>
             <a:r>
@@ -8703,7 +8703,7 @@
                 </a:solidFill>
                 <a:latin typeface="Aptos"/>
               </a:rPr>
-              <a:t>Остановка: 33 642 / 30 000 токенов</a:t>
+              <a:t>Остановка: 71 192 / 60 000 токенов</a:t>
             </a:r>
           </a:p>
         </p:txBody>
@@ -8738,7 +8738,7 @@
                 </a:solidFill>
                 <a:latin typeface="Aptos"/>
               </a:rPr>
-              <a:t>Карточки — трассы 6-задачного пилота (лимит 30 000); сводка — 30 задач (лимит 60 000).</a:t>
+              <a:t>Карточки: реальные трассы основного пилота на 30 задачах, лимит 60 000 токенов.</a:t>
             </a:r>
           </a:p>
         </p:txBody>

--- a/docs/presentation/pilot_20261022.pptx
+++ b/docs/presentation/pilot_20261022.pptx
@@ -129,6 +129,1046 @@
     </p:ext>
   </p:extLst>
 </p:presentation>
+</file>
+
+<file path=ppt/charts/chart1.xml><?xml version="1.0" encoding="utf-8"?>
+<c:chartSpace xmlns:c="http://schemas.openxmlformats.org/drawingml/2006/chart" xmlns:a="http://schemas.openxmlformats.org/drawingml/2006/main" xmlns:r="http://schemas.openxmlformats.org/officeDocument/2006/relationships" xmlns:c16r2="http://schemas.microsoft.com/office/drawing/2015/06/chart">
+  <c:date1904 val="0"/>
+  <c:lang val="ru-RU"/>
+  <c:roundedCorners val="0"/>
+  <mc:AlternateContent xmlns:mc="http://schemas.openxmlformats.org/markup-compatibility/2006">
+    <mc:Choice xmlns:c14="http://schemas.microsoft.com/office/drawing/2007/8/2/chart" Requires="c14">
+      <c14:style val="102"/>
+    </mc:Choice>
+    <mc:Fallback>
+      <c:style val="2"/>
+    </mc:Fallback>
+  </mc:AlternateContent>
+  <c:chart>
+    <c:autoTitleDeleted val="1"/>
+    <c:plotArea>
+      <c:layout/>
+      <c:barChart>
+        <c:barDir val="col"/>
+        <c:grouping val="clustered"/>
+        <c:varyColors val="0"/>
+        <c:ser>
+          <c:idx val="0"/>
+          <c:order val="0"/>
+          <c:tx>
+            <c:strRef>
+              <c:f>Лист1!$B$1</c:f>
+              <c:strCache>
+                <c:ptCount val="1"/>
+                <c:pt idx="0">
+                  <c:v>LLM-only</c:v>
+                </c:pt>
+              </c:strCache>
+            </c:strRef>
+          </c:tx>
+          <c:spPr>
+            <a:solidFill>
+              <a:schemeClr val="accent1"/>
+            </a:solidFill>
+            <a:ln>
+              <a:noFill/>
+            </a:ln>
+            <a:effectLst/>
+          </c:spPr>
+          <c:invertIfNegative val="0"/>
+          <c:cat>
+            <c:strRef>
+              <c:f>Лист1!$A$2:$A$5</c:f>
+              <c:strCache>
+                <c:ptCount val="4"/>
+                <c:pt idx="0">
+                  <c:v>easy</c:v>
+                </c:pt>
+                <c:pt idx="1">
+                  <c:v>medium</c:v>
+                </c:pt>
+                <c:pt idx="2">
+                  <c:v>hard</c:v>
+                </c:pt>
+                <c:pt idx="3">
+                  <c:v>total</c:v>
+                </c:pt>
+              </c:strCache>
+            </c:strRef>
+          </c:cat>
+          <c:val>
+            <c:numRef>
+              <c:f>Лист1!$B$2:$B$5</c:f>
+              <c:numCache>
+                <c:formatCode>0%</c:formatCode>
+                <c:ptCount val="4"/>
+                <c:pt idx="0">
+                  <c:v>1</c:v>
+                </c:pt>
+                <c:pt idx="1">
+                  <c:v>0.5</c:v>
+                </c:pt>
+                <c:pt idx="2">
+                  <c:v>0.5</c:v>
+                </c:pt>
+                <c:pt idx="3">
+                  <c:v>0.67</c:v>
+                </c:pt>
+              </c:numCache>
+            </c:numRef>
+          </c:val>
+          <c:extLst>
+            <c:ext xmlns:c16="http://schemas.microsoft.com/office/drawing/2014/chart" uri="{C3380CC4-5D6E-409C-BE32-E72D297353CC}">
+              <c16:uniqueId val="{00000000-CCC6-4725-BBC1-B9D1ACF8DBC2}"/>
+            </c:ext>
+          </c:extLst>
+        </c:ser>
+        <c:ser>
+          <c:idx val="1"/>
+          <c:order val="1"/>
+          <c:tx>
+            <c:strRef>
+              <c:f>Лист1!$C$1</c:f>
+              <c:strCache>
+                <c:ptCount val="1"/>
+                <c:pt idx="0">
+                  <c:v>Workflow</c:v>
+                </c:pt>
+              </c:strCache>
+            </c:strRef>
+          </c:tx>
+          <c:spPr>
+            <a:solidFill>
+              <a:schemeClr val="accent3"/>
+            </a:solidFill>
+            <a:ln>
+              <a:noFill/>
+            </a:ln>
+            <a:effectLst/>
+          </c:spPr>
+          <c:invertIfNegative val="0"/>
+          <c:cat>
+            <c:strRef>
+              <c:f>Лист1!$A$2:$A$5</c:f>
+              <c:strCache>
+                <c:ptCount val="4"/>
+                <c:pt idx="0">
+                  <c:v>easy</c:v>
+                </c:pt>
+                <c:pt idx="1">
+                  <c:v>medium</c:v>
+                </c:pt>
+                <c:pt idx="2">
+                  <c:v>hard</c:v>
+                </c:pt>
+                <c:pt idx="3">
+                  <c:v>total</c:v>
+                </c:pt>
+              </c:strCache>
+            </c:strRef>
+          </c:cat>
+          <c:val>
+            <c:numRef>
+              <c:f>Лист1!$C$2:$C$5</c:f>
+              <c:numCache>
+                <c:formatCode>0%</c:formatCode>
+                <c:ptCount val="4"/>
+                <c:pt idx="0">
+                  <c:v>1</c:v>
+                </c:pt>
+                <c:pt idx="1">
+                  <c:v>0.5</c:v>
+                </c:pt>
+                <c:pt idx="2">
+                  <c:v>1</c:v>
+                </c:pt>
+                <c:pt idx="3">
+                  <c:v>0.83</c:v>
+                </c:pt>
+              </c:numCache>
+            </c:numRef>
+          </c:val>
+          <c:extLst>
+            <c:ext xmlns:c16="http://schemas.microsoft.com/office/drawing/2014/chart" uri="{C3380CC4-5D6E-409C-BE32-E72D297353CC}">
+              <c16:uniqueId val="{00000001-CCC6-4725-BBC1-B9D1ACF8DBC2}"/>
+            </c:ext>
+          </c:extLst>
+        </c:ser>
+        <c:ser>
+          <c:idx val="2"/>
+          <c:order val="2"/>
+          <c:tx>
+            <c:strRef>
+              <c:f>Лист1!$D$1</c:f>
+              <c:strCache>
+                <c:ptCount val="1"/>
+                <c:pt idx="0">
+                  <c:v>Single Agent</c:v>
+                </c:pt>
+              </c:strCache>
+            </c:strRef>
+          </c:tx>
+          <c:spPr>
+            <a:solidFill>
+              <a:schemeClr val="accent5"/>
+            </a:solidFill>
+            <a:ln>
+              <a:noFill/>
+            </a:ln>
+            <a:effectLst/>
+          </c:spPr>
+          <c:invertIfNegative val="0"/>
+          <c:cat>
+            <c:strRef>
+              <c:f>Лист1!$A$2:$A$5</c:f>
+              <c:strCache>
+                <c:ptCount val="4"/>
+                <c:pt idx="0">
+                  <c:v>easy</c:v>
+                </c:pt>
+                <c:pt idx="1">
+                  <c:v>medium</c:v>
+                </c:pt>
+                <c:pt idx="2">
+                  <c:v>hard</c:v>
+                </c:pt>
+                <c:pt idx="3">
+                  <c:v>total</c:v>
+                </c:pt>
+              </c:strCache>
+            </c:strRef>
+          </c:cat>
+          <c:val>
+            <c:numRef>
+              <c:f>Лист1!$D$2:$D$5</c:f>
+              <c:numCache>
+                <c:formatCode>0%</c:formatCode>
+                <c:ptCount val="4"/>
+                <c:pt idx="0">
+                  <c:v>1</c:v>
+                </c:pt>
+                <c:pt idx="1">
+                  <c:v>0.5</c:v>
+                </c:pt>
+                <c:pt idx="2">
+                  <c:v>0.5</c:v>
+                </c:pt>
+                <c:pt idx="3">
+                  <c:v>0.67</c:v>
+                </c:pt>
+              </c:numCache>
+            </c:numRef>
+          </c:val>
+          <c:extLst>
+            <c:ext xmlns:c16="http://schemas.microsoft.com/office/drawing/2014/chart" uri="{C3380CC4-5D6E-409C-BE32-E72D297353CC}">
+              <c16:uniqueId val="{00000002-CCC6-4725-BBC1-B9D1ACF8DBC2}"/>
+            </c:ext>
+          </c:extLst>
+        </c:ser>
+        <c:ser>
+          <c:idx val="3"/>
+          <c:order val="3"/>
+          <c:tx>
+            <c:strRef>
+              <c:f>Лист1!$E$1</c:f>
+              <c:strCache>
+                <c:ptCount val="1"/>
+                <c:pt idx="0">
+                  <c:v>MAS</c:v>
+                </c:pt>
+              </c:strCache>
+            </c:strRef>
+          </c:tx>
+          <c:spPr>
+            <a:solidFill>
+              <a:schemeClr val="accent1">
+                <a:lumMod val="60000"/>
+              </a:schemeClr>
+            </a:solidFill>
+            <a:ln>
+              <a:noFill/>
+            </a:ln>
+            <a:effectLst/>
+          </c:spPr>
+          <c:invertIfNegative val="0"/>
+          <c:cat>
+            <c:strRef>
+              <c:f>Лист1!$A$2:$A$5</c:f>
+              <c:strCache>
+                <c:ptCount val="4"/>
+                <c:pt idx="0">
+                  <c:v>easy</c:v>
+                </c:pt>
+                <c:pt idx="1">
+                  <c:v>medium</c:v>
+                </c:pt>
+                <c:pt idx="2">
+                  <c:v>hard</c:v>
+                </c:pt>
+                <c:pt idx="3">
+                  <c:v>total</c:v>
+                </c:pt>
+              </c:strCache>
+            </c:strRef>
+          </c:cat>
+          <c:val>
+            <c:numRef>
+              <c:f>Лист1!$E$2:$E$5</c:f>
+              <c:numCache>
+                <c:formatCode>0%</c:formatCode>
+                <c:ptCount val="4"/>
+                <c:pt idx="0">
+                  <c:v>1</c:v>
+                </c:pt>
+                <c:pt idx="1">
+                  <c:v>0.5</c:v>
+                </c:pt>
+                <c:pt idx="2">
+                  <c:v>0.5</c:v>
+                </c:pt>
+                <c:pt idx="3">
+                  <c:v>0.67</c:v>
+                </c:pt>
+              </c:numCache>
+            </c:numRef>
+          </c:val>
+          <c:extLst>
+            <c:ext xmlns:c16="http://schemas.microsoft.com/office/drawing/2014/chart" uri="{C3380CC4-5D6E-409C-BE32-E72D297353CC}">
+              <c16:uniqueId val="{00000003-CCC6-4725-BBC1-B9D1ACF8DBC2}"/>
+            </c:ext>
+          </c:extLst>
+        </c:ser>
+        <c:dLbls>
+          <c:showLegendKey val="0"/>
+          <c:showVal val="0"/>
+          <c:showCatName val="0"/>
+          <c:showSerName val="0"/>
+          <c:showPercent val="0"/>
+          <c:showBubbleSize val="0"/>
+        </c:dLbls>
+        <c:gapWidth val="219"/>
+        <c:overlap val="-27"/>
+        <c:axId val="1681848464"/>
+        <c:axId val="1481494432"/>
+      </c:barChart>
+      <c:catAx>
+        <c:axId val="1681848464"/>
+        <c:scaling>
+          <c:orientation val="minMax"/>
+        </c:scaling>
+        <c:delete val="0"/>
+        <c:axPos val="b"/>
+        <c:numFmt formatCode="General" sourceLinked="1"/>
+        <c:majorTickMark val="none"/>
+        <c:minorTickMark val="none"/>
+        <c:tickLblPos val="nextTo"/>
+        <c:spPr>
+          <a:noFill/>
+          <a:ln w="9525" cap="flat" cmpd="sng" algn="ctr">
+            <a:solidFill>
+              <a:schemeClr val="tx1">
+                <a:lumMod val="15000"/>
+                <a:lumOff val="85000"/>
+              </a:schemeClr>
+            </a:solidFill>
+            <a:round/>
+          </a:ln>
+          <a:effectLst/>
+        </c:spPr>
+        <c:txPr>
+          <a:bodyPr rot="-60000000" spcFirstLastPara="1" vertOverflow="ellipsis" vert="horz" wrap="square" anchor="ctr" anchorCtr="1"/>
+          <a:lstStyle/>
+          <a:p>
+            <a:pPr>
+              <a:defRPr sz="1197" b="0" i="0" u="none" strike="noStrike" kern="1200" baseline="0">
+                <a:solidFill>
+                  <a:schemeClr val="tx1">
+                    <a:lumMod val="65000"/>
+                    <a:lumOff val="35000"/>
+                  </a:schemeClr>
+                </a:solidFill>
+                <a:latin typeface="+mn-lt"/>
+                <a:ea typeface="+mn-ea"/>
+                <a:cs typeface="+mn-cs"/>
+              </a:defRPr>
+            </a:pPr>
+            <a:endParaRPr lang="ru-RU"/>
+          </a:p>
+        </c:txPr>
+        <c:crossAx val="1481494432"/>
+        <c:crosses val="autoZero"/>
+        <c:auto val="1"/>
+        <c:lblAlgn val="ctr"/>
+        <c:lblOffset val="100"/>
+        <c:noMultiLvlLbl val="0"/>
+      </c:catAx>
+      <c:valAx>
+        <c:axId val="1481494432"/>
+        <c:scaling>
+          <c:orientation val="minMax"/>
+        </c:scaling>
+        <c:delete val="0"/>
+        <c:axPos val="l"/>
+        <c:majorGridlines>
+          <c:spPr>
+            <a:ln w="9525" cap="flat" cmpd="sng" algn="ctr">
+              <a:solidFill>
+                <a:schemeClr val="tx1">
+                  <a:lumMod val="15000"/>
+                  <a:lumOff val="85000"/>
+                </a:schemeClr>
+              </a:solidFill>
+              <a:round/>
+            </a:ln>
+            <a:effectLst/>
+          </c:spPr>
+        </c:majorGridlines>
+        <c:numFmt formatCode="0%" sourceLinked="1"/>
+        <c:majorTickMark val="out"/>
+        <c:minorTickMark val="none"/>
+        <c:tickLblPos val="nextTo"/>
+        <c:spPr>
+          <a:noFill/>
+          <a:ln>
+            <a:noFill/>
+          </a:ln>
+          <a:effectLst/>
+        </c:spPr>
+        <c:txPr>
+          <a:bodyPr rot="-60000000" spcFirstLastPara="1" vertOverflow="ellipsis" vert="horz" wrap="square" anchor="ctr" anchorCtr="1"/>
+          <a:lstStyle/>
+          <a:p>
+            <a:pPr>
+              <a:defRPr sz="1197" b="0" i="0" u="none" strike="noStrike" kern="1200" baseline="0">
+                <a:solidFill>
+                  <a:schemeClr val="tx1">
+                    <a:lumMod val="65000"/>
+                    <a:lumOff val="35000"/>
+                  </a:schemeClr>
+                </a:solidFill>
+                <a:latin typeface="+mn-lt"/>
+                <a:ea typeface="+mn-ea"/>
+                <a:cs typeface="+mn-cs"/>
+              </a:defRPr>
+            </a:pPr>
+            <a:endParaRPr lang="ru-RU"/>
+          </a:p>
+        </c:txPr>
+        <c:crossAx val="1681848464"/>
+        <c:crosses val="autoZero"/>
+        <c:crossBetween val="midCat"/>
+      </c:valAx>
+      <c:spPr>
+        <a:noFill/>
+        <a:ln>
+          <a:noFill/>
+        </a:ln>
+        <a:effectLst/>
+      </c:spPr>
+    </c:plotArea>
+    <c:legend>
+      <c:legendPos val="b"/>
+      <c:overlay val="0"/>
+      <c:spPr>
+        <a:noFill/>
+        <a:ln>
+          <a:noFill/>
+        </a:ln>
+        <a:effectLst/>
+      </c:spPr>
+      <c:txPr>
+        <a:bodyPr rot="0" spcFirstLastPara="1" vertOverflow="ellipsis" vert="horz" wrap="square" anchor="ctr" anchorCtr="1"/>
+        <a:lstStyle/>
+        <a:p>
+          <a:pPr>
+            <a:defRPr sz="1197" b="0" i="0" u="none" strike="noStrike" kern="1200" baseline="0">
+              <a:solidFill>
+                <a:schemeClr val="tx1">
+                  <a:lumMod val="65000"/>
+                  <a:lumOff val="35000"/>
+                </a:schemeClr>
+              </a:solidFill>
+              <a:latin typeface="+mn-lt"/>
+              <a:ea typeface="+mn-ea"/>
+              <a:cs typeface="+mn-cs"/>
+            </a:defRPr>
+          </a:pPr>
+          <a:endParaRPr lang="ru-RU"/>
+        </a:p>
+      </c:txPr>
+    </c:legend>
+    <c:plotVisOnly val="1"/>
+    <c:dispBlanksAs val="gap"/>
+    <c:showDLblsOverMax val="0"/>
+    <c:extLst>
+      <c:ext xmlns:c16r3="http://schemas.microsoft.com/office/drawing/2017/03/chart" uri="{56B9EC1D-385E-4148-901F-78D8002777C0}">
+        <c16r3:dataDisplayOptions16>
+          <c16r3:dispNaAsBlank val="1"/>
+        </c16r3:dataDisplayOptions16>
+      </c:ext>
+    </c:extLst>
+  </c:chart>
+  <c:spPr>
+    <a:noFill/>
+    <a:ln>
+      <a:noFill/>
+    </a:ln>
+    <a:effectLst/>
+  </c:spPr>
+  <c:txPr>
+    <a:bodyPr/>
+    <a:lstStyle/>
+    <a:p>
+      <a:pPr>
+        <a:defRPr/>
+      </a:pPr>
+      <a:endParaRPr lang="ru-RU"/>
+    </a:p>
+  </c:txPr>
+  <c:externalData r:id="rId3">
+    <c:autoUpdate val="0"/>
+  </c:externalData>
+</c:chartSpace>
+</file>
+
+<file path=ppt/charts/colors1.xml><?xml version="1.0" encoding="utf-8"?>
+<cs:colorStyle xmlns:cs="http://schemas.microsoft.com/office/drawing/2012/chartStyle" xmlns:a="http://schemas.openxmlformats.org/drawingml/2006/main" meth="cycle" id="11">
+  <a:schemeClr val="accent1"/>
+  <a:schemeClr val="accent3"/>
+  <a:schemeClr val="accent5"/>
+  <cs:variation/>
+  <cs:variation>
+    <a:lumMod val="60000"/>
+  </cs:variation>
+  <cs:variation>
+    <a:lumMod val="80000"/>
+    <a:lumOff val="20000"/>
+  </cs:variation>
+  <cs:variation>
+    <a:lumMod val="80000"/>
+  </cs:variation>
+  <cs:variation>
+    <a:lumMod val="60000"/>
+    <a:lumOff val="40000"/>
+  </cs:variation>
+  <cs:variation>
+    <a:lumMod val="50000"/>
+  </cs:variation>
+  <cs:variation>
+    <a:lumMod val="70000"/>
+    <a:lumOff val="30000"/>
+  </cs:variation>
+  <cs:variation>
+    <a:lumMod val="70000"/>
+  </cs:variation>
+  <cs:variation>
+    <a:lumMod val="50000"/>
+    <a:lumOff val="50000"/>
+  </cs:variation>
+</cs:colorStyle>
+</file>
+
+<file path=ppt/charts/style1.xml><?xml version="1.0" encoding="utf-8"?>
+<cs:chartStyle xmlns:cs="http://schemas.microsoft.com/office/drawing/2012/chartStyle" xmlns:a="http://schemas.openxmlformats.org/drawingml/2006/main" id="201">
+  <cs:axisTitle>
+    <cs:lnRef idx="0"/>
+    <cs:fillRef idx="0"/>
+    <cs:effectRef idx="0"/>
+    <cs:fontRef idx="minor">
+      <a:schemeClr val="tx1">
+        <a:lumMod val="65000"/>
+        <a:lumOff val="35000"/>
+      </a:schemeClr>
+    </cs:fontRef>
+    <cs:defRPr sz="1330" kern="1200"/>
+  </cs:axisTitle>
+  <cs:categoryAxis>
+    <cs:lnRef idx="0"/>
+    <cs:fillRef idx="0"/>
+    <cs:effectRef idx="0"/>
+    <cs:fontRef idx="minor">
+      <a:schemeClr val="tx1">
+        <a:lumMod val="65000"/>
+        <a:lumOff val="35000"/>
+      </a:schemeClr>
+    </cs:fontRef>
+    <cs:spPr>
+      <a:ln w="9525" cap="flat" cmpd="sng" algn="ctr">
+        <a:solidFill>
+          <a:schemeClr val="tx1">
+            <a:lumMod val="15000"/>
+            <a:lumOff val="85000"/>
+          </a:schemeClr>
+        </a:solidFill>
+        <a:round/>
+      </a:ln>
+    </cs:spPr>
+    <cs:defRPr sz="1197" kern="1200"/>
+  </cs:categoryAxis>
+  <cs:chartArea mods="allowNoFillOverride allowNoLineOverride">
+    <cs:lnRef idx="0"/>
+    <cs:fillRef idx="0"/>
+    <cs:effectRef idx="0"/>
+    <cs:fontRef idx="minor">
+      <a:schemeClr val="tx1"/>
+    </cs:fontRef>
+    <cs:spPr>
+      <a:solidFill>
+        <a:schemeClr val="bg1"/>
+      </a:solidFill>
+      <a:ln w="9525" cap="flat" cmpd="sng" algn="ctr">
+        <a:solidFill>
+          <a:schemeClr val="tx1">
+            <a:lumMod val="15000"/>
+            <a:lumOff val="85000"/>
+          </a:schemeClr>
+        </a:solidFill>
+        <a:round/>
+      </a:ln>
+    </cs:spPr>
+    <cs:defRPr sz="1330" kern="1200"/>
+  </cs:chartArea>
+  <cs:dataLabel>
+    <cs:lnRef idx="0"/>
+    <cs:fillRef idx="0"/>
+    <cs:effectRef idx="0"/>
+    <cs:fontRef idx="minor">
+      <a:schemeClr val="tx1">
+        <a:lumMod val="75000"/>
+        <a:lumOff val="25000"/>
+      </a:schemeClr>
+    </cs:fontRef>
+    <cs:defRPr sz="1197" kern="1200"/>
+  </cs:dataLabel>
+  <cs:dataLabelCallout>
+    <cs:lnRef idx="0"/>
+    <cs:fillRef idx="0"/>
+    <cs:effectRef idx="0"/>
+    <cs:fontRef idx="minor">
+      <a:schemeClr val="dk1">
+        <a:lumMod val="65000"/>
+        <a:lumOff val="35000"/>
+      </a:schemeClr>
+    </cs:fontRef>
+    <cs:spPr>
+      <a:solidFill>
+        <a:schemeClr val="lt1"/>
+      </a:solidFill>
+      <a:ln>
+        <a:solidFill>
+          <a:schemeClr val="dk1">
+            <a:lumMod val="25000"/>
+            <a:lumOff val="75000"/>
+          </a:schemeClr>
+        </a:solidFill>
+      </a:ln>
+    </cs:spPr>
+    <cs:defRPr sz="1197" kern="1200"/>
+    <cs:bodyPr rot="0" spcFirstLastPara="1" vertOverflow="clip" horzOverflow="clip" vert="horz" wrap="square" lIns="36576" tIns="18288" rIns="36576" bIns="18288" anchor="ctr" anchorCtr="1">
+      <a:spAutoFit/>
+    </cs:bodyPr>
+  </cs:dataLabelCallout>
+  <cs:dataPoint>
+    <cs:lnRef idx="0"/>
+    <cs:fillRef idx="1">
+      <cs:styleClr val="auto"/>
+    </cs:fillRef>
+    <cs:effectRef idx="0"/>
+    <cs:fontRef idx="minor">
+      <a:schemeClr val="tx1"/>
+    </cs:fontRef>
+  </cs:dataPoint>
+  <cs:dataPoint3D>
+    <cs:lnRef idx="0"/>
+    <cs:fillRef idx="1">
+      <cs:styleClr val="auto"/>
+    </cs:fillRef>
+    <cs:effectRef idx="0"/>
+    <cs:fontRef idx="minor">
+      <a:schemeClr val="tx1"/>
+    </cs:fontRef>
+  </cs:dataPoint3D>
+  <cs:dataPointLine>
+    <cs:lnRef idx="0">
+      <cs:styleClr val="auto"/>
+    </cs:lnRef>
+    <cs:fillRef idx="1"/>
+    <cs:effectRef idx="0"/>
+    <cs:fontRef idx="minor">
+      <a:schemeClr val="tx1"/>
+    </cs:fontRef>
+    <cs:spPr>
+      <a:ln w="28575" cap="rnd">
+        <a:solidFill>
+          <a:schemeClr val="phClr"/>
+        </a:solidFill>
+        <a:round/>
+      </a:ln>
+    </cs:spPr>
+  </cs:dataPointLine>
+  <cs:dataPointMarker>
+    <cs:lnRef idx="0">
+      <cs:styleClr val="auto"/>
+    </cs:lnRef>
+    <cs:fillRef idx="1">
+      <cs:styleClr val="auto"/>
+    </cs:fillRef>
+    <cs:effectRef idx="0"/>
+    <cs:fontRef idx="minor">
+      <a:schemeClr val="tx1"/>
+    </cs:fontRef>
+    <cs:spPr>
+      <a:ln w="9525">
+        <a:solidFill>
+          <a:schemeClr val="phClr"/>
+        </a:solidFill>
+      </a:ln>
+    </cs:spPr>
+  </cs:dataPointMarker>
+  <cs:dataPointMarkerLayout symbol="circle" size="5"/>
+  <cs:dataPointWireframe>
+    <cs:lnRef idx="0">
+      <cs:styleClr val="auto"/>
+    </cs:lnRef>
+    <cs:fillRef idx="1"/>
+    <cs:effectRef idx="0"/>
+    <cs:fontRef idx="minor">
+      <a:schemeClr val="tx1"/>
+    </cs:fontRef>
+    <cs:spPr>
+      <a:ln w="9525" cap="rnd">
+        <a:solidFill>
+          <a:schemeClr val="phClr"/>
+        </a:solidFill>
+        <a:round/>
+      </a:ln>
+    </cs:spPr>
+  </cs:dataPointWireframe>
+  <cs:dataTable>
+    <cs:lnRef idx="0"/>
+    <cs:fillRef idx="0"/>
+    <cs:effectRef idx="0"/>
+    <cs:fontRef idx="minor">
+      <a:schemeClr val="tx1">
+        <a:lumMod val="65000"/>
+        <a:lumOff val="35000"/>
+      </a:schemeClr>
+    </cs:fontRef>
+    <cs:spPr>
+      <a:noFill/>
+      <a:ln w="9525" cap="flat" cmpd="sng" algn="ctr">
+        <a:solidFill>
+          <a:schemeClr val="tx1">
+            <a:lumMod val="15000"/>
+            <a:lumOff val="85000"/>
+          </a:schemeClr>
+        </a:solidFill>
+        <a:round/>
+      </a:ln>
+    </cs:spPr>
+    <cs:defRPr sz="1197" kern="1200"/>
+  </cs:dataTable>
+  <cs:downBar>
+    <cs:lnRef idx="0"/>
+    <cs:fillRef idx="0"/>
+    <cs:effectRef idx="0"/>
+    <cs:fontRef idx="minor">
+      <a:schemeClr val="dk1"/>
+    </cs:fontRef>
+    <cs:spPr>
+      <a:solidFill>
+        <a:schemeClr val="dk1">
+          <a:lumMod val="65000"/>
+          <a:lumOff val="35000"/>
+        </a:schemeClr>
+      </a:solidFill>
+      <a:ln w="9525">
+        <a:solidFill>
+          <a:schemeClr val="tx1">
+            <a:lumMod val="65000"/>
+            <a:lumOff val="35000"/>
+          </a:schemeClr>
+        </a:solidFill>
+      </a:ln>
+    </cs:spPr>
+  </cs:downBar>
+  <cs:dropLine>
+    <cs:lnRef idx="0"/>
+    <cs:fillRef idx="0"/>
+    <cs:effectRef idx="0"/>
+    <cs:fontRef idx="minor">
+      <a:schemeClr val="tx1"/>
+    </cs:fontRef>
+    <cs:spPr>
+      <a:ln w="9525" cap="flat" cmpd="sng" algn="ctr">
+        <a:solidFill>
+          <a:schemeClr val="tx1">
+            <a:lumMod val="35000"/>
+            <a:lumOff val="65000"/>
+          </a:schemeClr>
+        </a:solidFill>
+        <a:round/>
+      </a:ln>
+    </cs:spPr>
+  </cs:dropLine>
+  <cs:errorBar>
+    <cs:lnRef idx="0"/>
+    <cs:fillRef idx="0"/>
+    <cs:effectRef idx="0"/>
+    <cs:fontRef idx="minor">
+      <a:schemeClr val="tx1"/>
+    </cs:fontRef>
+    <cs:spPr>
+      <a:ln w="9525" cap="flat" cmpd="sng" algn="ctr">
+        <a:solidFill>
+          <a:schemeClr val="tx1">
+            <a:lumMod val="65000"/>
+            <a:lumOff val="35000"/>
+          </a:schemeClr>
+        </a:solidFill>
+        <a:round/>
+      </a:ln>
+    </cs:spPr>
+  </cs:errorBar>
+  <cs:floor>
+    <cs:lnRef idx="0"/>
+    <cs:fillRef idx="0"/>
+    <cs:effectRef idx="0"/>
+    <cs:fontRef idx="minor">
+      <a:schemeClr val="tx1"/>
+    </cs:fontRef>
+    <cs:spPr>
+      <a:noFill/>
+      <a:ln>
+        <a:noFill/>
+      </a:ln>
+    </cs:spPr>
+  </cs:floor>
+  <cs:gridlineMajor>
+    <cs:lnRef idx="0"/>
+    <cs:fillRef idx="0"/>
+    <cs:effectRef idx="0"/>
+    <cs:fontRef idx="minor">
+      <a:schemeClr val="tx1"/>
+    </cs:fontRef>
+    <cs:spPr>
+      <a:ln w="9525" cap="flat" cmpd="sng" algn="ctr">
+        <a:solidFill>
+          <a:schemeClr val="tx1">
+            <a:lumMod val="15000"/>
+            <a:lumOff val="85000"/>
+          </a:schemeClr>
+        </a:solidFill>
+        <a:round/>
+      </a:ln>
+    </cs:spPr>
+  </cs:gridlineMajor>
+  <cs:gridlineMinor>
+    <cs:lnRef idx="0"/>
+    <cs:fillRef idx="0"/>
+    <cs:effectRef idx="0"/>
+    <cs:fontRef idx="minor">
+      <a:schemeClr val="tx1"/>
+    </cs:fontRef>
+    <cs:spPr>
+      <a:ln w="9525" cap="flat" cmpd="sng" algn="ctr">
+        <a:solidFill>
+          <a:schemeClr val="tx1">
+            <a:lumMod val="5000"/>
+            <a:lumOff val="95000"/>
+          </a:schemeClr>
+        </a:solidFill>
+        <a:round/>
+      </a:ln>
+    </cs:spPr>
+  </cs:gridlineMinor>
+  <cs:hiLoLine>
+    <cs:lnRef idx="0"/>
+    <cs:fillRef idx="0"/>
+    <cs:effectRef idx="0"/>
+    <cs:fontRef idx="minor">
+      <a:schemeClr val="tx1"/>
+    </cs:fontRef>
+    <cs:spPr>
+      <a:ln w="9525" cap="flat" cmpd="sng" algn="ctr">
+        <a:solidFill>
+          <a:schemeClr val="tx1">
+            <a:lumMod val="75000"/>
+            <a:lumOff val="25000"/>
+          </a:schemeClr>
+        </a:solidFill>
+        <a:round/>
+      </a:ln>
+    </cs:spPr>
+  </cs:hiLoLine>
+  <cs:leaderLine>
+    <cs:lnRef idx="0"/>
+    <cs:fillRef idx="0"/>
+    <cs:effectRef idx="0"/>
+    <cs:fontRef idx="minor">
+      <a:schemeClr val="tx1"/>
+    </cs:fontRef>
+    <cs:spPr>
+      <a:ln w="9525" cap="flat" cmpd="sng" algn="ctr">
+        <a:solidFill>
+          <a:schemeClr val="tx1">
+            <a:lumMod val="35000"/>
+            <a:lumOff val="65000"/>
+          </a:schemeClr>
+        </a:solidFill>
+        <a:round/>
+      </a:ln>
+    </cs:spPr>
+  </cs:leaderLine>
+  <cs:legend>
+    <cs:lnRef idx="0"/>
+    <cs:fillRef idx="0"/>
+    <cs:effectRef idx="0"/>
+    <cs:fontRef idx="minor">
+      <a:schemeClr val="tx1">
+        <a:lumMod val="65000"/>
+        <a:lumOff val="35000"/>
+      </a:schemeClr>
+    </cs:fontRef>
+    <cs:defRPr sz="1197" kern="1200"/>
+  </cs:legend>
+  <cs:plotArea mods="allowNoFillOverride allowNoLineOverride">
+    <cs:lnRef idx="0"/>
+    <cs:fillRef idx="0"/>
+    <cs:effectRef idx="0"/>
+    <cs:fontRef idx="minor">
+      <a:schemeClr val="tx1"/>
+    </cs:fontRef>
+  </cs:plotArea>
+  <cs:plotArea3D mods="allowNoFillOverride allowNoLineOverride">
+    <cs:lnRef idx="0"/>
+    <cs:fillRef idx="0"/>
+    <cs:effectRef idx="0"/>
+    <cs:fontRef idx="minor">
+      <a:schemeClr val="tx1"/>
+    </cs:fontRef>
+  </cs:plotArea3D>
+  <cs:seriesAxis>
+    <cs:lnRef idx="0"/>
+    <cs:fillRef idx="0"/>
+    <cs:effectRef idx="0"/>
+    <cs:fontRef idx="minor">
+      <a:schemeClr val="tx1">
+        <a:lumMod val="65000"/>
+        <a:lumOff val="35000"/>
+      </a:schemeClr>
+    </cs:fontRef>
+    <cs:defRPr sz="1197" kern="1200"/>
+  </cs:seriesAxis>
+  <cs:seriesLine>
+    <cs:lnRef idx="0"/>
+    <cs:fillRef idx="0"/>
+    <cs:effectRef idx="0"/>
+    <cs:fontRef idx="minor">
+      <a:schemeClr val="tx1"/>
+    </cs:fontRef>
+    <cs:spPr>
+      <a:ln w="9525" cap="flat" cmpd="sng" algn="ctr">
+        <a:solidFill>
+          <a:schemeClr val="tx1">
+            <a:lumMod val="35000"/>
+            <a:lumOff val="65000"/>
+          </a:schemeClr>
+        </a:solidFill>
+        <a:round/>
+      </a:ln>
+    </cs:spPr>
+  </cs:seriesLine>
+  <cs:title>
+    <cs:lnRef idx="0"/>
+    <cs:fillRef idx="0"/>
+    <cs:effectRef idx="0"/>
+    <cs:fontRef idx="minor">
+      <a:schemeClr val="tx1">
+        <a:lumMod val="65000"/>
+        <a:lumOff val="35000"/>
+      </a:schemeClr>
+    </cs:fontRef>
+    <cs:defRPr sz="1862" b="0" kern="1200" spc="0" baseline="0"/>
+  </cs:title>
+  <cs:trendline>
+    <cs:lnRef idx="0">
+      <cs:styleClr val="auto"/>
+    </cs:lnRef>
+    <cs:fillRef idx="0"/>
+    <cs:effectRef idx="0"/>
+    <cs:fontRef idx="minor">
+      <a:schemeClr val="tx1"/>
+    </cs:fontRef>
+    <cs:spPr>
+      <a:ln w="19050" cap="rnd">
+        <a:solidFill>
+          <a:schemeClr val="phClr"/>
+        </a:solidFill>
+        <a:prstDash val="sysDot"/>
+      </a:ln>
+    </cs:spPr>
+  </cs:trendline>
+  <cs:trendlineLabel>
+    <cs:lnRef idx="0"/>
+    <cs:fillRef idx="0"/>
+    <cs:effectRef idx="0"/>
+    <cs:fontRef idx="minor">
+      <a:schemeClr val="tx1">
+        <a:lumMod val="65000"/>
+        <a:lumOff val="35000"/>
+      </a:schemeClr>
+    </cs:fontRef>
+    <cs:defRPr sz="1197" kern="1200"/>
+  </cs:trendlineLabel>
+  <cs:upBar>
+    <cs:lnRef idx="0"/>
+    <cs:fillRef idx="0"/>
+    <cs:effectRef idx="0"/>
+    <cs:fontRef idx="minor">
+      <a:schemeClr val="dk1"/>
+    </cs:fontRef>
+    <cs:spPr>
+      <a:solidFill>
+        <a:schemeClr val="lt1"/>
+      </a:solidFill>
+      <a:ln w="9525">
+        <a:solidFill>
+          <a:schemeClr val="tx1">
+            <a:lumMod val="15000"/>
+            <a:lumOff val="85000"/>
+          </a:schemeClr>
+        </a:solidFill>
+      </a:ln>
+    </cs:spPr>
+  </cs:upBar>
+  <cs:valueAxis>
+    <cs:lnRef idx="0"/>
+    <cs:fillRef idx="0"/>
+    <cs:effectRef idx="0"/>
+    <cs:fontRef idx="minor">
+      <a:schemeClr val="tx1">
+        <a:lumMod val="65000"/>
+        <a:lumOff val="35000"/>
+      </a:schemeClr>
+    </cs:fontRef>
+    <cs:defRPr sz="1197" kern="1200"/>
+  </cs:valueAxis>
+  <cs:wall>
+    <cs:lnRef idx="0"/>
+    <cs:fillRef idx="0"/>
+    <cs:effectRef idx="0"/>
+    <cs:fontRef idx="minor">
+      <a:schemeClr val="tx1"/>
+    </cs:fontRef>
+    <cs:spPr>
+      <a:noFill/>
+      <a:ln>
+        <a:noFill/>
+      </a:ln>
+    </cs:spPr>
+  </cs:wall>
+</cs:chartStyle>
 </file>
 
 <file path=ppt/slideLayouts/slideLayout1.xml><?xml version="1.0" encoding="utf-8"?>
@@ -3168,7 +4208,7 @@
           <a:p>
             <a:pPr algn="l"/>
             <a:r>
-              <a:rPr sz="1100" b="1">
+              <a:rPr sz="1100" b="1" dirty="0">
                 <a:solidFill>
                   <a:srgbClr val="315EFB"/>
                 </a:solidFill>
@@ -3510,76 +4550,6 @@
       </p:sp>
       <p:sp>
         <p:nvSpPr>
-          <p:cNvPr id="12" name="TextBox 11"/>
-          <p:cNvSpPr txBox="1"/>
-          <p:nvPr/>
-        </p:nvSpPr>
-        <p:spPr>
-          <a:xfrm>
-            <a:off x="713232" y="5833872"/>
-            <a:ext cx="4572000" cy="228600"/>
-          </a:xfrm>
-          <a:prstGeom prst="rect">
-            <a:avLst/>
-          </a:prstGeom>
-          <a:noFill/>
-        </p:spPr>
-        <p:txBody>
-          <a:bodyPr wrap="square" lIns="36576" tIns="36576" rIns="36576" bIns="36576">
-            <a:spAutoFit/>
-          </a:bodyPr>
-          <a:lstStyle/>
-          <a:p>
-            <a:pPr algn="l"/>
-            <a:r>
-              <a:rPr sz="1300" b="0">
-                <a:solidFill>
-                  <a:srgbClr val="617087"/>
-                </a:solidFill>
-                <a:latin typeface="Aptos"/>
-              </a:rPr>
-              <a:t>Дмитрий Калягин · 22 октября 2026</a:t>
-            </a:r>
-          </a:p>
-        </p:txBody>
-      </p:sp>
-      <p:sp>
-        <p:nvSpPr>
-          <p:cNvPr id="13" name="TextBox 12"/>
-          <p:cNvSpPr txBox="1"/>
-          <p:nvPr/>
-        </p:nvSpPr>
-        <p:spPr>
-          <a:xfrm>
-            <a:off x="685800" y="6492240"/>
-            <a:ext cx="7315200" cy="164592"/>
-          </a:xfrm>
-          <a:prstGeom prst="rect">
-            <a:avLst/>
-          </a:prstGeom>
-          <a:noFill/>
-        </p:spPr>
-        <p:txBody>
-          <a:bodyPr wrap="square" lIns="36576" tIns="36576" rIns="36576" bIns="36576">
-            <a:spAutoFit/>
-          </a:bodyPr>
-          <a:lstStyle/>
-          <a:p>
-            <a:pPr algn="l"/>
-            <a:r>
-              <a:rPr sz="800" b="0">
-                <a:solidFill>
-                  <a:srgbClr val="617087"/>
-                </a:solidFill>
-                <a:latin typeface="Aptos"/>
-              </a:rPr>
-              <a:t>Цель: первые измерения качества, затрат и времени</a:t>
-            </a:r>
-          </a:p>
-        </p:txBody>
-      </p:sp>
-      <p:sp>
-        <p:nvSpPr>
           <p:cNvPr id="14" name="TextBox 13"/>
           <p:cNvSpPr txBox="1"/>
           <p:nvPr/>
@@ -3743,13 +4713,76 @@
           <a:p>
             <a:pPr algn="l"/>
             <a:r>
-              <a:rPr sz="2700" b="1">
-                <a:solidFill>
-                  <a:srgbClr val="172033"/>
-                </a:solidFill>
-                <a:latin typeface="Aptos"/>
-              </a:rPr>
-              <a:t>ConDefects: реальные ошибки в решениях AtCoder</a:t>
+              <a:rPr sz="2700" b="1" dirty="0" err="1">
+                <a:solidFill>
+                  <a:srgbClr val="172033"/>
+                </a:solidFill>
+                <a:latin typeface="Aptos"/>
+              </a:rPr>
+              <a:t>ConDefects</a:t>
+            </a:r>
+            <a:r>
+              <a:rPr sz="2700" b="1" dirty="0">
+                <a:solidFill>
+                  <a:srgbClr val="172033"/>
+                </a:solidFill>
+                <a:latin typeface="Aptos"/>
+              </a:rPr>
+              <a:t>: </a:t>
+            </a:r>
+            <a:r>
+              <a:rPr sz="2700" b="1" dirty="0" err="1">
+                <a:solidFill>
+                  <a:srgbClr val="172033"/>
+                </a:solidFill>
+                <a:latin typeface="Aptos"/>
+              </a:rPr>
+              <a:t>реальные</a:t>
+            </a:r>
+            <a:r>
+              <a:rPr sz="2700" b="1" dirty="0">
+                <a:solidFill>
+                  <a:srgbClr val="172033"/>
+                </a:solidFill>
+                <a:latin typeface="Aptos"/>
+              </a:rPr>
+              <a:t> </a:t>
+            </a:r>
+            <a:r>
+              <a:rPr sz="2700" b="1" dirty="0" err="1">
+                <a:solidFill>
+                  <a:srgbClr val="172033"/>
+                </a:solidFill>
+                <a:latin typeface="Aptos"/>
+              </a:rPr>
+              <a:t>ошибки</a:t>
+            </a:r>
+            <a:r>
+              <a:rPr sz="2700" b="1" dirty="0">
+                <a:solidFill>
+                  <a:srgbClr val="172033"/>
+                </a:solidFill>
+                <a:latin typeface="Aptos"/>
+              </a:rPr>
+              <a:t> в </a:t>
+            </a:r>
+            <a:r>
+              <a:rPr sz="2700" b="1" dirty="0" err="1">
+                <a:solidFill>
+                  <a:srgbClr val="172033"/>
+                </a:solidFill>
+                <a:latin typeface="Aptos"/>
+              </a:rPr>
+              <a:t>решениях</a:t>
+            </a:r>
+            <a:r>
+              <a:rPr sz="2700" b="1" dirty="0">
+                <a:solidFill>
+                  <a:srgbClr val="172033"/>
+                </a:solidFill>
+                <a:latin typeface="Aptos"/>
+              </a:rPr>
+              <a:t> AtCoder</a:t>
             </a:r>
           </a:p>
         </p:txBody>
@@ -3845,8 +4878,8 @@
         </p:nvSpPr>
         <p:spPr>
           <a:xfrm>
-            <a:off x="886968" y="2331720"/>
-            <a:ext cx="2852928" cy="237744"/>
+            <a:off x="886968" y="2231136"/>
+            <a:ext cx="2852928" cy="609398"/>
           </a:xfrm>
           <a:prstGeom prst="rect">
             <a:avLst/>
@@ -3861,14 +4894,38 @@
           <a:p>
             <a:pPr algn="l"/>
             <a:r>
-              <a:rPr sz="1400" b="1">
-                <a:solidFill>
-                  <a:srgbClr val="172033"/>
-                </a:solidFill>
-                <a:latin typeface="Aptos"/>
-              </a:rPr>
-              <a:t>ошибочных Python-программ</a:t>
-            </a:r>
+              <a:rPr b="1" dirty="0" err="1">
+                <a:solidFill>
+                  <a:srgbClr val="172033"/>
+                </a:solidFill>
+                <a:latin typeface="Aptos"/>
+              </a:rPr>
+              <a:t>ошибочных</a:t>
+            </a:r>
+            <a:r>
+              <a:rPr b="1" dirty="0">
+                <a:solidFill>
+                  <a:srgbClr val="172033"/>
+                </a:solidFill>
+                <a:latin typeface="Aptos"/>
+              </a:rPr>
+              <a:t> Python-</a:t>
+            </a:r>
+            <a:r>
+              <a:rPr b="1" dirty="0" err="1">
+                <a:solidFill>
+                  <a:srgbClr val="172033"/>
+                </a:solidFill>
+                <a:latin typeface="Aptos"/>
+              </a:rPr>
+              <a:t>программ</a:t>
+            </a:r>
+            <a:endParaRPr b="1" dirty="0">
+              <a:solidFill>
+                <a:srgbClr val="172033"/>
+              </a:solidFill>
+              <a:latin typeface="Aptos"/>
+            </a:endParaRPr>
           </a:p>
         </p:txBody>
       </p:sp>
@@ -3880,8 +4937,8 @@
         </p:nvSpPr>
         <p:spPr>
           <a:xfrm>
-            <a:off x="886968" y="2852928"/>
-            <a:ext cx="2852928" cy="1417320"/>
+            <a:off x="847191" y="3342119"/>
+            <a:ext cx="3051353" cy="1127937"/>
           </a:xfrm>
           <a:prstGeom prst="rect">
             <a:avLst/>
@@ -3894,16 +4951,163 @@
           </a:bodyPr>
           <a:lstStyle/>
           <a:p>
-            <a:pPr algn="l"/>
-            <a:r>
-              <a:rPr sz="1300" b="0">
-                <a:solidFill>
-                  <a:srgbClr val="617087"/>
-                </a:solidFill>
-                <a:latin typeface="Aptos"/>
-              </a:rPr>
-              <a:t>985 уникальных задач; в среднем 49,03 строки и 2,91 функции.</a:t>
-            </a:r>
+            <a:pPr marL="285750" indent="-285750">
+              <a:lnSpc>
+                <a:spcPct val="150000"/>
+              </a:lnSpc>
+              <a:buFont typeface="Arial" panose="020B0604020202020204" pitchFamily="34" charset="0"/>
+              <a:buChar char="•"/>
+            </a:pPr>
+            <a:r>
+              <a:rPr sz="1600" b="0" dirty="0">
+                <a:solidFill>
+                  <a:srgbClr val="617087"/>
+                </a:solidFill>
+                <a:latin typeface="Aptos"/>
+              </a:rPr>
+              <a:t>985 </a:t>
+            </a:r>
+            <a:r>
+              <a:rPr sz="1600" b="0" dirty="0" err="1">
+                <a:solidFill>
+                  <a:srgbClr val="617087"/>
+                </a:solidFill>
+                <a:latin typeface="Aptos"/>
+              </a:rPr>
+              <a:t>уникальных</a:t>
+            </a:r>
+            <a:r>
+              <a:rPr sz="1600" b="0" dirty="0">
+                <a:solidFill>
+                  <a:srgbClr val="617087"/>
+                </a:solidFill>
+                <a:latin typeface="Aptos"/>
+              </a:rPr>
+              <a:t> </a:t>
+            </a:r>
+            <a:r>
+              <a:rPr lang="ru-RU" sz="1600" dirty="0">
+                <a:solidFill>
+                  <a:srgbClr val="617087"/>
+                </a:solidFill>
+                <a:latin typeface="Aptos"/>
+              </a:rPr>
+              <a:t>алгоритмов</a:t>
+            </a:r>
+          </a:p>
+          <a:p>
+            <a:pPr marL="285750" indent="-285750">
+              <a:lnSpc>
+                <a:spcPct val="150000"/>
+              </a:lnSpc>
+              <a:buFont typeface="Arial" panose="020B0604020202020204" pitchFamily="34" charset="0"/>
+              <a:buChar char="•"/>
+            </a:pPr>
+            <a:r>
+              <a:rPr lang="ru-RU" sz="1600" dirty="0">
+                <a:solidFill>
+                  <a:srgbClr val="617087"/>
+                </a:solidFill>
+                <a:latin typeface="Aptos"/>
+              </a:rPr>
+              <a:t>В</a:t>
+            </a:r>
+            <a:r>
+              <a:rPr sz="1600" b="0" dirty="0">
+                <a:solidFill>
+                  <a:srgbClr val="617087"/>
+                </a:solidFill>
+                <a:latin typeface="Aptos"/>
+              </a:rPr>
+              <a:t> </a:t>
+            </a:r>
+            <a:r>
+              <a:rPr sz="1600" b="0" dirty="0" err="1">
+                <a:solidFill>
+                  <a:srgbClr val="617087"/>
+                </a:solidFill>
+                <a:latin typeface="Aptos"/>
+              </a:rPr>
+              <a:t>среднем</a:t>
+            </a:r>
+            <a:r>
+              <a:rPr sz="1600" b="0" dirty="0">
+                <a:solidFill>
+                  <a:srgbClr val="617087"/>
+                </a:solidFill>
+                <a:latin typeface="Aptos"/>
+              </a:rPr>
+              <a:t> 49</a:t>
+            </a:r>
+            <a:r>
+              <a:rPr lang="en-US" sz="1600" b="0" dirty="0">
+                <a:solidFill>
+                  <a:srgbClr val="617087"/>
+                </a:solidFill>
+                <a:latin typeface="Aptos"/>
+              </a:rPr>
+              <a:t>.</a:t>
+            </a:r>
+            <a:r>
+              <a:rPr sz="1600" b="0" dirty="0">
+                <a:solidFill>
+                  <a:srgbClr val="617087"/>
+                </a:solidFill>
+                <a:latin typeface="Aptos"/>
+              </a:rPr>
+              <a:t>03 </a:t>
+            </a:r>
+            <a:r>
+              <a:rPr sz="1600" b="0" dirty="0" err="1">
+                <a:solidFill>
+                  <a:srgbClr val="617087"/>
+                </a:solidFill>
+                <a:latin typeface="Aptos"/>
+              </a:rPr>
+              <a:t>строки</a:t>
+            </a:r>
+            <a:r>
+              <a:rPr sz="1600" b="0" dirty="0">
+                <a:solidFill>
+                  <a:srgbClr val="617087"/>
+                </a:solidFill>
+                <a:latin typeface="Aptos"/>
+              </a:rPr>
+              <a:t> и 2</a:t>
+            </a:r>
+            <a:r>
+              <a:rPr lang="en-US" sz="1600" b="0" dirty="0">
+                <a:solidFill>
+                  <a:srgbClr val="617087"/>
+                </a:solidFill>
+                <a:latin typeface="Aptos"/>
+              </a:rPr>
+              <a:t>.</a:t>
+            </a:r>
+            <a:r>
+              <a:rPr sz="1600" b="0" dirty="0">
+                <a:solidFill>
+                  <a:srgbClr val="617087"/>
+                </a:solidFill>
+                <a:latin typeface="Aptos"/>
+              </a:rPr>
+              <a:t>91 </a:t>
+            </a:r>
+            <a:r>
+              <a:rPr sz="1600" b="0" dirty="0" err="1">
+                <a:solidFill>
+                  <a:srgbClr val="617087"/>
+                </a:solidFill>
+                <a:latin typeface="Aptos"/>
+              </a:rPr>
+              <a:t>функции</a:t>
+            </a:r>
+            <a:endParaRPr sz="1600" b="0" dirty="0">
+              <a:solidFill>
+                <a:srgbClr val="617087"/>
+              </a:solidFill>
+              <a:latin typeface="Aptos"/>
+            </a:endParaRPr>
           </a:p>
         </p:txBody>
       </p:sp>
@@ -3963,8 +5167,8 @@
         </p:nvSpPr>
         <p:spPr>
           <a:xfrm>
-            <a:off x="4681728" y="1810512"/>
-            <a:ext cx="2907792" cy="420624"/>
+            <a:off x="4681728" y="2139696"/>
+            <a:ext cx="2907792" cy="332399"/>
           </a:xfrm>
           <a:prstGeom prst="rect">
             <a:avLst/>
@@ -3977,16 +5181,58 @@
           </a:bodyPr>
           <a:lstStyle/>
           <a:p>
-            <a:pPr algn="l"/>
-            <a:r>
-              <a:rPr sz="1700" b="1">
-                <a:solidFill>
-                  <a:srgbClr val="172033"/>
-                </a:solidFill>
-                <a:latin typeface="Aptos"/>
-              </a:rPr>
-              <a:t>Что содержит пример</a:t>
-            </a:r>
+            <a:pPr algn="ctr"/>
+            <a:r>
+              <a:rPr b="1" dirty="0" err="1">
+                <a:solidFill>
+                  <a:srgbClr val="172033"/>
+                </a:solidFill>
+                <a:latin typeface="Aptos"/>
+              </a:rPr>
+              <a:t>Что</a:t>
+            </a:r>
+            <a:r>
+              <a:rPr b="1" dirty="0">
+                <a:solidFill>
+                  <a:srgbClr val="172033"/>
+                </a:solidFill>
+                <a:latin typeface="Aptos"/>
+              </a:rPr>
+              <a:t> </a:t>
+            </a:r>
+            <a:r>
+              <a:rPr b="1" dirty="0" err="1">
+                <a:solidFill>
+                  <a:srgbClr val="172033"/>
+                </a:solidFill>
+                <a:latin typeface="Aptos"/>
+              </a:rPr>
+              <a:t>содержит</a:t>
+            </a:r>
+            <a:r>
+              <a:rPr b="1" dirty="0">
+                <a:solidFill>
+                  <a:srgbClr val="172033"/>
+                </a:solidFill>
+                <a:latin typeface="Aptos"/>
+              </a:rPr>
+              <a:t> </a:t>
+            </a:r>
+            <a:r>
+              <a:rPr b="1" dirty="0" err="1">
+                <a:solidFill>
+                  <a:srgbClr val="172033"/>
+                </a:solidFill>
+                <a:latin typeface="Aptos"/>
+              </a:rPr>
+              <a:t>пример</a:t>
+            </a:r>
+            <a:endParaRPr b="1" dirty="0">
+              <a:solidFill>
+                <a:srgbClr val="172033"/>
+              </a:solidFill>
+              <a:latin typeface="Aptos"/>
+            </a:endParaRPr>
           </a:p>
         </p:txBody>
       </p:sp>
@@ -4025,8 +5271,8 @@
         </p:nvSpPr>
         <p:spPr>
           <a:xfrm>
-            <a:off x="4681728" y="2852928"/>
-            <a:ext cx="2852928" cy="1417320"/>
+            <a:off x="4745736" y="2755559"/>
+            <a:ext cx="2852928" cy="1866601"/>
           </a:xfrm>
           <a:prstGeom prst="rect">
             <a:avLst/>
@@ -4039,15 +5285,280 @@
           </a:bodyPr>
           <a:lstStyle/>
           <a:p>
-            <a:pPr algn="l"/>
-            <a:r>
-              <a:rPr sz="1300" b="0">
-                <a:solidFill>
-                  <a:srgbClr val="617087"/>
-                </a:solidFill>
-                <a:latin typeface="Aptos"/>
-              </a:rPr>
-              <a:t>Ошибочная и исправленная версия, размеченная строка ошибки, тесты, дата и рейтинг задачи. Исправление проверяется на всех тестах.</a:t>
+            <a:pPr algn="l">
+              <a:lnSpc>
+                <a:spcPct val="150000"/>
+              </a:lnSpc>
+            </a:pPr>
+            <a:r>
+              <a:rPr sz="1600" b="0" dirty="0" err="1">
+                <a:solidFill>
+                  <a:srgbClr val="617087"/>
+                </a:solidFill>
+                <a:latin typeface="Aptos"/>
+              </a:rPr>
+              <a:t>Ошибочная</a:t>
+            </a:r>
+            <a:r>
+              <a:rPr sz="1600" b="0" dirty="0">
+                <a:solidFill>
+                  <a:srgbClr val="617087"/>
+                </a:solidFill>
+                <a:latin typeface="Aptos"/>
+              </a:rPr>
+              <a:t> и </a:t>
+            </a:r>
+            <a:r>
+              <a:rPr sz="1600" b="0" dirty="0" err="1">
+                <a:solidFill>
+                  <a:srgbClr val="617087"/>
+                </a:solidFill>
+                <a:latin typeface="Aptos"/>
+              </a:rPr>
+              <a:t>исправленная</a:t>
+            </a:r>
+            <a:r>
+              <a:rPr sz="1600" b="0" dirty="0">
+                <a:solidFill>
+                  <a:srgbClr val="617087"/>
+                </a:solidFill>
+                <a:latin typeface="Aptos"/>
+              </a:rPr>
+              <a:t> </a:t>
+            </a:r>
+            <a:r>
+              <a:rPr sz="1600" b="0" dirty="0" err="1">
+                <a:solidFill>
+                  <a:srgbClr val="617087"/>
+                </a:solidFill>
+                <a:latin typeface="Aptos"/>
+              </a:rPr>
+              <a:t>версия</a:t>
+            </a:r>
+            <a:r>
+              <a:rPr sz="1600" b="0" dirty="0">
+                <a:solidFill>
+                  <a:srgbClr val="617087"/>
+                </a:solidFill>
+                <a:latin typeface="Aptos"/>
+              </a:rPr>
+              <a:t>, </a:t>
+            </a:r>
+            <a:r>
+              <a:rPr sz="1600" b="0" dirty="0" err="1">
+                <a:solidFill>
+                  <a:srgbClr val="617087"/>
+                </a:solidFill>
+                <a:latin typeface="Aptos"/>
+              </a:rPr>
+              <a:t>размеченная</a:t>
+            </a:r>
+            <a:r>
+              <a:rPr sz="1600" b="0" dirty="0">
+                <a:solidFill>
+                  <a:srgbClr val="617087"/>
+                </a:solidFill>
+                <a:latin typeface="Aptos"/>
+              </a:rPr>
+              <a:t> </a:t>
+            </a:r>
+            <a:r>
+              <a:rPr sz="1600" b="0" dirty="0" err="1">
+                <a:solidFill>
+                  <a:srgbClr val="617087"/>
+                </a:solidFill>
+                <a:latin typeface="Aptos"/>
+              </a:rPr>
+              <a:t>строка</a:t>
+            </a:r>
+            <a:r>
+              <a:rPr sz="1600" b="0" dirty="0">
+                <a:solidFill>
+                  <a:srgbClr val="617087"/>
+                </a:solidFill>
+                <a:latin typeface="Aptos"/>
+              </a:rPr>
+              <a:t> </a:t>
+            </a:r>
+            <a:r>
+              <a:rPr sz="1600" b="0" dirty="0" err="1">
+                <a:solidFill>
+                  <a:srgbClr val="617087"/>
+                </a:solidFill>
+                <a:latin typeface="Aptos"/>
+              </a:rPr>
+              <a:t>ошибки</a:t>
+            </a:r>
+            <a:r>
+              <a:rPr sz="1600" b="0" dirty="0">
+                <a:solidFill>
+                  <a:srgbClr val="617087"/>
+                </a:solidFill>
+                <a:latin typeface="Aptos"/>
+              </a:rPr>
+              <a:t>, </a:t>
+            </a:r>
+            <a:r>
+              <a:rPr sz="1600" b="0" dirty="0" err="1">
+                <a:solidFill>
+                  <a:srgbClr val="617087"/>
+                </a:solidFill>
+                <a:latin typeface="Aptos"/>
+              </a:rPr>
+              <a:t>тесты</a:t>
+            </a:r>
+            <a:r>
+              <a:rPr sz="1600" b="0" dirty="0">
+                <a:solidFill>
+                  <a:srgbClr val="617087"/>
+                </a:solidFill>
+                <a:latin typeface="Aptos"/>
+              </a:rPr>
+              <a:t>, </a:t>
+            </a:r>
+            <a:r>
+              <a:rPr sz="1600" b="0" dirty="0" err="1">
+                <a:solidFill>
+                  <a:srgbClr val="617087"/>
+                </a:solidFill>
+                <a:latin typeface="Aptos"/>
+              </a:rPr>
+              <a:t>дата</a:t>
+            </a:r>
+            <a:r>
+              <a:rPr sz="1600" b="0" dirty="0">
+                <a:solidFill>
+                  <a:srgbClr val="617087"/>
+                </a:solidFill>
+                <a:latin typeface="Aptos"/>
+              </a:rPr>
+              <a:t> и </a:t>
+            </a:r>
+            <a:r>
+              <a:rPr sz="1600" b="0" dirty="0" err="1">
+                <a:solidFill>
+                  <a:srgbClr val="617087"/>
+                </a:solidFill>
+                <a:latin typeface="Aptos"/>
+              </a:rPr>
+              <a:t>рейтинг</a:t>
+            </a:r>
+            <a:r>
+              <a:rPr sz="1600" b="0" dirty="0">
+                <a:solidFill>
+                  <a:srgbClr val="617087"/>
+                </a:solidFill>
+                <a:latin typeface="Aptos"/>
+              </a:rPr>
+              <a:t> </a:t>
+            </a:r>
+            <a:r>
+              <a:rPr sz="1600" b="0" dirty="0" err="1">
+                <a:solidFill>
+                  <a:srgbClr val="617087"/>
+                </a:solidFill>
+                <a:latin typeface="Aptos"/>
+              </a:rPr>
+              <a:t>задачи</a:t>
+            </a:r>
+            <a:r>
+              <a:rPr sz="1600" b="0" dirty="0">
+                <a:solidFill>
+                  <a:srgbClr val="617087"/>
+                </a:solidFill>
+                <a:latin typeface="Aptos"/>
+              </a:rPr>
+              <a:t>. </a:t>
+            </a:r>
+            <a:r>
+              <a:rPr sz="1600" b="0" dirty="0" err="1">
+                <a:solidFill>
+                  <a:srgbClr val="617087"/>
+                </a:solidFill>
+                <a:latin typeface="Aptos"/>
+              </a:rPr>
+              <a:t>Исправление</a:t>
+            </a:r>
+            <a:r>
+              <a:rPr sz="1600" b="0" dirty="0">
+                <a:solidFill>
+                  <a:srgbClr val="617087"/>
+                </a:solidFill>
+                <a:latin typeface="Aptos"/>
+              </a:rPr>
+              <a:t> </a:t>
+            </a:r>
+            <a:r>
+              <a:rPr sz="1600" b="0" dirty="0" err="1">
+                <a:solidFill>
+                  <a:srgbClr val="617087"/>
+                </a:solidFill>
+                <a:latin typeface="Aptos"/>
+              </a:rPr>
+              <a:t>проверяется</a:t>
+            </a:r>
+            <a:r>
+              <a:rPr sz="1600" b="0" dirty="0">
+                <a:solidFill>
+                  <a:srgbClr val="617087"/>
+                </a:solidFill>
+                <a:latin typeface="Aptos"/>
+              </a:rPr>
+              <a:t> </a:t>
+            </a:r>
+            <a:r>
+              <a:rPr sz="1600" b="0" dirty="0" err="1">
+                <a:solidFill>
+                  <a:srgbClr val="617087"/>
+                </a:solidFill>
+                <a:latin typeface="Aptos"/>
+              </a:rPr>
+              <a:t>на</a:t>
+            </a:r>
+            <a:r>
+              <a:rPr sz="1600" b="0" dirty="0">
+                <a:solidFill>
+                  <a:srgbClr val="617087"/>
+                </a:solidFill>
+                <a:latin typeface="Aptos"/>
+              </a:rPr>
+              <a:t> </a:t>
+            </a:r>
+            <a:r>
+              <a:rPr sz="1600" b="0" dirty="0" err="1">
+                <a:solidFill>
+                  <a:srgbClr val="617087"/>
+                </a:solidFill>
+                <a:latin typeface="Aptos"/>
+              </a:rPr>
+              <a:t>всех</a:t>
+            </a:r>
+            <a:r>
+              <a:rPr sz="1600" b="0" dirty="0">
+                <a:solidFill>
+                  <a:srgbClr val="617087"/>
+                </a:solidFill>
+                <a:latin typeface="Aptos"/>
+              </a:rPr>
+              <a:t> </a:t>
+            </a:r>
+            <a:r>
+              <a:rPr sz="1600" b="0" dirty="0" err="1">
+                <a:solidFill>
+                  <a:srgbClr val="617087"/>
+                </a:solidFill>
+                <a:latin typeface="Aptos"/>
+              </a:rPr>
+              <a:t>тестах</a:t>
+            </a:r>
+            <a:r>
+              <a:rPr sz="1600" b="0" dirty="0">
+                <a:solidFill>
+                  <a:srgbClr val="617087"/>
+                </a:solidFill>
+                <a:latin typeface="Aptos"/>
+              </a:rPr>
+              <a:t>.</a:t>
             </a:r>
           </a:p>
         </p:txBody>
@@ -4108,8 +5619,8 @@
         </p:nvSpPr>
         <p:spPr>
           <a:xfrm>
-            <a:off x="8476488" y="1810512"/>
-            <a:ext cx="2907792" cy="420624"/>
+            <a:off x="8508492" y="2139696"/>
+            <a:ext cx="2907792" cy="332399"/>
           </a:xfrm>
           <a:prstGeom prst="rect">
             <a:avLst/>
@@ -4122,16 +5633,58 @@
           </a:bodyPr>
           <a:lstStyle/>
           <a:p>
-            <a:pPr algn="l"/>
-            <a:r>
-              <a:rPr sz="1700" b="1">
-                <a:solidFill>
-                  <a:srgbClr val="172033"/>
-                </a:solidFill>
-                <a:latin typeface="Aptos"/>
-              </a:rPr>
-              <a:t>Как используем в проекте</a:t>
-            </a:r>
+            <a:pPr algn="ctr"/>
+            <a:r>
+              <a:rPr b="1" dirty="0" err="1">
+                <a:solidFill>
+                  <a:srgbClr val="172033"/>
+                </a:solidFill>
+                <a:latin typeface="Aptos"/>
+              </a:rPr>
+              <a:t>Как</a:t>
+            </a:r>
+            <a:r>
+              <a:rPr b="1" dirty="0">
+                <a:solidFill>
+                  <a:srgbClr val="172033"/>
+                </a:solidFill>
+                <a:latin typeface="Aptos"/>
+              </a:rPr>
+              <a:t> </a:t>
+            </a:r>
+            <a:r>
+              <a:rPr b="1" dirty="0" err="1">
+                <a:solidFill>
+                  <a:srgbClr val="172033"/>
+                </a:solidFill>
+                <a:latin typeface="Aptos"/>
+              </a:rPr>
+              <a:t>используем</a:t>
+            </a:r>
+            <a:r>
+              <a:rPr b="1" dirty="0">
+                <a:solidFill>
+                  <a:srgbClr val="172033"/>
+                </a:solidFill>
+                <a:latin typeface="Aptos"/>
+              </a:rPr>
+              <a:t> в </a:t>
+            </a:r>
+            <a:r>
+              <a:rPr b="1" dirty="0" err="1">
+                <a:solidFill>
+                  <a:srgbClr val="172033"/>
+                </a:solidFill>
+                <a:latin typeface="Aptos"/>
+              </a:rPr>
+              <a:t>проекте</a:t>
+            </a:r>
+            <a:endParaRPr b="1" dirty="0">
+              <a:solidFill>
+                <a:srgbClr val="172033"/>
+              </a:solidFill>
+              <a:latin typeface="Aptos"/>
+            </a:endParaRPr>
           </a:p>
         </p:txBody>
       </p:sp>
@@ -4170,8 +5723,8 @@
         </p:nvSpPr>
         <p:spPr>
           <a:xfrm>
-            <a:off x="8476488" y="2852928"/>
-            <a:ext cx="2852928" cy="1417320"/>
+            <a:off x="8563356" y="3246120"/>
+            <a:ext cx="2852928" cy="1127937"/>
           </a:xfrm>
           <a:prstGeom prst="rect">
             <a:avLst/>
@@ -4184,16 +5737,160 @@
           </a:bodyPr>
           <a:lstStyle/>
           <a:p>
-            <a:pPr algn="l"/>
-            <a:r>
-              <a:rPr sz="1300" b="0">
-                <a:solidFill>
-                  <a:srgbClr val="617087"/>
-                </a:solidFill>
-                <a:latin typeface="Aptos"/>
-              </a:rPr>
-              <a:t>Только Python; ревизия ConDefects закреплена в конфиге. Пилот — 30 задач dev, по 10 на уровень. Тесты: Test.zip или зеркало AtCoder.</a:t>
-            </a:r>
+            <a:pPr marL="285750" indent="-285750" algn="l">
+              <a:lnSpc>
+                <a:spcPct val="150000"/>
+              </a:lnSpc>
+              <a:buFont typeface="Arial" panose="020B0604020202020204" pitchFamily="34" charset="0"/>
+              <a:buChar char="•"/>
+            </a:pPr>
+            <a:r>
+              <a:rPr sz="1600" b="0" dirty="0" err="1">
+                <a:solidFill>
+                  <a:srgbClr val="617087"/>
+                </a:solidFill>
+                <a:latin typeface="Aptos"/>
+              </a:rPr>
+              <a:t>Только</a:t>
+            </a:r>
+            <a:r>
+              <a:rPr sz="1600" b="0" dirty="0">
+                <a:solidFill>
+                  <a:srgbClr val="617087"/>
+                </a:solidFill>
+                <a:latin typeface="Aptos"/>
+              </a:rPr>
+              <a:t> Python</a:t>
+            </a:r>
+            <a:r>
+              <a:rPr lang="ru-RU" sz="1600" b="0" dirty="0">
+                <a:solidFill>
+                  <a:srgbClr val="617087"/>
+                </a:solidFill>
+                <a:latin typeface="Aptos"/>
+              </a:rPr>
+              <a:t> алгоритмы</a:t>
+            </a:r>
+            <a:endParaRPr lang="ru-RU" sz="1600" dirty="0">
+              <a:solidFill>
+                <a:srgbClr val="617087"/>
+              </a:solidFill>
+              <a:latin typeface="Aptos"/>
+            </a:endParaRPr>
+          </a:p>
+          <a:p>
+            <a:pPr marL="285750" indent="-285750" algn="l">
+              <a:lnSpc>
+                <a:spcPct val="150000"/>
+              </a:lnSpc>
+              <a:buFont typeface="Arial" panose="020B0604020202020204" pitchFamily="34" charset="0"/>
+              <a:buChar char="•"/>
+            </a:pPr>
+            <a:r>
+              <a:rPr sz="1600" b="0" dirty="0" err="1">
+                <a:solidFill>
+                  <a:srgbClr val="617087"/>
+                </a:solidFill>
+                <a:latin typeface="Aptos"/>
+              </a:rPr>
+              <a:t>Пилот</a:t>
+            </a:r>
+            <a:r>
+              <a:rPr sz="1600" b="0" dirty="0">
+                <a:solidFill>
+                  <a:srgbClr val="617087"/>
+                </a:solidFill>
+                <a:latin typeface="Aptos"/>
+              </a:rPr>
+              <a:t> </a:t>
+            </a:r>
+            <a:r>
+              <a:rPr lang="ru-RU" sz="1600" dirty="0">
+                <a:solidFill>
+                  <a:srgbClr val="617087"/>
+                </a:solidFill>
+                <a:latin typeface="Aptos"/>
+              </a:rPr>
+              <a:t>-</a:t>
+            </a:r>
+            <a:r>
+              <a:rPr sz="1600" b="0" dirty="0">
+                <a:solidFill>
+                  <a:srgbClr val="617087"/>
+                </a:solidFill>
+                <a:latin typeface="Aptos"/>
+              </a:rPr>
+              <a:t> 30 </a:t>
+            </a:r>
+            <a:r>
+              <a:rPr sz="1600" b="0" dirty="0" err="1">
+                <a:solidFill>
+                  <a:srgbClr val="617087"/>
+                </a:solidFill>
+                <a:latin typeface="Aptos"/>
+              </a:rPr>
+              <a:t>задач</a:t>
+            </a:r>
+            <a:r>
+              <a:rPr sz="1600" b="0" dirty="0">
+                <a:solidFill>
+                  <a:srgbClr val="617087"/>
+                </a:solidFill>
+                <a:latin typeface="Aptos"/>
+              </a:rPr>
+              <a:t> dev, </a:t>
+            </a:r>
+            <a:r>
+              <a:rPr sz="1600" b="0" dirty="0" err="1">
+                <a:solidFill>
+                  <a:srgbClr val="617087"/>
+                </a:solidFill>
+                <a:latin typeface="Aptos"/>
+              </a:rPr>
+              <a:t>по</a:t>
+            </a:r>
+            <a:r>
+              <a:rPr sz="1600" b="0" dirty="0">
+                <a:solidFill>
+                  <a:srgbClr val="617087"/>
+                </a:solidFill>
+                <a:latin typeface="Aptos"/>
+              </a:rPr>
+              <a:t> 10 </a:t>
+            </a:r>
+            <a:r>
+              <a:rPr sz="1600" b="0" dirty="0" err="1">
+                <a:solidFill>
+                  <a:srgbClr val="617087"/>
+                </a:solidFill>
+                <a:latin typeface="Aptos"/>
+              </a:rPr>
+              <a:t>на</a:t>
+            </a:r>
+            <a:r>
+              <a:rPr sz="1600" b="0" dirty="0">
+                <a:solidFill>
+                  <a:srgbClr val="617087"/>
+                </a:solidFill>
+                <a:latin typeface="Aptos"/>
+              </a:rPr>
+              <a:t> </a:t>
+            </a:r>
+            <a:r>
+              <a:rPr sz="1600" b="0" dirty="0" err="1">
+                <a:solidFill>
+                  <a:srgbClr val="617087"/>
+                </a:solidFill>
+                <a:latin typeface="Aptos"/>
+              </a:rPr>
+              <a:t>уровень</a:t>
+            </a:r>
+            <a:endParaRPr lang="ru-RU" sz="1600" b="0" dirty="0">
+              <a:solidFill>
+                <a:srgbClr val="617087"/>
+              </a:solidFill>
+              <a:latin typeface="Aptos"/>
+            </a:endParaRPr>
           </a:p>
         </p:txBody>
       </p:sp>
@@ -4205,7 +5902,7 @@
         </p:nvSpPr>
         <p:spPr>
           <a:xfrm>
-            <a:off x="658368" y="5303520"/>
+            <a:off x="658368" y="5596128"/>
             <a:ext cx="10863072" cy="621792"/>
           </a:xfrm>
           <a:prstGeom prst="roundRect">
@@ -4253,8 +5950,8 @@
         </p:nvSpPr>
         <p:spPr>
           <a:xfrm>
-            <a:off x="859536" y="5449824"/>
-            <a:ext cx="10424160" cy="310896"/>
+            <a:off x="859536" y="5669280"/>
+            <a:ext cx="10424160" cy="486287"/>
           </a:xfrm>
           <a:prstGeom prst="rect">
             <a:avLst/>
@@ -4269,48 +5966,211 @@
           <a:p>
             <a:pPr algn="l"/>
             <a:r>
-              <a:rPr sz="1000" b="0">
-                <a:solidFill>
-                  <a:srgbClr val="172033"/>
-                </a:solidFill>
-                <a:latin typeface="Aptos"/>
-              </a:rPr>
-              <a:t>Сложность пилота: easy 0–400, medium 400–1300, hard ≥1300. Ограничение: небольшие изолированные программы и однострочные ошибки, а не большие проекты.</a:t>
-            </a:r>
-          </a:p>
-        </p:txBody>
-      </p:sp>
-      <p:sp>
-        <p:nvSpPr>
-          <p:cNvPr id="19" name="TextBox 18"/>
-          <p:cNvSpPr txBox="1"/>
-          <p:nvPr/>
-        </p:nvSpPr>
-        <p:spPr>
-          <a:xfrm>
-            <a:off x="658368" y="6492240"/>
-            <a:ext cx="8229600" cy="164592"/>
-          </a:xfrm>
-          <a:prstGeom prst="rect">
-            <a:avLst/>
-          </a:prstGeom>
-          <a:noFill/>
-        </p:spPr>
-        <p:txBody>
-          <a:bodyPr wrap="square" lIns="36576" tIns="27432" rIns="36576" bIns="27432">
-            <a:spAutoFit/>
-          </a:bodyPr>
-          <a:lstStyle/>
+              <a:rPr sz="1400" b="0" dirty="0" err="1">
+                <a:solidFill>
+                  <a:srgbClr val="172033"/>
+                </a:solidFill>
+                <a:latin typeface="Aptos"/>
+              </a:rPr>
+              <a:t>Сложность</a:t>
+            </a:r>
+            <a:r>
+              <a:rPr sz="1400" b="0" dirty="0">
+                <a:solidFill>
+                  <a:srgbClr val="172033"/>
+                </a:solidFill>
+                <a:latin typeface="Aptos"/>
+              </a:rPr>
+              <a:t> </a:t>
+            </a:r>
+            <a:r>
+              <a:rPr sz="1400" b="0" dirty="0" err="1">
+                <a:solidFill>
+                  <a:srgbClr val="172033"/>
+                </a:solidFill>
+                <a:latin typeface="Aptos"/>
+              </a:rPr>
+              <a:t>пилота</a:t>
+            </a:r>
+            <a:r>
+              <a:rPr sz="1400" b="0" dirty="0">
+                <a:solidFill>
+                  <a:srgbClr val="172033"/>
+                </a:solidFill>
+                <a:latin typeface="Aptos"/>
+              </a:rPr>
+              <a:t>: easy 0–400, medium 400–1300, hard ≥1300. </a:t>
+            </a:r>
+            <a:endParaRPr lang="en-US" sz="1400" b="0" dirty="0">
+              <a:solidFill>
+                <a:srgbClr val="172033"/>
+              </a:solidFill>
+              <a:latin typeface="Aptos"/>
+            </a:endParaRPr>
+          </a:p>
           <a:p>
             <a:pPr algn="l"/>
             <a:r>
-              <a:rPr sz="800" b="0">
-                <a:solidFill>
-                  <a:srgbClr val="617087"/>
-                </a:solidFill>
-                <a:latin typeface="Aptos"/>
-              </a:rPr>
-              <a:t>Источник: ConDefects README, update 2024/6; ревизия данных задана в configs/data.yaml</a:t>
+              <a:rPr sz="1400" b="0" dirty="0" err="1">
+                <a:solidFill>
+                  <a:srgbClr val="172033"/>
+                </a:solidFill>
+                <a:latin typeface="Aptos"/>
+              </a:rPr>
+              <a:t>Ограничение</a:t>
+            </a:r>
+            <a:r>
+              <a:rPr sz="1400" b="0" dirty="0">
+                <a:solidFill>
+                  <a:srgbClr val="172033"/>
+                </a:solidFill>
+                <a:latin typeface="Aptos"/>
+              </a:rPr>
+              <a:t>: </a:t>
+            </a:r>
+            <a:r>
+              <a:rPr sz="1400" b="0" dirty="0" err="1">
+                <a:solidFill>
+                  <a:srgbClr val="172033"/>
+                </a:solidFill>
+                <a:latin typeface="Aptos"/>
+              </a:rPr>
+              <a:t>небольшие</a:t>
+            </a:r>
+            <a:r>
+              <a:rPr sz="1400" b="0" dirty="0">
+                <a:solidFill>
+                  <a:srgbClr val="172033"/>
+                </a:solidFill>
+                <a:latin typeface="Aptos"/>
+              </a:rPr>
+              <a:t> </a:t>
+            </a:r>
+            <a:r>
+              <a:rPr sz="1400" b="0" dirty="0" err="1">
+                <a:solidFill>
+                  <a:srgbClr val="172033"/>
+                </a:solidFill>
+                <a:latin typeface="Aptos"/>
+              </a:rPr>
+              <a:t>изолированные</a:t>
+            </a:r>
+            <a:r>
+              <a:rPr sz="1400" b="0" dirty="0">
+                <a:solidFill>
+                  <a:srgbClr val="172033"/>
+                </a:solidFill>
+                <a:latin typeface="Aptos"/>
+              </a:rPr>
+              <a:t> </a:t>
+            </a:r>
+            <a:r>
+              <a:rPr sz="1400" b="0" dirty="0" err="1">
+                <a:solidFill>
+                  <a:srgbClr val="172033"/>
+                </a:solidFill>
+                <a:latin typeface="Aptos"/>
+              </a:rPr>
+              <a:t>программы</a:t>
+            </a:r>
+            <a:r>
+              <a:rPr sz="1400" b="0" dirty="0">
+                <a:solidFill>
+                  <a:srgbClr val="172033"/>
+                </a:solidFill>
+                <a:latin typeface="Aptos"/>
+              </a:rPr>
+              <a:t> и </a:t>
+            </a:r>
+            <a:r>
+              <a:rPr sz="1400" b="0" dirty="0" err="1">
+                <a:solidFill>
+                  <a:srgbClr val="172033"/>
+                </a:solidFill>
+                <a:latin typeface="Aptos"/>
+              </a:rPr>
+              <a:t>однострочные</a:t>
+            </a:r>
+            <a:r>
+              <a:rPr sz="1400" b="0" dirty="0">
+                <a:solidFill>
+                  <a:srgbClr val="172033"/>
+                </a:solidFill>
+                <a:latin typeface="Aptos"/>
+              </a:rPr>
+              <a:t> </a:t>
+            </a:r>
+            <a:r>
+              <a:rPr sz="1400" b="0" dirty="0" err="1">
+                <a:solidFill>
+                  <a:srgbClr val="172033"/>
+                </a:solidFill>
+                <a:latin typeface="Aptos"/>
+              </a:rPr>
+              <a:t>ошибки</a:t>
+            </a:r>
+            <a:r>
+              <a:rPr sz="1400" b="0" dirty="0">
+                <a:solidFill>
+                  <a:srgbClr val="172033"/>
+                </a:solidFill>
+                <a:latin typeface="Aptos"/>
+              </a:rPr>
+              <a:t>, а </a:t>
+            </a:r>
+            <a:r>
+              <a:rPr sz="1400" b="0" dirty="0" err="1">
+                <a:solidFill>
+                  <a:srgbClr val="172033"/>
+                </a:solidFill>
+                <a:latin typeface="Aptos"/>
+              </a:rPr>
+              <a:t>не</a:t>
+            </a:r>
+            <a:r>
+              <a:rPr sz="1400" b="0" dirty="0">
+                <a:solidFill>
+                  <a:srgbClr val="172033"/>
+                </a:solidFill>
+                <a:latin typeface="Aptos"/>
+              </a:rPr>
+              <a:t> </a:t>
+            </a:r>
+            <a:r>
+              <a:rPr sz="1400" b="0" dirty="0" err="1">
+                <a:solidFill>
+                  <a:srgbClr val="172033"/>
+                </a:solidFill>
+                <a:latin typeface="Aptos"/>
+              </a:rPr>
+              <a:t>большие</a:t>
+            </a:r>
+            <a:r>
+              <a:rPr sz="1400" b="0" dirty="0">
+                <a:solidFill>
+                  <a:srgbClr val="172033"/>
+                </a:solidFill>
+                <a:latin typeface="Aptos"/>
+              </a:rPr>
+              <a:t> </a:t>
+            </a:r>
+            <a:r>
+              <a:rPr sz="1400" b="0" dirty="0" err="1">
+                <a:solidFill>
+                  <a:srgbClr val="172033"/>
+                </a:solidFill>
+                <a:latin typeface="Aptos"/>
+              </a:rPr>
+              <a:t>проекты</a:t>
+            </a:r>
+            <a:r>
+              <a:rPr sz="1400" b="0" dirty="0">
+                <a:solidFill>
+                  <a:srgbClr val="172033"/>
+                </a:solidFill>
+                <a:latin typeface="Aptos"/>
+              </a:rPr>
+              <a:t>.</a:t>
             </a:r>
           </a:p>
         </p:txBody>
@@ -4480,49 +6340,92 @@
           <a:p>
             <a:pPr algn="l"/>
             <a:r>
-              <a:rPr sz="2700" b="1">
-                <a:solidFill>
-                  <a:srgbClr val="172033"/>
-                </a:solidFill>
-                <a:latin typeface="Aptos"/>
-              </a:rPr>
-              <a:t>Три способа организовать работу модели</a:t>
-            </a:r>
-          </a:p>
-        </p:txBody>
-      </p:sp>
-      <p:sp>
-        <p:nvSpPr>
-          <p:cNvPr id="5" name="TextBox 4"/>
-          <p:cNvSpPr txBox="1"/>
-          <p:nvPr/>
-        </p:nvSpPr>
-        <p:spPr>
-          <a:xfrm>
-            <a:off x="658368" y="6492240"/>
-            <a:ext cx="7315200" cy="164592"/>
-          </a:xfrm>
-          <a:prstGeom prst="rect">
-            <a:avLst/>
-          </a:prstGeom>
-          <a:noFill/>
-        </p:spPr>
-        <p:txBody>
-          <a:bodyPr wrap="square" lIns="36576" tIns="36576" rIns="36576" bIns="36576">
-            <a:spAutoFit/>
-          </a:bodyPr>
-          <a:lstStyle/>
-          <a:p>
-            <a:pPr algn="l"/>
-            <a:r>
-              <a:rPr sz="800" b="0">
-                <a:solidFill>
-                  <a:srgbClr val="617087"/>
-                </a:solidFill>
-                <a:latin typeface="Aptos"/>
-              </a:rPr>
-              <a:t>LLM-отладчик Python-программ · промежуточный показ</a:t>
-            </a:r>
+              <a:rPr sz="2700" b="1" dirty="0" err="1">
+                <a:solidFill>
+                  <a:srgbClr val="172033"/>
+                </a:solidFill>
+                <a:latin typeface="Aptos"/>
+              </a:rPr>
+              <a:t>Три</a:t>
+            </a:r>
+            <a:r>
+              <a:rPr sz="2700" b="1" dirty="0">
+                <a:solidFill>
+                  <a:srgbClr val="172033"/>
+                </a:solidFill>
+                <a:latin typeface="Aptos"/>
+              </a:rPr>
+              <a:t> </a:t>
+            </a:r>
+            <a:r>
+              <a:rPr sz="2700" b="1" dirty="0" err="1">
+                <a:solidFill>
+                  <a:srgbClr val="172033"/>
+                </a:solidFill>
+                <a:latin typeface="Aptos"/>
+              </a:rPr>
+              <a:t>способа</a:t>
+            </a:r>
+            <a:r>
+              <a:rPr sz="2700" b="1" dirty="0">
+                <a:solidFill>
+                  <a:srgbClr val="172033"/>
+                </a:solidFill>
+                <a:latin typeface="Aptos"/>
+              </a:rPr>
+              <a:t> </a:t>
+            </a:r>
+            <a:r>
+              <a:rPr sz="2700" b="1" dirty="0" err="1">
+                <a:solidFill>
+                  <a:srgbClr val="172033"/>
+                </a:solidFill>
+                <a:latin typeface="Aptos"/>
+              </a:rPr>
+              <a:t>организовать</a:t>
+            </a:r>
+            <a:r>
+              <a:rPr sz="2700" b="1" dirty="0">
+                <a:solidFill>
+                  <a:srgbClr val="172033"/>
+                </a:solidFill>
+                <a:latin typeface="Aptos"/>
+              </a:rPr>
+              <a:t> </a:t>
+            </a:r>
+            <a:r>
+              <a:rPr sz="2700" b="1" dirty="0" err="1">
+                <a:solidFill>
+                  <a:srgbClr val="172033"/>
+                </a:solidFill>
+                <a:latin typeface="Aptos"/>
+              </a:rPr>
+              <a:t>работу</a:t>
+            </a:r>
+            <a:r>
+              <a:rPr sz="2700" b="1" dirty="0">
+                <a:solidFill>
+                  <a:srgbClr val="172033"/>
+                </a:solidFill>
+                <a:latin typeface="Aptos"/>
+              </a:rPr>
+              <a:t> </a:t>
+            </a:r>
+            <a:r>
+              <a:rPr sz="2700" b="1" dirty="0" err="1">
+                <a:solidFill>
+                  <a:srgbClr val="172033"/>
+                </a:solidFill>
+                <a:latin typeface="Aptos"/>
+              </a:rPr>
+              <a:t>модели</a:t>
+            </a:r>
+            <a:endParaRPr sz="2700" b="1" dirty="0">
+              <a:solidFill>
+                <a:srgbClr val="172033"/>
+              </a:solidFill>
+              <a:latin typeface="Aptos"/>
+            </a:endParaRPr>
           </a:p>
         </p:txBody>
       </p:sp>
@@ -4618,7 +6521,7 @@
         <p:spPr>
           <a:xfrm>
             <a:off x="886968" y="1810512"/>
-            <a:ext cx="2926080" cy="274320"/>
+            <a:ext cx="2926080" cy="443198"/>
           </a:xfrm>
           <a:prstGeom prst="rect">
             <a:avLst/>
@@ -4633,7 +6536,7 @@
           <a:p>
             <a:pPr algn="l"/>
             <a:r>
-              <a:rPr sz="1800" b="1">
+              <a:rPr sz="2400" b="1" dirty="0">
                 <a:solidFill>
                   <a:srgbClr val="172033"/>
                 </a:solidFill>
@@ -4688,7 +6591,7 @@
         <p:spPr>
           <a:xfrm>
             <a:off x="886968" y="3310128"/>
-            <a:ext cx="2880360" cy="1143000"/>
+            <a:ext cx="2880360" cy="1551194"/>
           </a:xfrm>
           <a:prstGeom prst="rect">
             <a:avLst/>
@@ -4703,13 +6606,292 @@
           <a:p>
             <a:pPr algn="l"/>
             <a:r>
-              <a:rPr sz="1000" b="0">
-                <a:solidFill>
-                  <a:srgbClr val="617087"/>
-                </a:solidFill>
-                <a:latin typeface="Aptos"/>
-              </a:rPr>
-              <a:t>Инструменты: нет. Система проверяет синтаксис и каждый кодовый блок запускает в песочнице на всех тестах; до 3 попыток.</a:t>
+              <a:rPr sz="1600" b="0" dirty="0" err="1">
+                <a:solidFill>
+                  <a:srgbClr val="617087"/>
+                </a:solidFill>
+                <a:latin typeface="Aptos"/>
+              </a:rPr>
+              <a:t>Инструменты</a:t>
+            </a:r>
+            <a:r>
+              <a:rPr sz="1600" b="0" dirty="0">
+                <a:solidFill>
+                  <a:srgbClr val="617087"/>
+                </a:solidFill>
+                <a:latin typeface="Aptos"/>
+              </a:rPr>
+              <a:t>: </a:t>
+            </a:r>
+            <a:r>
+              <a:rPr sz="1600" b="0" dirty="0" err="1">
+                <a:solidFill>
+                  <a:srgbClr val="617087"/>
+                </a:solidFill>
+                <a:latin typeface="Aptos"/>
+              </a:rPr>
+              <a:t>нет</a:t>
+            </a:r>
+            <a:r>
+              <a:rPr sz="1600" b="0" dirty="0">
+                <a:solidFill>
+                  <a:srgbClr val="617087"/>
+                </a:solidFill>
+                <a:latin typeface="Aptos"/>
+              </a:rPr>
+              <a:t>. </a:t>
+            </a:r>
+            <a:endParaRPr lang="ru-RU" sz="1600" b="0" dirty="0">
+              <a:solidFill>
+                <a:srgbClr val="617087"/>
+              </a:solidFill>
+              <a:latin typeface="Aptos"/>
+            </a:endParaRPr>
+          </a:p>
+          <a:p>
+            <a:pPr algn="l"/>
+            <a:endParaRPr lang="ru-RU" sz="1600" dirty="0">
+              <a:solidFill>
+                <a:srgbClr val="617087"/>
+              </a:solidFill>
+              <a:latin typeface="Aptos"/>
+            </a:endParaRPr>
+          </a:p>
+          <a:p>
+            <a:pPr algn="l"/>
+            <a:r>
+              <a:rPr sz="1600" b="0" dirty="0" err="1">
+                <a:solidFill>
+                  <a:srgbClr val="617087"/>
+                </a:solidFill>
+                <a:latin typeface="Aptos"/>
+              </a:rPr>
+              <a:t>Система</a:t>
+            </a:r>
+            <a:r>
+              <a:rPr sz="1600" b="0" dirty="0">
+                <a:solidFill>
+                  <a:srgbClr val="617087"/>
+                </a:solidFill>
+                <a:latin typeface="Aptos"/>
+              </a:rPr>
+              <a:t> </a:t>
+            </a:r>
+            <a:r>
+              <a:rPr sz="1600" b="0" dirty="0" err="1">
+                <a:solidFill>
+                  <a:srgbClr val="617087"/>
+                </a:solidFill>
+                <a:latin typeface="Aptos"/>
+              </a:rPr>
+              <a:t>проверяет</a:t>
+            </a:r>
+            <a:r>
+              <a:rPr sz="1600" b="0" dirty="0">
+                <a:solidFill>
+                  <a:srgbClr val="617087"/>
+                </a:solidFill>
+                <a:latin typeface="Aptos"/>
+              </a:rPr>
+              <a:t> </a:t>
+            </a:r>
+            <a:r>
+              <a:rPr sz="1600" b="0" dirty="0" err="1">
+                <a:solidFill>
+                  <a:srgbClr val="617087"/>
+                </a:solidFill>
+                <a:latin typeface="Aptos"/>
+              </a:rPr>
+              <a:t>синтаксис</a:t>
+            </a:r>
+            <a:r>
+              <a:rPr sz="1600" b="0" dirty="0">
+                <a:solidFill>
+                  <a:srgbClr val="617087"/>
+                </a:solidFill>
+                <a:latin typeface="Aptos"/>
+              </a:rPr>
+              <a:t> и </a:t>
+            </a:r>
+            <a:r>
+              <a:rPr sz="1600" b="0" dirty="0" err="1">
+                <a:solidFill>
+                  <a:srgbClr val="617087"/>
+                </a:solidFill>
+                <a:latin typeface="Aptos"/>
+              </a:rPr>
+              <a:t>каждый</a:t>
+            </a:r>
+            <a:r>
+              <a:rPr sz="1600" b="0" dirty="0">
+                <a:solidFill>
+                  <a:srgbClr val="617087"/>
+                </a:solidFill>
+                <a:latin typeface="Aptos"/>
+              </a:rPr>
+              <a:t> </a:t>
+            </a:r>
+            <a:r>
+              <a:rPr sz="1600" b="0" dirty="0" err="1">
+                <a:solidFill>
+                  <a:srgbClr val="617087"/>
+                </a:solidFill>
+                <a:latin typeface="Aptos"/>
+              </a:rPr>
+              <a:t>кодовый</a:t>
+            </a:r>
+            <a:r>
+              <a:rPr sz="1600" b="0" dirty="0">
+                <a:solidFill>
+                  <a:srgbClr val="617087"/>
+                </a:solidFill>
+                <a:latin typeface="Aptos"/>
+              </a:rPr>
+              <a:t> </a:t>
+            </a:r>
+            <a:r>
+              <a:rPr sz="1600" b="0" dirty="0" err="1">
+                <a:solidFill>
+                  <a:srgbClr val="617087"/>
+                </a:solidFill>
+                <a:latin typeface="Aptos"/>
+              </a:rPr>
+              <a:t>блок</a:t>
+            </a:r>
+            <a:r>
+              <a:rPr sz="1600" b="0" dirty="0">
+                <a:solidFill>
+                  <a:srgbClr val="617087"/>
+                </a:solidFill>
+                <a:latin typeface="Aptos"/>
+              </a:rPr>
+              <a:t> </a:t>
+            </a:r>
+            <a:r>
+              <a:rPr sz="1600" b="0" dirty="0" err="1">
+                <a:solidFill>
+                  <a:srgbClr val="617087"/>
+                </a:solidFill>
+                <a:latin typeface="Aptos"/>
+              </a:rPr>
+              <a:t>запускает</a:t>
+            </a:r>
+            <a:r>
+              <a:rPr sz="1600" b="0" dirty="0">
+                <a:solidFill>
+                  <a:srgbClr val="617087"/>
+                </a:solidFill>
+                <a:latin typeface="Aptos"/>
+              </a:rPr>
+              <a:t> в </a:t>
+            </a:r>
+            <a:r>
+              <a:rPr sz="1600" b="0" dirty="0" err="1">
+                <a:solidFill>
+                  <a:srgbClr val="617087"/>
+                </a:solidFill>
+                <a:latin typeface="Aptos"/>
+              </a:rPr>
+              <a:t>песочнице</a:t>
+            </a:r>
+            <a:r>
+              <a:rPr sz="1600" b="0" dirty="0">
+                <a:solidFill>
+                  <a:srgbClr val="617087"/>
+                </a:solidFill>
+                <a:latin typeface="Aptos"/>
+              </a:rPr>
+              <a:t> </a:t>
+            </a:r>
+            <a:r>
+              <a:rPr sz="1600" b="0" dirty="0" err="1">
+                <a:solidFill>
+                  <a:srgbClr val="617087"/>
+                </a:solidFill>
+                <a:latin typeface="Aptos"/>
+              </a:rPr>
+              <a:t>на</a:t>
+            </a:r>
+            <a:r>
+              <a:rPr sz="1600" b="0" dirty="0">
+                <a:solidFill>
+                  <a:srgbClr val="617087"/>
+                </a:solidFill>
+                <a:latin typeface="Aptos"/>
+              </a:rPr>
+              <a:t> </a:t>
+            </a:r>
+            <a:r>
+              <a:rPr sz="1600" b="0" dirty="0" err="1">
+                <a:solidFill>
+                  <a:srgbClr val="617087"/>
+                </a:solidFill>
+                <a:latin typeface="Aptos"/>
+              </a:rPr>
+              <a:t>всех</a:t>
+            </a:r>
+            <a:r>
+              <a:rPr sz="1600" b="0" dirty="0">
+                <a:solidFill>
+                  <a:srgbClr val="617087"/>
+                </a:solidFill>
+                <a:latin typeface="Aptos"/>
+              </a:rPr>
+              <a:t> </a:t>
+            </a:r>
+            <a:r>
+              <a:rPr sz="1600" b="0" dirty="0" err="1">
+                <a:solidFill>
+                  <a:srgbClr val="617087"/>
+                </a:solidFill>
+                <a:latin typeface="Aptos"/>
+              </a:rPr>
+              <a:t>тестах</a:t>
+            </a:r>
+            <a:r>
+              <a:rPr sz="1600" b="0" dirty="0">
+                <a:solidFill>
+                  <a:srgbClr val="617087"/>
+                </a:solidFill>
+                <a:latin typeface="Aptos"/>
+              </a:rPr>
+              <a:t>; </a:t>
+            </a:r>
+            <a:r>
+              <a:rPr sz="1600" b="0" dirty="0" err="1">
+                <a:solidFill>
+                  <a:srgbClr val="617087"/>
+                </a:solidFill>
+                <a:latin typeface="Aptos"/>
+              </a:rPr>
+              <a:t>до</a:t>
+            </a:r>
+            <a:r>
+              <a:rPr sz="1600" b="0" dirty="0">
+                <a:solidFill>
+                  <a:srgbClr val="617087"/>
+                </a:solidFill>
+                <a:latin typeface="Aptos"/>
+              </a:rPr>
+              <a:t> 3 </a:t>
+            </a:r>
+            <a:r>
+              <a:rPr sz="1600" b="0" dirty="0" err="1">
+                <a:solidFill>
+                  <a:srgbClr val="617087"/>
+                </a:solidFill>
+                <a:latin typeface="Aptos"/>
+              </a:rPr>
+              <a:t>попыток</a:t>
+            </a:r>
+            <a:r>
+              <a:rPr sz="1600" b="0" dirty="0">
+                <a:solidFill>
+                  <a:srgbClr val="617087"/>
+                </a:solidFill>
+                <a:latin typeface="Aptos"/>
+              </a:rPr>
+              <a:t>.</a:t>
             </a:r>
           </a:p>
         </p:txBody>
@@ -4771,7 +6953,7 @@
         <p:spPr>
           <a:xfrm>
             <a:off x="4681728" y="1810512"/>
-            <a:ext cx="2926080" cy="274320"/>
+            <a:ext cx="2926080" cy="443198"/>
           </a:xfrm>
           <a:prstGeom prst="rect">
             <a:avLst/>
@@ -4786,14 +6968,38 @@
           <a:p>
             <a:pPr algn="l"/>
             <a:r>
-              <a:rPr sz="1800" b="1">
-                <a:solidFill>
-                  <a:srgbClr val="172033"/>
-                </a:solidFill>
-                <a:latin typeface="Aptos"/>
-              </a:rPr>
-              <a:t>Одиночный агент</a:t>
-            </a:r>
+              <a:rPr sz="2400" b="1" dirty="0" err="1">
+                <a:solidFill>
+                  <a:srgbClr val="172033"/>
+                </a:solidFill>
+                <a:latin typeface="Aptos"/>
+              </a:rPr>
+              <a:t>Одиночный</a:t>
+            </a:r>
+            <a:r>
+              <a:rPr sz="2400" b="1" dirty="0">
+                <a:solidFill>
+                  <a:srgbClr val="172033"/>
+                </a:solidFill>
+                <a:latin typeface="Aptos"/>
+              </a:rPr>
+              <a:t> </a:t>
+            </a:r>
+            <a:r>
+              <a:rPr sz="2400" b="1" dirty="0" err="1">
+                <a:solidFill>
+                  <a:srgbClr val="172033"/>
+                </a:solidFill>
+                <a:latin typeface="Aptos"/>
+              </a:rPr>
+              <a:t>агент</a:t>
+            </a:r>
+            <a:endParaRPr sz="2400" b="1" dirty="0">
+              <a:solidFill>
+                <a:srgbClr val="172033"/>
+              </a:solidFill>
+              <a:latin typeface="Aptos"/>
+            </a:endParaRPr>
           </a:p>
         </p:txBody>
       </p:sp>
@@ -4821,14 +7027,47 @@
           <a:p>
             <a:pPr algn="l"/>
             <a:r>
-              <a:rPr sz="1200" b="1">
+              <a:rPr sz="1200" b="1" dirty="0">
                 <a:solidFill>
                   <a:srgbClr val="315EFB"/>
                 </a:solidFill>
                 <a:latin typeface="Aptos"/>
               </a:rPr>
-              <a:t>LLM ↔ tools → submit → все тесты</a:t>
-            </a:r>
+              <a:t>LLM ↔ tools → submit → </a:t>
+            </a:r>
+            <a:r>
+              <a:rPr sz="1200" b="1" dirty="0" err="1">
+                <a:solidFill>
+                  <a:srgbClr val="315EFB"/>
+                </a:solidFill>
+                <a:latin typeface="Aptos"/>
+              </a:rPr>
+              <a:t>все</a:t>
+            </a:r>
+            <a:r>
+              <a:rPr sz="1200" b="1" dirty="0">
+                <a:solidFill>
+                  <a:srgbClr val="315EFB"/>
+                </a:solidFill>
+                <a:latin typeface="Aptos"/>
+              </a:rPr>
+              <a:t> </a:t>
+            </a:r>
+            <a:r>
+              <a:rPr sz="1200" b="1" dirty="0" err="1">
+                <a:solidFill>
+                  <a:srgbClr val="315EFB"/>
+                </a:solidFill>
+                <a:latin typeface="Aptos"/>
+              </a:rPr>
+              <a:t>тесты</a:t>
+            </a:r>
+            <a:endParaRPr sz="1200" b="1" dirty="0">
+              <a:solidFill>
+                <a:srgbClr val="315EFB"/>
+              </a:solidFill>
+              <a:latin typeface="Aptos"/>
+            </a:endParaRPr>
           </a:p>
         </p:txBody>
       </p:sp>
@@ -4841,7 +7080,7 @@
         <p:spPr>
           <a:xfrm>
             <a:off x="4681728" y="3310128"/>
-            <a:ext cx="2880360" cy="1143000"/>
+            <a:ext cx="2880360" cy="1551194"/>
           </a:xfrm>
           <a:prstGeom prst="rect">
             <a:avLst/>
@@ -4856,13 +7095,184 @@
           <a:p>
             <a:pPr algn="l"/>
             <a:r>
-              <a:rPr sz="1000" b="0">
-                <a:solidFill>
-                  <a:srgbClr val="617087"/>
-                </a:solidFill>
-                <a:latin typeface="Aptos"/>
-              </a:rPr>
-              <a:t>Инструменты: get_test, run_program, trace, run_tests, submit. Модель выбирает вызовы; до 30 ответов.</a:t>
+              <a:rPr sz="1600" b="0" dirty="0" err="1">
+                <a:solidFill>
+                  <a:srgbClr val="617087"/>
+                </a:solidFill>
+                <a:latin typeface="Aptos"/>
+              </a:rPr>
+              <a:t>Инструменты</a:t>
+            </a:r>
+            <a:r>
+              <a:rPr sz="1600" b="0" dirty="0">
+                <a:solidFill>
+                  <a:srgbClr val="617087"/>
+                </a:solidFill>
+                <a:latin typeface="Aptos"/>
+              </a:rPr>
+              <a:t>: </a:t>
+            </a:r>
+            <a:r>
+              <a:rPr sz="1600" b="0" dirty="0" err="1">
+                <a:solidFill>
+                  <a:srgbClr val="617087"/>
+                </a:solidFill>
+                <a:latin typeface="Aptos"/>
+              </a:rPr>
+              <a:t>get_test</a:t>
+            </a:r>
+            <a:r>
+              <a:rPr sz="1600" b="0" dirty="0">
+                <a:solidFill>
+                  <a:srgbClr val="617087"/>
+                </a:solidFill>
+                <a:latin typeface="Aptos"/>
+              </a:rPr>
+              <a:t>, </a:t>
+            </a:r>
+            <a:r>
+              <a:rPr sz="1600" b="0" dirty="0" err="1">
+                <a:solidFill>
+                  <a:srgbClr val="617087"/>
+                </a:solidFill>
+                <a:latin typeface="Aptos"/>
+              </a:rPr>
+              <a:t>run_program</a:t>
+            </a:r>
+            <a:r>
+              <a:rPr sz="1600" b="0" dirty="0">
+                <a:solidFill>
+                  <a:srgbClr val="617087"/>
+                </a:solidFill>
+                <a:latin typeface="Aptos"/>
+              </a:rPr>
+              <a:t>, trace, </a:t>
+            </a:r>
+            <a:r>
+              <a:rPr sz="1600" b="0" dirty="0" err="1">
+                <a:solidFill>
+                  <a:srgbClr val="617087"/>
+                </a:solidFill>
+                <a:latin typeface="Aptos"/>
+              </a:rPr>
+              <a:t>run_tests</a:t>
+            </a:r>
+            <a:r>
+              <a:rPr sz="1600" b="0" dirty="0">
+                <a:solidFill>
+                  <a:srgbClr val="617087"/>
+                </a:solidFill>
+                <a:latin typeface="Aptos"/>
+              </a:rPr>
+              <a:t>, submit. </a:t>
+            </a:r>
+            <a:endParaRPr lang="ru-RU" sz="1600" b="0" dirty="0">
+              <a:solidFill>
+                <a:srgbClr val="617087"/>
+              </a:solidFill>
+              <a:latin typeface="Aptos"/>
+            </a:endParaRPr>
+          </a:p>
+          <a:p>
+            <a:pPr algn="l"/>
+            <a:endParaRPr lang="ru-RU" sz="1600" b="0" dirty="0">
+              <a:solidFill>
+                <a:srgbClr val="617087"/>
+              </a:solidFill>
+              <a:latin typeface="Aptos"/>
+            </a:endParaRPr>
+          </a:p>
+          <a:p>
+            <a:pPr algn="l"/>
+            <a:r>
+              <a:rPr sz="1600" b="0" dirty="0" err="1">
+                <a:solidFill>
+                  <a:srgbClr val="617087"/>
+                </a:solidFill>
+                <a:latin typeface="Aptos"/>
+              </a:rPr>
+              <a:t>Модель</a:t>
+            </a:r>
+            <a:r>
+              <a:rPr sz="1600" b="0" dirty="0">
+                <a:solidFill>
+                  <a:srgbClr val="617087"/>
+                </a:solidFill>
+                <a:latin typeface="Aptos"/>
+              </a:rPr>
+              <a:t> </a:t>
+            </a:r>
+            <a:r>
+              <a:rPr sz="1600" b="0" dirty="0" err="1">
+                <a:solidFill>
+                  <a:srgbClr val="617087"/>
+                </a:solidFill>
+                <a:latin typeface="Aptos"/>
+              </a:rPr>
+              <a:t>выбирает</a:t>
+            </a:r>
+            <a:r>
+              <a:rPr sz="1600" b="0" dirty="0">
+                <a:solidFill>
+                  <a:srgbClr val="617087"/>
+                </a:solidFill>
+                <a:latin typeface="Aptos"/>
+              </a:rPr>
+              <a:t> </a:t>
+            </a:r>
+            <a:r>
+              <a:rPr sz="1600" b="0" dirty="0" err="1">
+                <a:solidFill>
+                  <a:srgbClr val="617087"/>
+                </a:solidFill>
+                <a:latin typeface="Aptos"/>
+              </a:rPr>
+              <a:t>вызовы</a:t>
+            </a:r>
+            <a:r>
+              <a:rPr sz="1600" b="0" dirty="0">
+                <a:solidFill>
+                  <a:srgbClr val="617087"/>
+                </a:solidFill>
+                <a:latin typeface="Aptos"/>
+              </a:rPr>
+              <a:t>; </a:t>
+            </a:r>
+            <a:r>
+              <a:rPr sz="1600" b="0" dirty="0" err="1">
+                <a:solidFill>
+                  <a:srgbClr val="617087"/>
+                </a:solidFill>
+                <a:latin typeface="Aptos"/>
+              </a:rPr>
+              <a:t>до</a:t>
+            </a:r>
+            <a:r>
+              <a:rPr sz="1600" b="0" dirty="0">
+                <a:solidFill>
+                  <a:srgbClr val="617087"/>
+                </a:solidFill>
+                <a:latin typeface="Aptos"/>
+              </a:rPr>
+              <a:t> 30 </a:t>
+            </a:r>
+            <a:r>
+              <a:rPr sz="1600" b="0" dirty="0" err="1">
+                <a:solidFill>
+                  <a:srgbClr val="617087"/>
+                </a:solidFill>
+                <a:latin typeface="Aptos"/>
+              </a:rPr>
+              <a:t>ответов</a:t>
+            </a:r>
+            <a:r>
+              <a:rPr sz="1600" b="0" dirty="0">
+                <a:solidFill>
+                  <a:srgbClr val="617087"/>
+                </a:solidFill>
+                <a:latin typeface="Aptos"/>
+              </a:rPr>
+              <a:t>.</a:t>
             </a:r>
           </a:p>
         </p:txBody>
@@ -4924,7 +7334,7 @@
         <p:spPr>
           <a:xfrm>
             <a:off x="8476488" y="1810512"/>
-            <a:ext cx="2926080" cy="274320"/>
+            <a:ext cx="2926080" cy="812530"/>
           </a:xfrm>
           <a:prstGeom prst="rect">
             <a:avLst/>
@@ -4939,13 +7349,22 @@
           <a:p>
             <a:pPr algn="l"/>
             <a:r>
-              <a:rPr sz="1800" b="1">
-                <a:solidFill>
-                  <a:srgbClr val="172033"/>
-                </a:solidFill>
-                <a:latin typeface="Aptos"/>
-              </a:rPr>
-              <a:t>Последовательная MAS</a:t>
+              <a:rPr sz="2400" b="1" dirty="0" err="1">
+                <a:solidFill>
+                  <a:srgbClr val="172033"/>
+                </a:solidFill>
+                <a:latin typeface="Aptos"/>
+              </a:rPr>
+              <a:t>Последовательная</a:t>
+            </a:r>
+            <a:r>
+              <a:rPr sz="2400" b="1" dirty="0">
+                <a:solidFill>
+                  <a:srgbClr val="172033"/>
+                </a:solidFill>
+                <a:latin typeface="Aptos"/>
+              </a:rPr>
+              <a:t> MAS</a:t>
             </a:r>
           </a:p>
         </p:txBody>
@@ -4994,7 +7413,7 @@
         <p:spPr>
           <a:xfrm>
             <a:off x="8476488" y="3310128"/>
-            <a:ext cx="2880360" cy="1143000"/>
+            <a:ext cx="2880360" cy="1551194"/>
           </a:xfrm>
           <a:prstGeom prst="rect">
             <a:avLst/>
@@ -5009,48 +7428,211 @@
           <a:p>
             <a:pPr algn="l"/>
             <a:r>
-              <a:rPr sz="1000" b="0">
-                <a:solidFill>
-                  <a:srgbClr val="617087"/>
-                </a:solidFill>
-                <a:latin typeface="Aptos"/>
-              </a:rPr>
-              <a:t>Инструменты researcher: get_test, run_program, trace, run_tests. Checker всегда запускает все тесты патча; до 3 патчей.</a:t>
-            </a:r>
-          </a:p>
-        </p:txBody>
-      </p:sp>
-      <p:sp>
-        <p:nvSpPr>
-          <p:cNvPr id="19" name="TextBox 18"/>
-          <p:cNvSpPr txBox="1"/>
-          <p:nvPr/>
-        </p:nvSpPr>
-        <p:spPr>
-          <a:xfrm>
-            <a:off x="658368" y="6053328"/>
-            <a:ext cx="7315200" cy="182880"/>
-          </a:xfrm>
-          <a:prstGeom prst="rect">
-            <a:avLst/>
-          </a:prstGeom>
-          <a:noFill/>
-        </p:spPr>
-        <p:txBody>
-          <a:bodyPr wrap="square" lIns="36576" tIns="36576" rIns="36576" bIns="36576">
-            <a:spAutoFit/>
-          </a:bodyPr>
-          <a:lstStyle/>
+              <a:rPr sz="1600" b="0" dirty="0" err="1">
+                <a:solidFill>
+                  <a:srgbClr val="617087"/>
+                </a:solidFill>
+                <a:latin typeface="Aptos"/>
+              </a:rPr>
+              <a:t>Инструменты</a:t>
+            </a:r>
+            <a:r>
+              <a:rPr sz="1600" b="0" dirty="0">
+                <a:solidFill>
+                  <a:srgbClr val="617087"/>
+                </a:solidFill>
+                <a:latin typeface="Aptos"/>
+              </a:rPr>
+              <a:t> researcher: </a:t>
+            </a:r>
+            <a:r>
+              <a:rPr sz="1600" b="0" dirty="0" err="1">
+                <a:solidFill>
+                  <a:srgbClr val="617087"/>
+                </a:solidFill>
+                <a:latin typeface="Aptos"/>
+              </a:rPr>
+              <a:t>get_test</a:t>
+            </a:r>
+            <a:r>
+              <a:rPr sz="1600" b="0" dirty="0">
+                <a:solidFill>
+                  <a:srgbClr val="617087"/>
+                </a:solidFill>
+                <a:latin typeface="Aptos"/>
+              </a:rPr>
+              <a:t>, </a:t>
+            </a:r>
+            <a:r>
+              <a:rPr sz="1600" b="0" dirty="0" err="1">
+                <a:solidFill>
+                  <a:srgbClr val="617087"/>
+                </a:solidFill>
+                <a:latin typeface="Aptos"/>
+              </a:rPr>
+              <a:t>run_program</a:t>
+            </a:r>
+            <a:r>
+              <a:rPr sz="1600" b="0" dirty="0">
+                <a:solidFill>
+                  <a:srgbClr val="617087"/>
+                </a:solidFill>
+                <a:latin typeface="Aptos"/>
+              </a:rPr>
+              <a:t>, trace, </a:t>
+            </a:r>
+            <a:r>
+              <a:rPr sz="1600" b="0" dirty="0" err="1">
+                <a:solidFill>
+                  <a:srgbClr val="617087"/>
+                </a:solidFill>
+                <a:latin typeface="Aptos"/>
+              </a:rPr>
+              <a:t>run_tests</a:t>
+            </a:r>
+            <a:r>
+              <a:rPr sz="1600" b="0" dirty="0">
+                <a:solidFill>
+                  <a:srgbClr val="617087"/>
+                </a:solidFill>
+                <a:latin typeface="Aptos"/>
+              </a:rPr>
+              <a:t>. </a:t>
+            </a:r>
+            <a:endParaRPr lang="ru-RU" sz="1600" b="0" dirty="0">
+              <a:solidFill>
+                <a:srgbClr val="617087"/>
+              </a:solidFill>
+              <a:latin typeface="Aptos"/>
+            </a:endParaRPr>
+          </a:p>
           <a:p>
             <a:pPr algn="l"/>
-            <a:r>
-              <a:rPr sz="1000" b="0">
-                <a:solidFill>
-                  <a:srgbClr val="617087"/>
-                </a:solidFill>
-                <a:latin typeface="Aptos"/>
-              </a:rPr>
-              <a:t>Любой запуск чужого кода выполняется только в песочнице</a:t>
+            <a:endParaRPr lang="ru-RU" sz="1600" dirty="0">
+              <a:solidFill>
+                <a:srgbClr val="617087"/>
+              </a:solidFill>
+              <a:latin typeface="Aptos"/>
+            </a:endParaRPr>
+          </a:p>
+          <a:p>
+            <a:pPr algn="l"/>
+            <a:r>
+              <a:rPr sz="1600" b="0" dirty="0">
+                <a:solidFill>
+                  <a:srgbClr val="617087"/>
+                </a:solidFill>
+                <a:latin typeface="Aptos"/>
+              </a:rPr>
+              <a:t>Checker </a:t>
+            </a:r>
+            <a:r>
+              <a:rPr sz="1600" b="0" dirty="0" err="1">
+                <a:solidFill>
+                  <a:srgbClr val="617087"/>
+                </a:solidFill>
+                <a:latin typeface="Aptos"/>
+              </a:rPr>
+              <a:t>всегда</a:t>
+            </a:r>
+            <a:r>
+              <a:rPr sz="1600" b="0" dirty="0">
+                <a:solidFill>
+                  <a:srgbClr val="617087"/>
+                </a:solidFill>
+                <a:latin typeface="Aptos"/>
+              </a:rPr>
+              <a:t> </a:t>
+            </a:r>
+            <a:r>
+              <a:rPr sz="1600" b="0" dirty="0" err="1">
+                <a:solidFill>
+                  <a:srgbClr val="617087"/>
+                </a:solidFill>
+                <a:latin typeface="Aptos"/>
+              </a:rPr>
+              <a:t>запускает</a:t>
+            </a:r>
+            <a:r>
+              <a:rPr sz="1600" b="0" dirty="0">
+                <a:solidFill>
+                  <a:srgbClr val="617087"/>
+                </a:solidFill>
+                <a:latin typeface="Aptos"/>
+              </a:rPr>
+              <a:t> </a:t>
+            </a:r>
+            <a:r>
+              <a:rPr sz="1600" b="0" dirty="0" err="1">
+                <a:solidFill>
+                  <a:srgbClr val="617087"/>
+                </a:solidFill>
+                <a:latin typeface="Aptos"/>
+              </a:rPr>
+              <a:t>все</a:t>
+            </a:r>
+            <a:r>
+              <a:rPr sz="1600" b="0" dirty="0">
+                <a:solidFill>
+                  <a:srgbClr val="617087"/>
+                </a:solidFill>
+                <a:latin typeface="Aptos"/>
+              </a:rPr>
+              <a:t> </a:t>
+            </a:r>
+            <a:r>
+              <a:rPr sz="1600" b="0" dirty="0" err="1">
+                <a:solidFill>
+                  <a:srgbClr val="617087"/>
+                </a:solidFill>
+                <a:latin typeface="Aptos"/>
+              </a:rPr>
+              <a:t>тесты</a:t>
+            </a:r>
+            <a:r>
+              <a:rPr sz="1600" b="0" dirty="0">
+                <a:solidFill>
+                  <a:srgbClr val="617087"/>
+                </a:solidFill>
+                <a:latin typeface="Aptos"/>
+              </a:rPr>
+              <a:t>; </a:t>
+            </a:r>
+            <a:r>
+              <a:rPr sz="1600" b="0" dirty="0" err="1">
+                <a:solidFill>
+                  <a:srgbClr val="617087"/>
+                </a:solidFill>
+                <a:latin typeface="Aptos"/>
+              </a:rPr>
+              <a:t>до</a:t>
+            </a:r>
+            <a:r>
+              <a:rPr sz="1600" b="0" dirty="0">
+                <a:solidFill>
+                  <a:srgbClr val="617087"/>
+                </a:solidFill>
+                <a:latin typeface="Aptos"/>
+              </a:rPr>
+              <a:t> 3 </a:t>
+            </a:r>
+            <a:r>
+              <a:rPr sz="1600" b="0" dirty="0" err="1">
+                <a:solidFill>
+                  <a:srgbClr val="617087"/>
+                </a:solidFill>
+                <a:latin typeface="Aptos"/>
+              </a:rPr>
+              <a:t>патчей</a:t>
+            </a:r>
+            <a:r>
+              <a:rPr sz="1600" b="0" dirty="0">
+                <a:solidFill>
+                  <a:srgbClr val="617087"/>
+                </a:solidFill>
+                <a:latin typeface="Aptos"/>
+              </a:rPr>
+              <a:t>.</a:t>
             </a:r>
           </a:p>
         </p:txBody>
@@ -5185,49 +7767,38 @@
           <a:p>
             <a:pPr algn="l"/>
             <a:r>
-              <a:rPr sz="2700" b="1">
-                <a:solidFill>
-                  <a:srgbClr val="172033"/>
-                </a:solidFill>
-                <a:latin typeface="Aptos"/>
-              </a:rPr>
-              <a:t>Условия сравнения</a:t>
-            </a:r>
-          </a:p>
-        </p:txBody>
-      </p:sp>
-      <p:sp>
-        <p:nvSpPr>
-          <p:cNvPr id="5" name="TextBox 4"/>
-          <p:cNvSpPr txBox="1"/>
-          <p:nvPr/>
-        </p:nvSpPr>
-        <p:spPr>
-          <a:xfrm>
-            <a:off x="658368" y="6492240"/>
-            <a:ext cx="7315200" cy="164592"/>
-          </a:xfrm>
-          <a:prstGeom prst="rect">
-            <a:avLst/>
-          </a:prstGeom>
-          <a:noFill/>
-        </p:spPr>
-        <p:txBody>
-          <a:bodyPr wrap="square" lIns="36576" tIns="36576" rIns="36576" bIns="36576">
-            <a:spAutoFit/>
-          </a:bodyPr>
-          <a:lstStyle/>
-          <a:p>
-            <a:pPr algn="l"/>
-            <a:r>
-              <a:rPr sz="800" b="0">
-                <a:solidFill>
-                  <a:srgbClr val="617087"/>
-                </a:solidFill>
-                <a:latin typeface="Aptos"/>
-              </a:rPr>
-              <a:t>LLM-отладчик Python-программ · промежуточный показ</a:t>
-            </a:r>
+              <a:rPr sz="2700" b="1" dirty="0" err="1">
+                <a:solidFill>
+                  <a:srgbClr val="172033"/>
+                </a:solidFill>
+                <a:latin typeface="Aptos"/>
+              </a:rPr>
+              <a:t>Условия</a:t>
+            </a:r>
+            <a:r>
+              <a:rPr sz="2700" b="1" dirty="0">
+                <a:solidFill>
+                  <a:srgbClr val="172033"/>
+                </a:solidFill>
+                <a:latin typeface="Aptos"/>
+              </a:rPr>
+              <a:t> </a:t>
+            </a:r>
+            <a:r>
+              <a:rPr sz="2700" b="1" dirty="0" err="1">
+                <a:solidFill>
+                  <a:srgbClr val="172033"/>
+                </a:solidFill>
+                <a:latin typeface="Aptos"/>
+              </a:rPr>
+              <a:t>сравнения</a:t>
+            </a:r>
+            <a:endParaRPr sz="2700" b="1" dirty="0">
+              <a:solidFill>
+                <a:srgbClr val="172033"/>
+              </a:solidFill>
+              <a:latin typeface="Aptos"/>
+            </a:endParaRPr>
           </a:p>
         </p:txBody>
       </p:sp>
@@ -5322,8 +7893,8 @@
         </p:nvSpPr>
         <p:spPr>
           <a:xfrm>
-            <a:off x="731519" y="1517904"/>
-            <a:ext cx="726947" cy="109728"/>
+            <a:off x="731519" y="1490472"/>
+            <a:ext cx="726947" cy="258532"/>
           </a:xfrm>
           <a:prstGeom prst="rect">
             <a:avLst/>
@@ -5338,7 +7909,7 @@
           <a:p>
             <a:pPr algn="ctr"/>
             <a:r>
-              <a:rPr sz="1000" b="1">
+              <a:rPr sz="1200" b="1" dirty="0">
                 <a:solidFill>
                   <a:srgbClr val="315EFB"/>
                 </a:solidFill>
@@ -5405,8 +7976,8 @@
         </p:nvSpPr>
         <p:spPr>
           <a:xfrm>
-            <a:off x="1714500" y="1517904"/>
-            <a:ext cx="1037844" cy="109728"/>
+            <a:off x="1714500" y="1490472"/>
+            <a:ext cx="1037844" cy="258532"/>
           </a:xfrm>
           <a:prstGeom prst="rect">
             <a:avLst/>
@@ -5421,14 +7992,29 @@
           <a:p>
             <a:pPr algn="ctr"/>
             <a:r>
-              <a:rPr sz="1000" b="1">
+              <a:rPr sz="1200" b="1" dirty="0">
                 <a:solidFill>
                   <a:srgbClr val="315EFB"/>
                 </a:solidFill>
                 <a:latin typeface="Aptos"/>
               </a:rPr>
-              <a:t>30 задач</a:t>
-            </a:r>
+              <a:t>30 </a:t>
+            </a:r>
+            <a:r>
+              <a:rPr sz="1200" b="1" dirty="0" err="1">
+                <a:solidFill>
+                  <a:srgbClr val="315EFB"/>
+                </a:solidFill>
+                <a:latin typeface="Aptos"/>
+              </a:rPr>
+              <a:t>задач</a:t>
+            </a:r>
+            <a:endParaRPr sz="1200" b="1" dirty="0">
+              <a:solidFill>
+                <a:srgbClr val="315EFB"/>
+              </a:solidFill>
+              <a:latin typeface="Aptos"/>
+            </a:endParaRPr>
           </a:p>
         </p:txBody>
       </p:sp>
@@ -5488,8 +8074,8 @@
         </p:nvSpPr>
         <p:spPr>
           <a:xfrm>
-            <a:off x="3008376" y="1517904"/>
-            <a:ext cx="2514600" cy="109728"/>
+            <a:off x="3008376" y="1490472"/>
+            <a:ext cx="2514600" cy="289310"/>
           </a:xfrm>
           <a:prstGeom prst="rect">
             <a:avLst/>
@@ -5504,7 +8090,7 @@
           <a:p>
             <a:pPr algn="ctr"/>
             <a:r>
-              <a:rPr sz="1000" b="1">
+              <a:rPr sz="1400" b="1" dirty="0">
                 <a:solidFill>
                   <a:srgbClr val="315EFB"/>
                 </a:solidFill>
@@ -5523,7 +8109,7 @@
         </p:nvSpPr>
         <p:spPr>
           <a:xfrm>
-            <a:off x="777240" y="2057400"/>
+            <a:off x="777240" y="2454364"/>
             <a:ext cx="164592" cy="228600"/>
           </a:xfrm>
           <a:prstGeom prst="rect">
@@ -5558,8 +8144,8 @@
         </p:nvSpPr>
         <p:spPr>
           <a:xfrm>
-            <a:off x="996695" y="2057400"/>
-            <a:ext cx="5724144" cy="384048"/>
+            <a:off x="996695" y="2454364"/>
+            <a:ext cx="5724144" cy="350865"/>
           </a:xfrm>
           <a:prstGeom prst="rect">
             <a:avLst/>
@@ -5574,14 +8160,47 @@
           <a:p>
             <a:pPr algn="l"/>
             <a:r>
-              <a:rPr sz="1500" b="0">
-                <a:solidFill>
-                  <a:srgbClr val="172033"/>
-                </a:solidFill>
-                <a:latin typeface="Aptos"/>
-              </a:rPr>
-              <a:t>DeepSeek V4.1 Flash через OpenRouter</a:t>
-            </a:r>
+              <a:rPr b="0" dirty="0">
+                <a:solidFill>
+                  <a:srgbClr val="172033"/>
+                </a:solidFill>
+                <a:latin typeface="Aptos"/>
+              </a:rPr>
+              <a:t>DeepSeek V4.1 Flash </a:t>
+            </a:r>
+            <a:r>
+              <a:rPr b="0" dirty="0" err="1">
+                <a:solidFill>
+                  <a:srgbClr val="172033"/>
+                </a:solidFill>
+                <a:latin typeface="Aptos"/>
+              </a:rPr>
+              <a:t>через</a:t>
+            </a:r>
+            <a:r>
+              <a:rPr b="0" dirty="0">
+                <a:solidFill>
+                  <a:srgbClr val="172033"/>
+                </a:solidFill>
+                <a:latin typeface="Aptos"/>
+              </a:rPr>
+              <a:t> </a:t>
+            </a:r>
+            <a:r>
+              <a:rPr b="0" dirty="0" err="1">
+                <a:solidFill>
+                  <a:srgbClr val="172033"/>
+                </a:solidFill>
+                <a:latin typeface="Aptos"/>
+              </a:rPr>
+              <a:t>OpenRouter</a:t>
+            </a:r>
+            <a:endParaRPr b="0" dirty="0">
+              <a:solidFill>
+                <a:srgbClr val="172033"/>
+              </a:solidFill>
+              <a:latin typeface="Aptos"/>
+            </a:endParaRPr>
           </a:p>
         </p:txBody>
       </p:sp>
@@ -5593,7 +8212,7 @@
         </p:nvSpPr>
         <p:spPr>
           <a:xfrm>
-            <a:off x="777240" y="2578608"/>
+            <a:off x="777240" y="2975572"/>
             <a:ext cx="164592" cy="228600"/>
           </a:xfrm>
           <a:prstGeom prst="rect">
@@ -5628,8 +8247,8 @@
         </p:nvSpPr>
         <p:spPr>
           <a:xfrm>
-            <a:off x="996695" y="2578608"/>
-            <a:ext cx="5724144" cy="384048"/>
+            <a:off x="996695" y="2975572"/>
+            <a:ext cx="5724144" cy="350865"/>
           </a:xfrm>
           <a:prstGeom prst="rect">
             <a:avLst/>
@@ -5644,14 +8263,83 @@
           <a:p>
             <a:pPr algn="l"/>
             <a:r>
-              <a:rPr sz="1500" b="0">
-                <a:solidFill>
-                  <a:srgbClr val="172033"/>
-                </a:solidFill>
-                <a:latin typeface="Aptos"/>
-              </a:rPr>
-              <a:t>temperature 0, максимум 4096 токенов на ответ</a:t>
-            </a:r>
+              <a:rPr lang="ru-RU" dirty="0">
+                <a:solidFill>
+                  <a:srgbClr val="172033"/>
+                </a:solidFill>
+                <a:latin typeface="Aptos"/>
+              </a:rPr>
+              <a:t>М</a:t>
+            </a:r>
+            <a:r>
+              <a:rPr b="0" dirty="0" err="1">
+                <a:solidFill>
+                  <a:srgbClr val="172033"/>
+                </a:solidFill>
+                <a:latin typeface="Aptos"/>
+              </a:rPr>
+              <a:t>аксимум</a:t>
+            </a:r>
+            <a:r>
+              <a:rPr b="0" dirty="0">
+                <a:solidFill>
+                  <a:srgbClr val="172033"/>
+                </a:solidFill>
+                <a:latin typeface="Aptos"/>
+              </a:rPr>
+              <a:t> 4096 </a:t>
+            </a:r>
+            <a:r>
+              <a:rPr b="0" dirty="0" err="1">
+                <a:solidFill>
+                  <a:srgbClr val="172033"/>
+                </a:solidFill>
+                <a:latin typeface="Aptos"/>
+              </a:rPr>
+              <a:t>токенов</a:t>
+            </a:r>
+            <a:r>
+              <a:rPr b="0" dirty="0">
+                <a:solidFill>
+                  <a:srgbClr val="172033"/>
+                </a:solidFill>
+                <a:latin typeface="Aptos"/>
+              </a:rPr>
+              <a:t> </a:t>
+            </a:r>
+            <a:r>
+              <a:rPr b="0" dirty="0" err="1">
+                <a:solidFill>
+                  <a:srgbClr val="172033"/>
+                </a:solidFill>
+                <a:latin typeface="Aptos"/>
+              </a:rPr>
+              <a:t>на</a:t>
+            </a:r>
+            <a:r>
+              <a:rPr b="0" dirty="0">
+                <a:solidFill>
+                  <a:srgbClr val="172033"/>
+                </a:solidFill>
+                <a:latin typeface="Aptos"/>
+              </a:rPr>
+              <a:t> </a:t>
+            </a:r>
+            <a:r>
+              <a:rPr b="0" dirty="0" err="1">
+                <a:solidFill>
+                  <a:srgbClr val="172033"/>
+                </a:solidFill>
+                <a:latin typeface="Aptos"/>
+              </a:rPr>
+              <a:t>ответ</a:t>
+            </a:r>
+            <a:endParaRPr b="0" dirty="0">
+              <a:solidFill>
+                <a:srgbClr val="172033"/>
+              </a:solidFill>
+              <a:latin typeface="Aptos"/>
+            </a:endParaRPr>
           </a:p>
         </p:txBody>
       </p:sp>
@@ -5663,7 +8351,7 @@
         </p:nvSpPr>
         <p:spPr>
           <a:xfrm>
-            <a:off x="777240" y="3099816"/>
+            <a:off x="777240" y="3496780"/>
             <a:ext cx="164592" cy="228600"/>
           </a:xfrm>
           <a:prstGeom prst="rect">
@@ -5698,8 +8386,8 @@
         </p:nvSpPr>
         <p:spPr>
           <a:xfrm>
-            <a:off x="996695" y="3099816"/>
-            <a:ext cx="5724144" cy="384048"/>
+            <a:off x="996695" y="3496780"/>
+            <a:ext cx="5724144" cy="350865"/>
           </a:xfrm>
           <a:prstGeom prst="rect">
             <a:avLst/>
@@ -5714,14 +8402,92 @@
           <a:p>
             <a:pPr algn="l"/>
             <a:r>
-              <a:rPr sz="1500" b="0">
-                <a:solidFill>
-                  <a:srgbClr val="172033"/>
-                </a:solidFill>
-                <a:latin typeface="Aptos"/>
-              </a:rPr>
-              <a:t>до 3 попыток и 30 шагов на задачу</a:t>
-            </a:r>
+              <a:rPr lang="ru-RU" dirty="0">
+                <a:solidFill>
+                  <a:srgbClr val="172033"/>
+                </a:solidFill>
+                <a:latin typeface="Aptos"/>
+              </a:rPr>
+              <a:t>Д</a:t>
+            </a:r>
+            <a:r>
+              <a:rPr b="0" dirty="0">
+                <a:solidFill>
+                  <a:srgbClr val="172033"/>
+                </a:solidFill>
+                <a:latin typeface="Aptos"/>
+              </a:rPr>
+              <a:t>о 3 </a:t>
+            </a:r>
+            <a:r>
+              <a:rPr b="0" dirty="0" err="1">
+                <a:solidFill>
+                  <a:srgbClr val="172033"/>
+                </a:solidFill>
+                <a:latin typeface="Aptos"/>
+              </a:rPr>
+              <a:t>попыток</a:t>
+            </a:r>
+            <a:r>
+              <a:rPr b="0" dirty="0">
+                <a:solidFill>
+                  <a:srgbClr val="172033"/>
+                </a:solidFill>
+                <a:latin typeface="Aptos"/>
+              </a:rPr>
+              <a:t> и 30 </a:t>
+            </a:r>
+            <a:r>
+              <a:rPr b="0" dirty="0" err="1">
+                <a:solidFill>
+                  <a:srgbClr val="172033"/>
+                </a:solidFill>
+                <a:latin typeface="Aptos"/>
+              </a:rPr>
+              <a:t>шагов</a:t>
+            </a:r>
+            <a:r>
+              <a:rPr b="0" dirty="0">
+                <a:solidFill>
+                  <a:srgbClr val="172033"/>
+                </a:solidFill>
+                <a:latin typeface="Aptos"/>
+              </a:rPr>
+              <a:t> </a:t>
+            </a:r>
+            <a:r>
+              <a:rPr b="0" dirty="0" err="1">
+                <a:solidFill>
+                  <a:srgbClr val="172033"/>
+                </a:solidFill>
+                <a:latin typeface="Aptos"/>
+              </a:rPr>
+              <a:t>на</a:t>
+            </a:r>
+            <a:r>
+              <a:rPr b="0" dirty="0">
+                <a:solidFill>
+                  <a:srgbClr val="172033"/>
+                </a:solidFill>
+                <a:latin typeface="Aptos"/>
+              </a:rPr>
+              <a:t> </a:t>
+            </a:r>
+            <a:r>
+              <a:rPr b="0" dirty="0" err="1">
+                <a:solidFill>
+                  <a:srgbClr val="172033"/>
+                </a:solidFill>
+                <a:latin typeface="Aptos"/>
+              </a:rPr>
+              <a:t>задачу</a:t>
+            </a:r>
+            <a:endParaRPr b="0" dirty="0">
+              <a:solidFill>
+                <a:srgbClr val="172033"/>
+              </a:solidFill>
+              <a:latin typeface="Aptos"/>
+            </a:endParaRPr>
           </a:p>
         </p:txBody>
       </p:sp>
@@ -5733,7 +8499,7 @@
         </p:nvSpPr>
         <p:spPr>
           <a:xfrm>
-            <a:off x="777240" y="3621024"/>
+            <a:off x="777240" y="4017988"/>
             <a:ext cx="164592" cy="228600"/>
           </a:xfrm>
           <a:prstGeom prst="rect">
@@ -5768,8 +8534,8 @@
         </p:nvSpPr>
         <p:spPr>
           <a:xfrm>
-            <a:off x="996695" y="3621024"/>
-            <a:ext cx="5724144" cy="384048"/>
+            <a:off x="996695" y="4017988"/>
+            <a:ext cx="5724144" cy="350865"/>
           </a:xfrm>
           <a:prstGeom prst="rect">
             <a:avLst/>
@@ -5784,14 +8550,101 @@
           <a:p>
             <a:pPr algn="l"/>
             <a:r>
-              <a:rPr sz="1500" b="0">
-                <a:solidFill>
-                  <a:srgbClr val="172033"/>
-                </a:solidFill>
-                <a:latin typeface="Aptos"/>
-              </a:rPr>
-              <a:t>общий лимит: 60 000 токенов на задачу</a:t>
-            </a:r>
+              <a:rPr lang="ru-RU" dirty="0">
+                <a:solidFill>
+                  <a:srgbClr val="172033"/>
+                </a:solidFill>
+                <a:latin typeface="Aptos"/>
+              </a:rPr>
+              <a:t>О</a:t>
+            </a:r>
+            <a:r>
+              <a:rPr b="0" dirty="0" err="1">
+                <a:solidFill>
+                  <a:srgbClr val="172033"/>
+                </a:solidFill>
+                <a:latin typeface="Aptos"/>
+              </a:rPr>
+              <a:t>бщий</a:t>
+            </a:r>
+            <a:r>
+              <a:rPr b="0" dirty="0">
+                <a:solidFill>
+                  <a:srgbClr val="172033"/>
+                </a:solidFill>
+                <a:latin typeface="Aptos"/>
+              </a:rPr>
+              <a:t> </a:t>
+            </a:r>
+            <a:r>
+              <a:rPr b="0" dirty="0" err="1">
+                <a:solidFill>
+                  <a:srgbClr val="172033"/>
+                </a:solidFill>
+                <a:latin typeface="Aptos"/>
+              </a:rPr>
+              <a:t>лимит</a:t>
+            </a:r>
+            <a:r>
+              <a:rPr b="0" dirty="0">
+                <a:solidFill>
+                  <a:srgbClr val="172033"/>
+                </a:solidFill>
+                <a:latin typeface="Aptos"/>
+              </a:rPr>
+              <a:t>: 60 000 </a:t>
+            </a:r>
+            <a:r>
+              <a:rPr b="0" dirty="0" err="1">
+                <a:solidFill>
+                  <a:srgbClr val="172033"/>
+                </a:solidFill>
+                <a:latin typeface="Aptos"/>
+              </a:rPr>
+              <a:t>токенов</a:t>
+            </a:r>
+            <a:r>
+              <a:rPr b="0" dirty="0">
+                <a:solidFill>
+                  <a:srgbClr val="172033"/>
+                </a:solidFill>
+                <a:latin typeface="Aptos"/>
+              </a:rPr>
+              <a:t> </a:t>
+            </a:r>
+            <a:r>
+              <a:rPr b="0" dirty="0" err="1">
+                <a:solidFill>
+                  <a:srgbClr val="172033"/>
+                </a:solidFill>
+                <a:latin typeface="Aptos"/>
+              </a:rPr>
+              <a:t>на</a:t>
+            </a:r>
+            <a:r>
+              <a:rPr b="0" dirty="0">
+                <a:solidFill>
+                  <a:srgbClr val="172033"/>
+                </a:solidFill>
+                <a:latin typeface="Aptos"/>
+              </a:rPr>
+              <a:t> </a:t>
+            </a:r>
+            <a:r>
+              <a:rPr b="0" dirty="0" err="1">
+                <a:solidFill>
+                  <a:srgbClr val="172033"/>
+                </a:solidFill>
+                <a:latin typeface="Aptos"/>
+              </a:rPr>
+              <a:t>задачу</a:t>
+            </a:r>
+            <a:endParaRPr b="0" dirty="0">
+              <a:solidFill>
+                <a:srgbClr val="172033"/>
+              </a:solidFill>
+              <a:latin typeface="Aptos"/>
+            </a:endParaRPr>
           </a:p>
         </p:txBody>
       </p:sp>
@@ -5803,7 +8656,7 @@
         </p:nvSpPr>
         <p:spPr>
           <a:xfrm>
-            <a:off x="777240" y="4142232"/>
+            <a:off x="777240" y="4539196"/>
             <a:ext cx="164592" cy="228600"/>
           </a:xfrm>
           <a:prstGeom prst="rect">
@@ -5838,8 +8691,8 @@
         </p:nvSpPr>
         <p:spPr>
           <a:xfrm>
-            <a:off x="996695" y="4142232"/>
-            <a:ext cx="5724144" cy="384048"/>
+            <a:off x="996695" y="4539196"/>
+            <a:ext cx="5724144" cy="627864"/>
           </a:xfrm>
           <a:prstGeom prst="rect">
             <a:avLst/>
@@ -5854,14 +8707,155 @@
           <a:p>
             <a:pPr algn="l"/>
             <a:r>
-              <a:rPr sz="1500" b="0">
-                <a:solidFill>
-                  <a:srgbClr val="172033"/>
-                </a:solidFill>
-                <a:latin typeface="Aptos"/>
-              </a:rPr>
-              <a:t>один набор исходного кода и тестов для всех подходов</a:t>
-            </a:r>
+              <a:rPr lang="ru-RU" dirty="0">
+                <a:solidFill>
+                  <a:srgbClr val="172033"/>
+                </a:solidFill>
+                <a:latin typeface="Aptos"/>
+              </a:rPr>
+              <a:t>О</a:t>
+            </a:r>
+            <a:r>
+              <a:rPr b="0" dirty="0" err="1">
+                <a:solidFill>
+                  <a:srgbClr val="172033"/>
+                </a:solidFill>
+                <a:latin typeface="Aptos"/>
+              </a:rPr>
+              <a:t>дин</a:t>
+            </a:r>
+            <a:r>
+              <a:rPr b="0" dirty="0">
+                <a:solidFill>
+                  <a:srgbClr val="172033"/>
+                </a:solidFill>
+                <a:latin typeface="Aptos"/>
+              </a:rPr>
+              <a:t> </a:t>
+            </a:r>
+            <a:r>
+              <a:rPr b="0" dirty="0" err="1">
+                <a:solidFill>
+                  <a:srgbClr val="172033"/>
+                </a:solidFill>
+                <a:latin typeface="Aptos"/>
+              </a:rPr>
+              <a:t>набор</a:t>
+            </a:r>
+            <a:r>
+              <a:rPr b="0" dirty="0">
+                <a:solidFill>
+                  <a:srgbClr val="172033"/>
+                </a:solidFill>
+                <a:latin typeface="Aptos"/>
+              </a:rPr>
+              <a:t> </a:t>
+            </a:r>
+            <a:r>
+              <a:rPr b="0" dirty="0" err="1">
+                <a:solidFill>
+                  <a:srgbClr val="172033"/>
+                </a:solidFill>
+                <a:latin typeface="Aptos"/>
+              </a:rPr>
+              <a:t>исходного</a:t>
+            </a:r>
+            <a:r>
+              <a:rPr b="0" dirty="0">
+                <a:solidFill>
+                  <a:srgbClr val="172033"/>
+                </a:solidFill>
+                <a:latin typeface="Aptos"/>
+              </a:rPr>
+              <a:t> </a:t>
+            </a:r>
+            <a:r>
+              <a:rPr b="0" dirty="0" err="1">
+                <a:solidFill>
+                  <a:srgbClr val="172033"/>
+                </a:solidFill>
+                <a:latin typeface="Aptos"/>
+              </a:rPr>
+              <a:t>кода</a:t>
+            </a:r>
+            <a:r>
+              <a:rPr b="0" dirty="0">
+                <a:solidFill>
+                  <a:srgbClr val="172033"/>
+                </a:solidFill>
+                <a:latin typeface="Aptos"/>
+              </a:rPr>
+              <a:t> и </a:t>
+            </a:r>
+            <a:r>
+              <a:rPr b="0" dirty="0" err="1">
+                <a:solidFill>
+                  <a:srgbClr val="172033"/>
+                </a:solidFill>
+                <a:latin typeface="Aptos"/>
+              </a:rPr>
+              <a:t>тестов</a:t>
+            </a:r>
+            <a:r>
+              <a:rPr b="0" dirty="0">
+                <a:solidFill>
+                  <a:srgbClr val="172033"/>
+                </a:solidFill>
+                <a:latin typeface="Aptos"/>
+              </a:rPr>
+              <a:t> </a:t>
+            </a:r>
+            <a:r>
+              <a:rPr b="0" dirty="0" err="1">
+                <a:solidFill>
+                  <a:srgbClr val="172033"/>
+                </a:solidFill>
+                <a:latin typeface="Aptos"/>
+              </a:rPr>
+              <a:t>для</a:t>
+            </a:r>
+            <a:r>
+              <a:rPr b="0" dirty="0">
+                <a:solidFill>
+                  <a:srgbClr val="172033"/>
+                </a:solidFill>
+                <a:latin typeface="Aptos"/>
+              </a:rPr>
+              <a:t> </a:t>
+            </a:r>
+            <a:r>
+              <a:rPr b="0" dirty="0" err="1">
+                <a:solidFill>
+                  <a:srgbClr val="172033"/>
+                </a:solidFill>
+                <a:latin typeface="Aptos"/>
+              </a:rPr>
+              <a:t>всех</a:t>
+            </a:r>
+            <a:r>
+              <a:rPr b="0" dirty="0">
+                <a:solidFill>
+                  <a:srgbClr val="172033"/>
+                </a:solidFill>
+                <a:latin typeface="Aptos"/>
+              </a:rPr>
+              <a:t> </a:t>
+            </a:r>
+            <a:r>
+              <a:rPr b="0" dirty="0" err="1">
+                <a:solidFill>
+                  <a:srgbClr val="172033"/>
+                </a:solidFill>
+                <a:latin typeface="Aptos"/>
+              </a:rPr>
+              <a:t>подходов</a:t>
+            </a:r>
+            <a:endParaRPr b="0" dirty="0">
+              <a:solidFill>
+                <a:srgbClr val="172033"/>
+              </a:solidFill>
+              <a:latin typeface="Aptos"/>
+            </a:endParaRPr>
           </a:p>
         </p:txBody>
       </p:sp>
@@ -5873,8 +8867,8 @@
         </p:nvSpPr>
         <p:spPr>
           <a:xfrm>
-            <a:off x="7315200" y="1965960"/>
-            <a:ext cx="4069080" cy="2377440"/>
+            <a:off x="7345680" y="2454364"/>
+            <a:ext cx="4069080" cy="2505456"/>
           </a:xfrm>
           <a:prstGeom prst="roundRect">
             <a:avLst>
@@ -5921,8 +8915,8 @@
         </p:nvSpPr>
         <p:spPr>
           <a:xfrm>
-            <a:off x="7571231" y="2331720"/>
-            <a:ext cx="3520440" cy="1737360"/>
+            <a:off x="7684008" y="2717336"/>
+            <a:ext cx="3520440" cy="1885068"/>
           </a:xfrm>
           <a:prstGeom prst="rect">
             <a:avLst/>
@@ -5935,29 +8929,311 @@
           </a:bodyPr>
           <a:lstStyle/>
           <a:p>
-            <a:pPr algn="l"/>
-            <a:r>
-              <a:rPr sz="1600" b="0">
-                <a:solidFill>
-                  <a:srgbClr val="172033"/>
-                </a:solidFill>
-                <a:latin typeface="Aptos"/>
-              </a:rPr>
-              <a:t>Метрики: итоговый успех, успех с 1-й попытки, токены/стоимость и медиана времени; неудачные задачи включены. Пилот dev, выводы предварительные.</a:t>
-            </a:r>
-          </a:p>
-        </p:txBody>
-      </p:sp>
-      <p:sp>
-        <p:nvSpPr>
-          <p:cNvPr id="25" name="TextBox 24"/>
+            <a:pPr marL="285750" indent="-285750" algn="l">
+              <a:lnSpc>
+                <a:spcPct val="150000"/>
+              </a:lnSpc>
+              <a:buFont typeface="Arial" panose="020B0604020202020204" pitchFamily="34" charset="0"/>
+              <a:buChar char="•"/>
+            </a:pPr>
+            <a:r>
+              <a:rPr sz="1600" b="0" dirty="0" err="1">
+                <a:solidFill>
+                  <a:srgbClr val="172033"/>
+                </a:solidFill>
+                <a:latin typeface="Aptos"/>
+              </a:rPr>
+              <a:t>Метрики</a:t>
+            </a:r>
+            <a:r>
+              <a:rPr sz="1600" b="0" dirty="0">
+                <a:solidFill>
+                  <a:srgbClr val="172033"/>
+                </a:solidFill>
+                <a:latin typeface="Aptos"/>
+              </a:rPr>
+              <a:t>: </a:t>
+            </a:r>
+            <a:r>
+              <a:rPr sz="1600" b="0" dirty="0" err="1">
+                <a:solidFill>
+                  <a:srgbClr val="172033"/>
+                </a:solidFill>
+                <a:latin typeface="Aptos"/>
+              </a:rPr>
+              <a:t>итоговый</a:t>
+            </a:r>
+            <a:r>
+              <a:rPr sz="1600" b="0" dirty="0">
+                <a:solidFill>
+                  <a:srgbClr val="172033"/>
+                </a:solidFill>
+                <a:latin typeface="Aptos"/>
+              </a:rPr>
+              <a:t> </a:t>
+            </a:r>
+            <a:r>
+              <a:rPr sz="1600" b="0" dirty="0" err="1">
+                <a:solidFill>
+                  <a:srgbClr val="172033"/>
+                </a:solidFill>
+                <a:latin typeface="Aptos"/>
+              </a:rPr>
+              <a:t>успех</a:t>
+            </a:r>
+            <a:r>
+              <a:rPr sz="1600" b="0" dirty="0">
+                <a:solidFill>
+                  <a:srgbClr val="172033"/>
+                </a:solidFill>
+                <a:latin typeface="Aptos"/>
+              </a:rPr>
+              <a:t>, </a:t>
+            </a:r>
+            <a:r>
+              <a:rPr sz="1600" b="0" dirty="0" err="1">
+                <a:solidFill>
+                  <a:srgbClr val="172033"/>
+                </a:solidFill>
+                <a:latin typeface="Aptos"/>
+              </a:rPr>
+              <a:t>успех</a:t>
+            </a:r>
+            <a:r>
+              <a:rPr sz="1600" b="0" dirty="0">
+                <a:solidFill>
+                  <a:srgbClr val="172033"/>
+                </a:solidFill>
+                <a:latin typeface="Aptos"/>
+              </a:rPr>
+              <a:t> с 1-й </a:t>
+            </a:r>
+            <a:r>
+              <a:rPr sz="1600" b="0" dirty="0" err="1">
+                <a:solidFill>
+                  <a:srgbClr val="172033"/>
+                </a:solidFill>
+                <a:latin typeface="Aptos"/>
+              </a:rPr>
+              <a:t>попытки</a:t>
+            </a:r>
+            <a:r>
+              <a:rPr sz="1600" b="0" dirty="0">
+                <a:solidFill>
+                  <a:srgbClr val="172033"/>
+                </a:solidFill>
+                <a:latin typeface="Aptos"/>
+              </a:rPr>
+              <a:t>, </a:t>
+            </a:r>
+            <a:r>
+              <a:rPr sz="1600" b="0" dirty="0" err="1">
+                <a:solidFill>
+                  <a:srgbClr val="172033"/>
+                </a:solidFill>
+                <a:latin typeface="Aptos"/>
+              </a:rPr>
+              <a:t>токены</a:t>
+            </a:r>
+            <a:r>
+              <a:rPr sz="1600" b="0" dirty="0">
+                <a:solidFill>
+                  <a:srgbClr val="172033"/>
+                </a:solidFill>
+                <a:latin typeface="Aptos"/>
+              </a:rPr>
+              <a:t>/</a:t>
+            </a:r>
+            <a:r>
+              <a:rPr sz="1600" b="0" dirty="0" err="1">
+                <a:solidFill>
+                  <a:srgbClr val="172033"/>
+                </a:solidFill>
+                <a:latin typeface="Aptos"/>
+              </a:rPr>
+              <a:t>стоимость</a:t>
+            </a:r>
+            <a:r>
+              <a:rPr sz="1600" b="0" dirty="0">
+                <a:solidFill>
+                  <a:srgbClr val="172033"/>
+                </a:solidFill>
+                <a:latin typeface="Aptos"/>
+              </a:rPr>
+              <a:t> и </a:t>
+            </a:r>
+            <a:r>
+              <a:rPr sz="1600" b="0" dirty="0" err="1">
+                <a:solidFill>
+                  <a:srgbClr val="172033"/>
+                </a:solidFill>
+                <a:latin typeface="Aptos"/>
+              </a:rPr>
+              <a:t>медиана</a:t>
+            </a:r>
+            <a:r>
+              <a:rPr sz="1600" b="0" dirty="0">
+                <a:solidFill>
+                  <a:srgbClr val="172033"/>
+                </a:solidFill>
+                <a:latin typeface="Aptos"/>
+              </a:rPr>
+              <a:t> </a:t>
+            </a:r>
+            <a:r>
+              <a:rPr sz="1600" b="0" dirty="0" err="1">
+                <a:solidFill>
+                  <a:srgbClr val="172033"/>
+                </a:solidFill>
+                <a:latin typeface="Aptos"/>
+              </a:rPr>
+              <a:t>времени</a:t>
+            </a:r>
+            <a:endParaRPr lang="ru-RU" sz="1600" b="0" dirty="0">
+              <a:solidFill>
+                <a:srgbClr val="172033"/>
+              </a:solidFill>
+              <a:latin typeface="Aptos"/>
+            </a:endParaRPr>
+          </a:p>
+          <a:p>
+            <a:pPr marL="285750" indent="-285750" algn="l">
+              <a:lnSpc>
+                <a:spcPct val="150000"/>
+              </a:lnSpc>
+              <a:buFont typeface="Arial" panose="020B0604020202020204" pitchFamily="34" charset="0"/>
+              <a:buChar char="•"/>
+            </a:pPr>
+            <a:r>
+              <a:rPr lang="ru-RU" sz="1600" dirty="0">
+                <a:solidFill>
+                  <a:srgbClr val="172033"/>
+                </a:solidFill>
+                <a:latin typeface="Aptos"/>
+              </a:rPr>
+              <a:t>Н</a:t>
+            </a:r>
+            <a:r>
+              <a:rPr sz="1600" b="0" dirty="0" err="1">
+                <a:solidFill>
+                  <a:srgbClr val="172033"/>
+                </a:solidFill>
+                <a:latin typeface="Aptos"/>
+              </a:rPr>
+              <a:t>еудачные</a:t>
+            </a:r>
+            <a:r>
+              <a:rPr sz="1600" b="0" dirty="0">
+                <a:solidFill>
+                  <a:srgbClr val="172033"/>
+                </a:solidFill>
+                <a:latin typeface="Aptos"/>
+              </a:rPr>
+              <a:t> </a:t>
+            </a:r>
+            <a:r>
+              <a:rPr sz="1600" b="0" dirty="0" err="1">
+                <a:solidFill>
+                  <a:srgbClr val="172033"/>
+                </a:solidFill>
+                <a:latin typeface="Aptos"/>
+              </a:rPr>
+              <a:t>задачи</a:t>
+            </a:r>
+            <a:r>
+              <a:rPr sz="1600" b="0" dirty="0">
+                <a:solidFill>
+                  <a:srgbClr val="172033"/>
+                </a:solidFill>
+                <a:latin typeface="Aptos"/>
+              </a:rPr>
+              <a:t> </a:t>
+            </a:r>
+            <a:r>
+              <a:rPr sz="1600" b="0" dirty="0" err="1">
+                <a:solidFill>
+                  <a:srgbClr val="172033"/>
+                </a:solidFill>
+                <a:latin typeface="Aptos"/>
+              </a:rPr>
+              <a:t>включены</a:t>
+            </a:r>
+            <a:endParaRPr lang="ru-RU" sz="1600" b="0" dirty="0">
+              <a:solidFill>
+                <a:srgbClr val="172033"/>
+              </a:solidFill>
+              <a:latin typeface="Aptos"/>
+            </a:endParaRPr>
+          </a:p>
+          <a:p>
+            <a:pPr marL="285750" indent="-285750" algn="l">
+              <a:lnSpc>
+                <a:spcPct val="150000"/>
+              </a:lnSpc>
+              <a:buFont typeface="Arial" panose="020B0604020202020204" pitchFamily="34" charset="0"/>
+              <a:buChar char="•"/>
+            </a:pPr>
+            <a:r>
+              <a:rPr lang="ru-RU" sz="1600" dirty="0">
+                <a:solidFill>
+                  <a:srgbClr val="172033"/>
+                </a:solidFill>
+                <a:latin typeface="Aptos"/>
+              </a:rPr>
+              <a:t>В</a:t>
+            </a:r>
+            <a:r>
+              <a:rPr sz="1600" b="0" dirty="0" err="1">
+                <a:solidFill>
+                  <a:srgbClr val="172033"/>
+                </a:solidFill>
+                <a:latin typeface="Aptos"/>
+              </a:rPr>
+              <a:t>ыводы</a:t>
+            </a:r>
+            <a:r>
+              <a:rPr sz="1600" b="0" dirty="0">
+                <a:solidFill>
+                  <a:srgbClr val="172033"/>
+                </a:solidFill>
+                <a:latin typeface="Aptos"/>
+              </a:rPr>
+              <a:t> </a:t>
+            </a:r>
+            <a:r>
+              <a:rPr sz="1600" b="0" dirty="0" err="1">
+                <a:solidFill>
+                  <a:srgbClr val="172033"/>
+                </a:solidFill>
+                <a:latin typeface="Aptos"/>
+              </a:rPr>
+              <a:t>предварительные</a:t>
+            </a:r>
+            <a:endParaRPr sz="1600" b="0" dirty="0">
+              <a:solidFill>
+                <a:srgbClr val="172033"/>
+              </a:solidFill>
+              <a:latin typeface="Aptos"/>
+            </a:endParaRPr>
+          </a:p>
+        </p:txBody>
+      </p:sp>
+      <p:sp>
+        <p:nvSpPr>
+          <p:cNvPr id="27" name="TextBox 26">
+            <a:extLst>
+              <a:ext uri="{FF2B5EF4-FFF2-40B4-BE49-F238E27FC236}">
+                <a16:creationId xmlns:a16="http://schemas.microsoft.com/office/drawing/2014/main" id="{68175220-7391-2925-0DE3-EFB6277D1DAF}"/>
+              </a:ext>
+            </a:extLst>
+          </p:cNvPr>
           <p:cNvSpPr txBox="1"/>
           <p:nvPr/>
         </p:nvSpPr>
         <p:spPr>
           <a:xfrm>
-            <a:off x="658368" y="6053328"/>
-            <a:ext cx="7315200" cy="182880"/>
+            <a:off x="774191" y="5176904"/>
+            <a:ext cx="164592" cy="228600"/>
           </a:xfrm>
           <a:prstGeom prst="rect">
             <a:avLst/>
@@ -5972,9 +9248,50 @@
           <a:p>
             <a:pPr algn="l"/>
             <a:r>
-              <a:rPr sz="1000" b="0">
-                <a:solidFill>
-                  <a:srgbClr val="617087"/>
+              <a:rPr sz="1500" b="1">
+                <a:solidFill>
+                  <a:srgbClr val="315EFB"/>
+                </a:solidFill>
+                <a:latin typeface="Aptos"/>
+              </a:rPr>
+              <a:t>•</a:t>
+            </a:r>
+          </a:p>
+        </p:txBody>
+      </p:sp>
+      <p:sp>
+        <p:nvSpPr>
+          <p:cNvPr id="29" name="TextBox 28">
+            <a:extLst>
+              <a:ext uri="{FF2B5EF4-FFF2-40B4-BE49-F238E27FC236}">
+                <a16:creationId xmlns:a16="http://schemas.microsoft.com/office/drawing/2014/main" id="{9B6BFB66-BF75-70CD-6005-4ACF04B80009}"/>
+              </a:ext>
+            </a:extLst>
+          </p:cNvPr>
+          <p:cNvSpPr txBox="1"/>
+          <p:nvPr/>
+        </p:nvSpPr>
+        <p:spPr>
+          <a:xfrm>
+            <a:off x="996695" y="5176904"/>
+            <a:ext cx="5724144" cy="627864"/>
+          </a:xfrm>
+          <a:prstGeom prst="rect">
+            <a:avLst/>
+          </a:prstGeom>
+          <a:noFill/>
+        </p:spPr>
+        <p:txBody>
+          <a:bodyPr wrap="square" lIns="36576" tIns="36576" rIns="36576" bIns="36576">
+            <a:spAutoFit/>
+          </a:bodyPr>
+          <a:lstStyle/>
+          <a:p>
+            <a:pPr algn="l"/>
+            <a:r>
+              <a:rPr lang="ru-RU" dirty="0">
+                <a:solidFill>
+                  <a:srgbClr val="172033"/>
                 </a:solidFill>
                 <a:latin typeface="Aptos"/>
               </a:rPr>
@@ -6126,41 +9443,6 @@
       </p:sp>
       <p:sp>
         <p:nvSpPr>
-          <p:cNvPr id="5" name="TextBox 4"/>
-          <p:cNvSpPr txBox="1"/>
-          <p:nvPr/>
-        </p:nvSpPr>
-        <p:spPr>
-          <a:xfrm>
-            <a:off x="658368" y="6492240"/>
-            <a:ext cx="7315200" cy="164592"/>
-          </a:xfrm>
-          <a:prstGeom prst="rect">
-            <a:avLst/>
-          </a:prstGeom>
-          <a:noFill/>
-        </p:spPr>
-        <p:txBody>
-          <a:bodyPr wrap="square" lIns="36576" tIns="36576" rIns="36576" bIns="36576">
-            <a:spAutoFit/>
-          </a:bodyPr>
-          <a:lstStyle/>
-          <a:p>
-            <a:pPr algn="l"/>
-            <a:r>
-              <a:rPr sz="800" b="0">
-                <a:solidFill>
-                  <a:srgbClr val="617087"/>
-                </a:solidFill>
-                <a:latin typeface="Aptos"/>
-              </a:rPr>
-              <a:t>LLM-отладчик Python-программ · промежуточный показ</a:t>
-            </a:r>
-          </a:p>
-        </p:txBody>
-      </p:sp>
-      <p:sp>
-        <p:nvSpPr>
           <p:cNvPr id="6" name="TextBox 5"/>
           <p:cNvSpPr txBox="1"/>
           <p:nvPr/>
@@ -6200,10 +9482,16 @@
           <p:cNvGraphicFramePr>
             <a:graphicFrameLocks noGrp="1"/>
           </p:cNvGraphicFramePr>
-          <p:nvPr/>
+          <p:nvPr>
+            <p:extLst>
+              <p:ext uri="{D42A27DB-BD31-4B8C-83A1-F6EECF244321}">
+                <p14:modId xmlns:p14="http://schemas.microsoft.com/office/powerpoint/2010/main" val="2364780641"/>
+              </p:ext>
+            </p:extLst>
+          </p:nvPr>
         </p:nvGraphicFramePr>
         <p:xfrm>
-          <a:off x="658368" y="1508760"/>
+          <a:off x="658368" y="1938528"/>
           <a:ext cx="5577840" cy="3200400"/>
         </p:xfrm>
         <a:graphic>
@@ -6612,8 +9900,8 @@
         </p:nvSpPr>
         <p:spPr>
           <a:xfrm>
-            <a:off x="713232" y="4901184"/>
-            <a:ext cx="5394960" cy="411480"/>
+            <a:off x="713232" y="5330952"/>
+            <a:ext cx="5394960" cy="566309"/>
           </a:xfrm>
           <a:prstGeom prst="rect">
             <a:avLst/>
@@ -6628,76 +9916,99 @@
           <a:p>
             <a:pPr algn="l"/>
             <a:r>
-              <a:rPr sz="1000" b="0">
-                <a:solidFill>
-                  <a:srgbClr val="617087"/>
-                </a:solidFill>
-                <a:latin typeface="Aptos"/>
-              </a:rPr>
-              <a:t>С первой попытки: workflow 10/30; single_agent 13/30; MAS 13/30.</a:t>
-            </a:r>
-          </a:p>
-        </p:txBody>
-      </p:sp>
-      <p:pic>
-        <p:nvPicPr>
-          <p:cNvPr id="9" name="Picture 8" descr="success_by_bin.png"/>
-          <p:cNvPicPr>
-            <a:picLocks noChangeAspect="1"/>
-          </p:cNvPicPr>
-          <p:nvPr/>
-        </p:nvPicPr>
-        <p:blipFill>
-          <a:blip r:embed="rId2"/>
-          <a:stretch>
-            <a:fillRect/>
-          </a:stretch>
-        </p:blipFill>
-        <p:spPr>
-          <a:xfrm>
-            <a:off x="6629400" y="1444752"/>
-            <a:ext cx="4892040" cy="2502904"/>
-          </a:xfrm>
-          <a:prstGeom prst="rect">
-            <a:avLst/>
-          </a:prstGeom>
-        </p:spPr>
-      </p:pic>
-      <p:sp>
-        <p:nvSpPr>
-          <p:cNvPr id="10" name="TextBox 9"/>
-          <p:cNvSpPr txBox="1"/>
-          <p:nvPr/>
-        </p:nvSpPr>
-        <p:spPr>
-          <a:xfrm>
-            <a:off x="658368" y="6053328"/>
-            <a:ext cx="7315200" cy="182880"/>
-          </a:xfrm>
-          <a:prstGeom prst="rect">
-            <a:avLst/>
-          </a:prstGeom>
-          <a:noFill/>
-        </p:spPr>
-        <p:txBody>
-          <a:bodyPr wrap="square" lIns="36576" tIns="36576" rIns="36576" bIns="36576">
-            <a:spAutoFit/>
-          </a:bodyPr>
-          <a:lstStyle/>
-          <a:p>
-            <a:pPr algn="l"/>
-            <a:r>
-              <a:rPr sz="1000" b="0">
-                <a:solidFill>
-                  <a:srgbClr val="617087"/>
-                </a:solidFill>
-                <a:latin typeface="Aptos"/>
-              </a:rPr>
-              <a:t>Всего: 10 easy, 10 medium, 10 hard</a:t>
-            </a:r>
-          </a:p>
-        </p:txBody>
-      </p:sp>
+              <a:rPr sz="1600" b="0" dirty="0">
+                <a:solidFill>
+                  <a:srgbClr val="617087"/>
+                </a:solidFill>
+                <a:latin typeface="Aptos"/>
+              </a:rPr>
+              <a:t>С </a:t>
+            </a:r>
+            <a:r>
+              <a:rPr sz="1600" b="0" dirty="0" err="1">
+                <a:solidFill>
+                  <a:srgbClr val="617087"/>
+                </a:solidFill>
+                <a:latin typeface="Aptos"/>
+              </a:rPr>
+              <a:t>первой</a:t>
+            </a:r>
+            <a:r>
+              <a:rPr sz="1600" b="0" dirty="0">
+                <a:solidFill>
+                  <a:srgbClr val="617087"/>
+                </a:solidFill>
+                <a:latin typeface="Aptos"/>
+              </a:rPr>
+              <a:t> </a:t>
+            </a:r>
+            <a:r>
+              <a:rPr sz="1600" b="0" dirty="0" err="1">
+                <a:solidFill>
+                  <a:srgbClr val="617087"/>
+                </a:solidFill>
+                <a:latin typeface="Aptos"/>
+              </a:rPr>
+              <a:t>попытки</a:t>
+            </a:r>
+            <a:r>
+              <a:rPr sz="1600" b="0" dirty="0">
+                <a:solidFill>
+                  <a:srgbClr val="617087"/>
+                </a:solidFill>
+                <a:latin typeface="Aptos"/>
+              </a:rPr>
+              <a:t>: workflow 10/30; </a:t>
+            </a:r>
+            <a:r>
+              <a:rPr sz="1600" b="0" dirty="0" err="1">
+                <a:solidFill>
+                  <a:srgbClr val="617087"/>
+                </a:solidFill>
+                <a:latin typeface="Aptos"/>
+              </a:rPr>
+              <a:t>single_agent</a:t>
+            </a:r>
+            <a:r>
+              <a:rPr sz="1600" b="0" dirty="0">
+                <a:solidFill>
+                  <a:srgbClr val="617087"/>
+                </a:solidFill>
+                <a:latin typeface="Aptos"/>
+              </a:rPr>
+              <a:t> 13/30; MAS 13/30.</a:t>
+            </a:r>
+          </a:p>
+        </p:txBody>
+      </p:sp>
+      <p:graphicFrame>
+        <p:nvGraphicFramePr>
+          <p:cNvPr id="13" name="Диаграмма 12">
+            <a:extLst>
+              <a:ext uri="{FF2B5EF4-FFF2-40B4-BE49-F238E27FC236}">
+                <a16:creationId xmlns:a16="http://schemas.microsoft.com/office/drawing/2014/main" id="{75854912-0EA5-B059-63B5-283DE9EE0C25}"/>
+              </a:ext>
+            </a:extLst>
+          </p:cNvPr>
+          <p:cNvGraphicFramePr/>
+          <p:nvPr>
+            <p:extLst>
+              <p:ext uri="{D42A27DB-BD31-4B8C-83A1-F6EECF244321}">
+                <p14:modId xmlns:p14="http://schemas.microsoft.com/office/powerpoint/2010/main" val="4183142802"/>
+              </p:ext>
+            </p:extLst>
+          </p:nvPr>
+        </p:nvGraphicFramePr>
+        <p:xfrm>
+          <a:off x="6593789" y="1938528"/>
+          <a:ext cx="5037379" cy="3958733"/>
+        </p:xfrm>
+        <a:graphic>
+          <a:graphicData uri="http://schemas.openxmlformats.org/drawingml/2006/chart">
+            <c:chart xmlns:c="http://schemas.openxmlformats.org/drawingml/2006/chart" xmlns:r="http://schemas.openxmlformats.org/officeDocument/2006/relationships" r:id="rId2"/>
+          </a:graphicData>
+        </a:graphic>
+      </p:graphicFrame>
     </p:spTree>
   </p:cSld>
   <p:clrMapOvr>
@@ -6835,41 +10146,6 @@
                 <a:latin typeface="Aptos"/>
               </a:rPr>
               <a:t>Цена включает и успешные, и неудачные запуски</a:t>
-            </a:r>
-          </a:p>
-        </p:txBody>
-      </p:sp>
-      <p:sp>
-        <p:nvSpPr>
-          <p:cNvPr id="5" name="TextBox 4"/>
-          <p:cNvSpPr txBox="1"/>
-          <p:nvPr/>
-        </p:nvSpPr>
-        <p:spPr>
-          <a:xfrm>
-            <a:off x="658368" y="6492240"/>
-            <a:ext cx="7315200" cy="164592"/>
-          </a:xfrm>
-          <a:prstGeom prst="rect">
-            <a:avLst/>
-          </a:prstGeom>
-          <a:noFill/>
-        </p:spPr>
-        <p:txBody>
-          <a:bodyPr wrap="square" lIns="36576" tIns="36576" rIns="36576" bIns="36576">
-            <a:spAutoFit/>
-          </a:bodyPr>
-          <a:lstStyle/>
-          <a:p>
-            <a:pPr algn="l"/>
-            <a:r>
-              <a:rPr sz="800" b="0">
-                <a:solidFill>
-                  <a:srgbClr val="617087"/>
-                </a:solidFill>
-                <a:latin typeface="Aptos"/>
-              </a:rPr>
-              <a:t>LLM-отладчик Python-программ · промежуточный показ</a:t>
             </a:r>
           </a:p>
         </p:txBody>
@@ -7445,7 +10721,7 @@
         <p:spPr>
           <a:xfrm>
             <a:off x="685800" y="4800600"/>
-            <a:ext cx="9601200" cy="420624"/>
+            <a:ext cx="9601200" cy="952825"/>
           </a:xfrm>
           <a:prstGeom prst="rect">
             <a:avLst/>
@@ -7458,51 +10734,183 @@
           </a:bodyPr>
           <a:lstStyle/>
           <a:p>
-            <a:pPr algn="l"/>
-            <a:r>
-              <a:rPr sz="2000" b="0">
-                <a:solidFill>
-                  <a:srgbClr val="617087"/>
-                </a:solidFill>
-                <a:latin typeface="Aptos"/>
-              </a:rPr>
-              <a:t>Workflow лидирует по качеству; single_agent дешевле и быстрее по медиане.</a:t>
-            </a:r>
-          </a:p>
-        </p:txBody>
-      </p:sp>
-      <p:sp>
-        <p:nvSpPr>
-          <p:cNvPr id="9" name="TextBox 8"/>
-          <p:cNvSpPr txBox="1"/>
-          <p:nvPr/>
-        </p:nvSpPr>
-        <p:spPr>
-          <a:xfrm>
-            <a:off x="658368" y="6053328"/>
-            <a:ext cx="7315200" cy="182880"/>
-          </a:xfrm>
-          <a:prstGeom prst="rect">
-            <a:avLst/>
-          </a:prstGeom>
-          <a:noFill/>
-        </p:spPr>
-        <p:txBody>
-          <a:bodyPr wrap="square" lIns="36576" tIns="36576" rIns="36576" bIns="36576">
-            <a:spAutoFit/>
-          </a:bodyPr>
-          <a:lstStyle/>
-          <a:p>
-            <a:pPr algn="l"/>
-            <a:r>
-              <a:rPr sz="1000" b="0">
-                <a:solidFill>
-                  <a:srgbClr val="617087"/>
-                </a:solidFill>
-                <a:latin typeface="Aptos"/>
-              </a:rPr>
-              <a:t>Токены и стоимость учитывают все вызовы модели</a:t>
-            </a:r>
+            <a:pPr algn="l">
+              <a:lnSpc>
+                <a:spcPct val="150000"/>
+              </a:lnSpc>
+            </a:pPr>
+            <a:r>
+              <a:rPr sz="2000" b="0" dirty="0">
+                <a:solidFill>
+                  <a:srgbClr val="617087"/>
+                </a:solidFill>
+                <a:latin typeface="Aptos"/>
+              </a:rPr>
+              <a:t>Workflow </a:t>
+            </a:r>
+            <a:r>
+              <a:rPr sz="2000" b="0" dirty="0" err="1">
+                <a:solidFill>
+                  <a:srgbClr val="617087"/>
+                </a:solidFill>
+                <a:latin typeface="Aptos"/>
+              </a:rPr>
+              <a:t>лидирует</a:t>
+            </a:r>
+            <a:r>
+              <a:rPr sz="2000" b="0" dirty="0">
+                <a:solidFill>
+                  <a:srgbClr val="617087"/>
+                </a:solidFill>
+                <a:latin typeface="Aptos"/>
+              </a:rPr>
+              <a:t> </a:t>
+            </a:r>
+            <a:r>
+              <a:rPr sz="2000" b="0" dirty="0" err="1">
+                <a:solidFill>
+                  <a:srgbClr val="617087"/>
+                </a:solidFill>
+                <a:latin typeface="Aptos"/>
+              </a:rPr>
+              <a:t>по</a:t>
+            </a:r>
+            <a:r>
+              <a:rPr sz="2000" b="0" dirty="0">
+                <a:solidFill>
+                  <a:srgbClr val="617087"/>
+                </a:solidFill>
+                <a:latin typeface="Aptos"/>
+              </a:rPr>
+              <a:t> </a:t>
+            </a:r>
+            <a:r>
+              <a:rPr sz="2000" b="0" dirty="0" err="1">
+                <a:solidFill>
+                  <a:srgbClr val="617087"/>
+                </a:solidFill>
+                <a:latin typeface="Aptos"/>
+              </a:rPr>
+              <a:t>качеству</a:t>
+            </a:r>
+            <a:endParaRPr lang="en-US" sz="2000" dirty="0">
+              <a:solidFill>
+                <a:srgbClr val="617087"/>
+              </a:solidFill>
+              <a:latin typeface="Aptos"/>
+            </a:endParaRPr>
+          </a:p>
+          <a:p>
+            <a:pPr algn="l">
+              <a:lnSpc>
+                <a:spcPct val="150000"/>
+              </a:lnSpc>
+            </a:pPr>
+            <a:r>
+              <a:rPr lang="en-US" sz="2000" dirty="0">
+                <a:solidFill>
+                  <a:srgbClr val="617087"/>
+                </a:solidFill>
+                <a:latin typeface="Aptos"/>
+              </a:rPr>
+              <a:t>S</a:t>
+            </a:r>
+            <a:r>
+              <a:rPr sz="2000" b="0" dirty="0">
+                <a:solidFill>
+                  <a:srgbClr val="617087"/>
+                </a:solidFill>
+                <a:latin typeface="Aptos"/>
+              </a:rPr>
+              <a:t>ingle</a:t>
+            </a:r>
+            <a:r>
+              <a:rPr lang="en-US" sz="2000" dirty="0">
+                <a:solidFill>
+                  <a:srgbClr val="617087"/>
+                </a:solidFill>
+                <a:latin typeface="Aptos"/>
+              </a:rPr>
+              <a:t> A</a:t>
+            </a:r>
+            <a:r>
+              <a:rPr sz="2000" b="0" dirty="0">
+                <a:solidFill>
+                  <a:srgbClr val="617087"/>
+                </a:solidFill>
+                <a:latin typeface="Aptos"/>
+              </a:rPr>
+              <a:t>gent </a:t>
+            </a:r>
+            <a:r>
+              <a:rPr sz="2000" b="0" dirty="0" err="1">
+                <a:solidFill>
+                  <a:srgbClr val="617087"/>
+                </a:solidFill>
+                <a:latin typeface="Aptos"/>
+              </a:rPr>
+              <a:t>дешевле</a:t>
+            </a:r>
+            <a:r>
+              <a:rPr sz="2000" b="0" dirty="0">
+                <a:solidFill>
+                  <a:srgbClr val="617087"/>
+                </a:solidFill>
+                <a:latin typeface="Aptos"/>
+              </a:rPr>
+              <a:t> и </a:t>
+            </a:r>
+            <a:r>
+              <a:rPr sz="2000" b="0" dirty="0" err="1">
+                <a:solidFill>
+                  <a:srgbClr val="617087"/>
+                </a:solidFill>
+                <a:latin typeface="Aptos"/>
+              </a:rPr>
+              <a:t>быстрее</a:t>
+            </a:r>
+            <a:r>
+              <a:rPr sz="2000" b="0" dirty="0">
+                <a:solidFill>
+                  <a:srgbClr val="617087"/>
+                </a:solidFill>
+                <a:latin typeface="Aptos"/>
+              </a:rPr>
+              <a:t> </a:t>
+            </a:r>
+            <a:r>
+              <a:rPr sz="2000" b="0" dirty="0" err="1">
+                <a:solidFill>
+                  <a:srgbClr val="617087"/>
+                </a:solidFill>
+                <a:latin typeface="Aptos"/>
+              </a:rPr>
+              <a:t>по</a:t>
+            </a:r>
+            <a:r>
+              <a:rPr sz="2000" b="0" dirty="0">
+                <a:solidFill>
+                  <a:srgbClr val="617087"/>
+                </a:solidFill>
+                <a:latin typeface="Aptos"/>
+              </a:rPr>
+              <a:t> </a:t>
+            </a:r>
+            <a:r>
+              <a:rPr sz="2000" b="0" dirty="0" err="1">
+                <a:solidFill>
+                  <a:srgbClr val="617087"/>
+                </a:solidFill>
+                <a:latin typeface="Aptos"/>
+              </a:rPr>
+              <a:t>медиане</a:t>
+            </a:r>
+            <a:endParaRPr lang="en-US" sz="2000" b="0" dirty="0">
+              <a:solidFill>
+                <a:srgbClr val="617087"/>
+              </a:solidFill>
+              <a:latin typeface="Aptos"/>
+            </a:endParaRPr>
           </a:p>
         </p:txBody>
       </p:sp>
@@ -7643,41 +11051,6 @@
                 <a:latin typeface="Aptos"/>
               </a:rPr>
               <a:t>Три показательных случая</a:t>
-            </a:r>
-          </a:p>
-        </p:txBody>
-      </p:sp>
-      <p:sp>
-        <p:nvSpPr>
-          <p:cNvPr id="5" name="TextBox 4"/>
-          <p:cNvSpPr txBox="1"/>
-          <p:nvPr/>
-        </p:nvSpPr>
-        <p:spPr>
-          <a:xfrm>
-            <a:off x="658368" y="6492240"/>
-            <a:ext cx="7315200" cy="164592"/>
-          </a:xfrm>
-          <a:prstGeom prst="rect">
-            <a:avLst/>
-          </a:prstGeom>
-          <a:noFill/>
-        </p:spPr>
-        <p:txBody>
-          <a:bodyPr wrap="square" lIns="36576" tIns="36576" rIns="36576" bIns="36576">
-            <a:spAutoFit/>
-          </a:bodyPr>
-          <a:lstStyle/>
-          <a:p>
-            <a:pPr algn="l"/>
-            <a:r>
-              <a:rPr sz="800" b="0">
-                <a:solidFill>
-                  <a:srgbClr val="617087"/>
-                </a:solidFill>
-                <a:latin typeface="Aptos"/>
-              </a:rPr>
-              <a:t>LLM-отладчик Python-программ · промежуточный показ</a:t>
             </a:r>
           </a:p>
         </p:txBody>
@@ -7855,7 +11228,7 @@
         <p:spPr>
           <a:xfrm>
             <a:off x="841247" y="2286000"/>
-            <a:ext cx="2971800" cy="658368"/>
+            <a:ext cx="2971800" cy="504754"/>
           </a:xfrm>
           <a:prstGeom prst="rect">
             <a:avLst/>
@@ -7870,13 +11243,94 @@
           <a:p>
             <a:pPr algn="l"/>
             <a:r>
-              <a:rPr sz="1200" b="0">
-                <a:solidFill>
-                  <a:srgbClr val="172033"/>
-                </a:solidFill>
-                <a:latin typeface="Aptos"/>
-              </a:rPr>
-              <a:t>Логика исправлена, но 44 из 46 тестов — TLE.</a:t>
+              <a:rPr sz="1400" b="0" dirty="0" err="1">
+                <a:solidFill>
+                  <a:srgbClr val="172033"/>
+                </a:solidFill>
+                <a:latin typeface="Aptos"/>
+              </a:rPr>
+              <a:t>Логика</a:t>
+            </a:r>
+            <a:r>
+              <a:rPr sz="1400" b="0" dirty="0">
+                <a:solidFill>
+                  <a:srgbClr val="172033"/>
+                </a:solidFill>
+                <a:latin typeface="Aptos"/>
+              </a:rPr>
+              <a:t> </a:t>
+            </a:r>
+            <a:r>
+              <a:rPr sz="1400" b="0" dirty="0" err="1">
+                <a:solidFill>
+                  <a:srgbClr val="172033"/>
+                </a:solidFill>
+                <a:latin typeface="Aptos"/>
+              </a:rPr>
+              <a:t>исправлена</a:t>
+            </a:r>
+            <a:r>
+              <a:rPr sz="1400" b="0" dirty="0">
+                <a:solidFill>
+                  <a:srgbClr val="172033"/>
+                </a:solidFill>
+                <a:latin typeface="Aptos"/>
+              </a:rPr>
+              <a:t>, </a:t>
+            </a:r>
+            <a:r>
+              <a:rPr sz="1400" b="0" dirty="0" err="1">
+                <a:solidFill>
+                  <a:srgbClr val="172033"/>
+                </a:solidFill>
+                <a:latin typeface="Aptos"/>
+              </a:rPr>
+              <a:t>но</a:t>
+            </a:r>
+            <a:r>
+              <a:rPr sz="1400" b="0" dirty="0">
+                <a:solidFill>
+                  <a:srgbClr val="172033"/>
+                </a:solidFill>
+                <a:latin typeface="Aptos"/>
+              </a:rPr>
+              <a:t> 44 </a:t>
+            </a:r>
+            <a:r>
+              <a:rPr sz="1400" b="0" dirty="0" err="1">
+                <a:solidFill>
+                  <a:srgbClr val="172033"/>
+                </a:solidFill>
+                <a:latin typeface="Aptos"/>
+              </a:rPr>
+              <a:t>из</a:t>
+            </a:r>
+            <a:r>
+              <a:rPr sz="1400" b="0" dirty="0">
+                <a:solidFill>
+                  <a:srgbClr val="172033"/>
+                </a:solidFill>
+                <a:latin typeface="Aptos"/>
+              </a:rPr>
+              <a:t> 46 </a:t>
+            </a:r>
+            <a:r>
+              <a:rPr sz="1400" b="0" dirty="0" err="1">
+                <a:solidFill>
+                  <a:srgbClr val="172033"/>
+                </a:solidFill>
+                <a:latin typeface="Aptos"/>
+              </a:rPr>
+              <a:t>тестов</a:t>
+            </a:r>
+            <a:r>
+              <a:rPr sz="1400" b="0" dirty="0">
+                <a:solidFill>
+                  <a:srgbClr val="172033"/>
+                </a:solidFill>
+                <a:latin typeface="Aptos"/>
+              </a:rPr>
+              <a:t> — TLE.</a:t>
             </a:r>
           </a:p>
         </p:txBody>
@@ -7938,7 +11392,7 @@
         <p:spPr>
           <a:xfrm>
             <a:off x="950976" y="3154680"/>
-            <a:ext cx="2743200" cy="420624"/>
+            <a:ext cx="2743200" cy="443198"/>
           </a:xfrm>
           <a:prstGeom prst="rect">
             <a:avLst/>
@@ -7953,7 +11407,7 @@
           <a:p>
             <a:pPr algn="l"/>
             <a:r>
-              <a:rPr sz="900" b="0">
+              <a:rPr sz="1200" b="0" dirty="0">
                 <a:solidFill>
                   <a:srgbClr val="617087"/>
                 </a:solidFill>
@@ -7961,9 +11415,11 @@
               </a:rPr>
               <a:t>attempt #1 → 44 TLE</a:t>
             </a:r>
-            <a:br/>
-            <a:r>
-              <a:rPr sz="900" b="0">
+            <a:br>
+              <a:rPr sz="1200" dirty="0"/>
+            </a:br>
+            <a:r>
+              <a:rPr sz="1200" b="0" dirty="0">
                 <a:solidFill>
                   <a:srgbClr val="617087"/>
                 </a:solidFill>
@@ -7983,7 +11439,7 @@
         <p:spPr>
           <a:xfrm>
             <a:off x="841247" y="3977639"/>
-            <a:ext cx="2971800" cy="621792"/>
+            <a:ext cx="2971800" cy="504754"/>
           </a:xfrm>
           <a:prstGeom prst="rect">
             <a:avLst/>
@@ -7998,13 +11454,76 @@
           <a:p>
             <a:pPr algn="l"/>
             <a:r>
-              <a:rPr sz="1200" b="0">
-                <a:solidFill>
-                  <a:srgbClr val="172033"/>
-                </a:solidFill>
-                <a:latin typeface="Aptos"/>
-              </a:rPr>
-              <a:t>По отчёту о TLE ускорен ввод-вывод.</a:t>
+              <a:rPr sz="1400" b="0" dirty="0" err="1">
+                <a:solidFill>
+                  <a:srgbClr val="172033"/>
+                </a:solidFill>
+                <a:latin typeface="Aptos"/>
+              </a:rPr>
+              <a:t>По</a:t>
+            </a:r>
+            <a:r>
+              <a:rPr sz="1400" b="0" dirty="0">
+                <a:solidFill>
+                  <a:srgbClr val="172033"/>
+                </a:solidFill>
+                <a:latin typeface="Aptos"/>
+              </a:rPr>
+              <a:t> </a:t>
+            </a:r>
+            <a:r>
+              <a:rPr sz="1400" b="0" dirty="0" err="1">
+                <a:solidFill>
+                  <a:srgbClr val="172033"/>
+                </a:solidFill>
+                <a:latin typeface="Aptos"/>
+              </a:rPr>
+              <a:t>отчёту</a:t>
+            </a:r>
+            <a:r>
+              <a:rPr sz="1400" b="0" dirty="0">
+                <a:solidFill>
+                  <a:srgbClr val="172033"/>
+                </a:solidFill>
+                <a:latin typeface="Aptos"/>
+              </a:rPr>
+              <a:t> о TLE </a:t>
+            </a:r>
+            <a:r>
+              <a:rPr sz="1400" b="0" dirty="0" err="1">
+                <a:solidFill>
+                  <a:srgbClr val="172033"/>
+                </a:solidFill>
+                <a:latin typeface="Aptos"/>
+              </a:rPr>
+              <a:t>ускорен</a:t>
+            </a:r>
+            <a:r>
+              <a:rPr sz="1400" b="0" dirty="0">
+                <a:solidFill>
+                  <a:srgbClr val="172033"/>
+                </a:solidFill>
+                <a:latin typeface="Aptos"/>
+              </a:rPr>
+              <a:t> </a:t>
+            </a:r>
+            <a:r>
+              <a:rPr sz="1400" b="0" dirty="0" err="1">
+                <a:solidFill>
+                  <a:srgbClr val="172033"/>
+                </a:solidFill>
+                <a:latin typeface="Aptos"/>
+              </a:rPr>
+              <a:t>ввод-вывод</a:t>
+            </a:r>
+            <a:r>
+              <a:rPr sz="1400" b="0" dirty="0">
+                <a:solidFill>
+                  <a:srgbClr val="172033"/>
+                </a:solidFill>
+                <a:latin typeface="Aptos"/>
+              </a:rPr>
+              <a:t>.</a:t>
             </a:r>
           </a:p>
         </p:txBody>
@@ -8182,7 +11701,7 @@
         <p:spPr>
           <a:xfrm>
             <a:off x="4626864" y="2286000"/>
-            <a:ext cx="2971800" cy="658368"/>
+            <a:ext cx="2971800" cy="504754"/>
           </a:xfrm>
           <a:prstGeom prst="rect">
             <a:avLst/>
@@ -8197,13 +11716,112 @@
           <a:p>
             <a:pPr algn="l"/>
             <a:r>
-              <a:rPr sz="1200" b="0">
-                <a:solidFill>
-                  <a:srgbClr val="172033"/>
-                </a:solidFill>
-                <a:latin typeface="Aptos"/>
-              </a:rPr>
-              <a:t>Исследователь получил пример и выполнил две трассировки.</a:t>
+              <a:rPr sz="1400" b="0" dirty="0" err="1">
+                <a:solidFill>
+                  <a:srgbClr val="172033"/>
+                </a:solidFill>
+                <a:latin typeface="Aptos"/>
+              </a:rPr>
+              <a:t>Исследователь</a:t>
+            </a:r>
+            <a:r>
+              <a:rPr sz="1400" b="0" dirty="0">
+                <a:solidFill>
+                  <a:srgbClr val="172033"/>
+                </a:solidFill>
+                <a:latin typeface="Aptos"/>
+              </a:rPr>
+              <a:t> </a:t>
+            </a:r>
+            <a:r>
+              <a:rPr sz="1400" b="0" dirty="0" err="1">
+                <a:solidFill>
+                  <a:srgbClr val="172033"/>
+                </a:solidFill>
+                <a:latin typeface="Aptos"/>
+              </a:rPr>
+              <a:t>получил</a:t>
+            </a:r>
+            <a:r>
+              <a:rPr sz="1400" b="0" dirty="0">
+                <a:solidFill>
+                  <a:srgbClr val="172033"/>
+                </a:solidFill>
+                <a:latin typeface="Aptos"/>
+              </a:rPr>
+              <a:t> </a:t>
+            </a:r>
+            <a:r>
+              <a:rPr sz="1400" b="0" dirty="0" err="1">
+                <a:solidFill>
+                  <a:srgbClr val="172033"/>
+                </a:solidFill>
+                <a:latin typeface="Aptos"/>
+              </a:rPr>
+              <a:t>пример</a:t>
+            </a:r>
+            <a:r>
+              <a:rPr sz="1400" b="0" dirty="0">
+                <a:solidFill>
+                  <a:srgbClr val="172033"/>
+                </a:solidFill>
+                <a:latin typeface="Aptos"/>
+              </a:rPr>
+              <a:t> и </a:t>
+            </a:r>
+            <a:r>
+              <a:rPr sz="1400" b="0" dirty="0" err="1">
+                <a:solidFill>
+                  <a:srgbClr val="172033"/>
+                </a:solidFill>
+                <a:latin typeface="Aptos"/>
+              </a:rPr>
+              <a:t>выполнил</a:t>
+            </a:r>
+            <a:r>
+              <a:rPr sz="1400" b="0" dirty="0">
+                <a:solidFill>
+                  <a:srgbClr val="172033"/>
+                </a:solidFill>
+                <a:latin typeface="Aptos"/>
+              </a:rPr>
+              <a:t> </a:t>
+            </a:r>
+            <a:r>
+              <a:rPr sz="1400" b="0" dirty="0" err="1">
+                <a:solidFill>
+                  <a:srgbClr val="172033"/>
+                </a:solidFill>
+                <a:latin typeface="Aptos"/>
+              </a:rPr>
+              <a:t>две</a:t>
+            </a:r>
+            <a:r>
+              <a:rPr sz="1400" b="0" dirty="0">
+                <a:solidFill>
+                  <a:srgbClr val="172033"/>
+                </a:solidFill>
+                <a:latin typeface="Aptos"/>
+              </a:rPr>
+              <a:t> </a:t>
+            </a:r>
+            <a:r>
+              <a:rPr sz="1400" b="0" dirty="0" err="1">
+                <a:solidFill>
+                  <a:srgbClr val="172033"/>
+                </a:solidFill>
+                <a:latin typeface="Aptos"/>
+              </a:rPr>
+              <a:t>трассировки</a:t>
+            </a:r>
+            <a:r>
+              <a:rPr sz="1400" b="0" dirty="0">
+                <a:solidFill>
+                  <a:srgbClr val="172033"/>
+                </a:solidFill>
+                <a:latin typeface="Aptos"/>
+              </a:rPr>
+              <a:t>.</a:t>
             </a:r>
           </a:p>
         </p:txBody>
@@ -8217,7 +11835,7 @@
         <p:spPr>
           <a:xfrm>
             <a:off x="4626864" y="3035808"/>
-            <a:ext cx="2962656" cy="676656"/>
+            <a:ext cx="2962656" cy="822960"/>
           </a:xfrm>
           <a:prstGeom prst="roundRect">
             <a:avLst>
@@ -8265,7 +11883,7 @@
         <p:spPr>
           <a:xfrm>
             <a:off x="4736592" y="3154680"/>
-            <a:ext cx="2743200" cy="420624"/>
+            <a:ext cx="2743200" cy="627864"/>
           </a:xfrm>
           <a:prstGeom prst="rect">
             <a:avLst/>
@@ -8280,33 +11898,73 @@
           <a:p>
             <a:pPr algn="l"/>
             <a:r>
-              <a:rPr sz="900" b="0">
+              <a:rPr sz="1200" b="0" dirty="0">
                 <a:solidFill>
                   <a:srgbClr val="617087"/>
                 </a:solidFill>
                 <a:latin typeface="Consolas"/>
               </a:rPr>
-              <a:t>researcher: get_test + trace ×2</a:t>
-            </a:r>
-            <a:br/>
-            <a:r>
-              <a:rPr sz="900" b="0">
+              <a:t>researcher: </a:t>
+            </a:r>
+            <a:r>
+              <a:rPr sz="1200" b="0" dirty="0" err="1">
                 <a:solidFill>
                   <a:srgbClr val="617087"/>
                 </a:solidFill>
                 <a:latin typeface="Consolas"/>
               </a:rPr>
+              <a:t>get_test</a:t>
+            </a:r>
+            <a:r>
+              <a:rPr sz="1200" b="0" dirty="0">
+                <a:solidFill>
+                  <a:srgbClr val="617087"/>
+                </a:solidFill>
+                <a:latin typeface="Consolas"/>
+              </a:rPr>
+              <a:t> + trace ×2</a:t>
+            </a:r>
+            <a:br>
+              <a:rPr sz="1200" dirty="0"/>
+            </a:br>
+            <a:r>
+              <a:rPr sz="1200" b="0" dirty="0">
+                <a:solidFill>
+                  <a:srgbClr val="617087"/>
+                </a:solidFill>
+                <a:latin typeface="Consolas"/>
+              </a:rPr>
               <a:t>fixer: code</a:t>
             </a:r>
-            <a:br/>
-            <a:r>
-              <a:rPr sz="900" b="0">
+            <a:br>
+              <a:rPr sz="1200" dirty="0"/>
+            </a:br>
+            <a:r>
+              <a:rPr sz="1200" b="0" dirty="0">
                 <a:solidFill>
                   <a:srgbClr val="617087"/>
                 </a:solidFill>
                 <a:latin typeface="Consolas"/>
               </a:rPr>
-              <a:t>checker: run_tests → 22 AC</a:t>
+              <a:t>checker: </a:t>
+            </a:r>
+            <a:r>
+              <a:rPr sz="1200" b="0" dirty="0" err="1">
+                <a:solidFill>
+                  <a:srgbClr val="617087"/>
+                </a:solidFill>
+                <a:latin typeface="Consolas"/>
+              </a:rPr>
+              <a:t>run_tests</a:t>
+            </a:r>
+            <a:r>
+              <a:rPr sz="1200" b="0" dirty="0">
+                <a:solidFill>
+                  <a:srgbClr val="617087"/>
+                </a:solidFill>
+                <a:latin typeface="Consolas"/>
+              </a:rPr>
+              <a:t> → 22 AC</a:t>
             </a:r>
           </a:p>
         </p:txBody>
@@ -8320,7 +11978,7 @@
         <p:spPr>
           <a:xfrm>
             <a:off x="4626864" y="3977639"/>
-            <a:ext cx="2971800" cy="621792"/>
+            <a:ext cx="2971800" cy="504754"/>
           </a:xfrm>
           <a:prstGeom prst="rect">
             <a:avLst/>
@@ -8335,13 +11993,94 @@
           <a:p>
             <a:pPr algn="l"/>
             <a:r>
-              <a:rPr sz="1200" b="0">
-                <a:solidFill>
-                  <a:srgbClr val="172033"/>
-                </a:solidFill>
-                <a:latin typeface="Aptos"/>
-              </a:rPr>
-              <a:t>Роли дошли до проверенного исправления.</a:t>
+              <a:rPr sz="1400" b="0" dirty="0" err="1">
+                <a:solidFill>
+                  <a:srgbClr val="172033"/>
+                </a:solidFill>
+                <a:latin typeface="Aptos"/>
+              </a:rPr>
+              <a:t>Роли</a:t>
+            </a:r>
+            <a:r>
+              <a:rPr sz="1400" b="0" dirty="0">
+                <a:solidFill>
+                  <a:srgbClr val="172033"/>
+                </a:solidFill>
+                <a:latin typeface="Aptos"/>
+              </a:rPr>
+              <a:t> </a:t>
+            </a:r>
+            <a:r>
+              <a:rPr sz="1400" b="0" dirty="0" err="1">
+                <a:solidFill>
+                  <a:srgbClr val="172033"/>
+                </a:solidFill>
+                <a:latin typeface="Aptos"/>
+              </a:rPr>
+              <a:t>дошли</a:t>
+            </a:r>
+            <a:r>
+              <a:rPr sz="1400" b="0" dirty="0">
+                <a:solidFill>
+                  <a:srgbClr val="172033"/>
+                </a:solidFill>
+                <a:latin typeface="Aptos"/>
+              </a:rPr>
+              <a:t> </a:t>
+            </a:r>
+            <a:r>
+              <a:rPr sz="1400" b="0" dirty="0" err="1">
+                <a:solidFill>
+                  <a:srgbClr val="172033"/>
+                </a:solidFill>
+                <a:latin typeface="Aptos"/>
+              </a:rPr>
+              <a:t>до</a:t>
+            </a:r>
+            <a:r>
+              <a:rPr sz="1400" b="0" dirty="0">
+                <a:solidFill>
+                  <a:srgbClr val="172033"/>
+                </a:solidFill>
+                <a:latin typeface="Aptos"/>
+              </a:rPr>
+              <a:t> </a:t>
+            </a:r>
+            <a:r>
+              <a:rPr sz="1400" b="0" dirty="0" err="1">
+                <a:solidFill>
+                  <a:srgbClr val="172033"/>
+                </a:solidFill>
+                <a:latin typeface="Aptos"/>
+              </a:rPr>
+              <a:t>проверенного</a:t>
+            </a:r>
+            <a:r>
+              <a:rPr sz="1400" b="0" dirty="0">
+                <a:solidFill>
+                  <a:srgbClr val="172033"/>
+                </a:solidFill>
+                <a:latin typeface="Aptos"/>
+              </a:rPr>
+              <a:t> </a:t>
+            </a:r>
+            <a:r>
+              <a:rPr sz="1400" b="0" dirty="0" err="1">
+                <a:solidFill>
+                  <a:srgbClr val="172033"/>
+                </a:solidFill>
+                <a:latin typeface="Aptos"/>
+              </a:rPr>
+              <a:t>исправления</a:t>
+            </a:r>
+            <a:r>
+              <a:rPr sz="1400" b="0" dirty="0">
+                <a:solidFill>
+                  <a:srgbClr val="172033"/>
+                </a:solidFill>
+                <a:latin typeface="Aptos"/>
+              </a:rPr>
+              <a:t>.</a:t>
             </a:r>
           </a:p>
         </p:txBody>
@@ -8519,7 +12258,7 @@
         <p:spPr>
           <a:xfrm>
             <a:off x="8412480" y="2286000"/>
-            <a:ext cx="2971800" cy="658368"/>
+            <a:ext cx="2971800" cy="504754"/>
           </a:xfrm>
           <a:prstGeom prst="rect">
             <a:avLst/>
@@ -8534,13 +12273,112 @@
           <a:p>
             <a:pPr algn="l"/>
             <a:r>
-              <a:rPr sz="1200" b="0">
-                <a:solidFill>
-                  <a:srgbClr val="172033"/>
-                </a:solidFill>
-                <a:latin typeface="Aptos"/>
-              </a:rPr>
-              <a:t>Исследователь запросил тест, запуск и две трассировки.</a:t>
+              <a:rPr sz="1400" b="0" dirty="0" err="1">
+                <a:solidFill>
+                  <a:srgbClr val="172033"/>
+                </a:solidFill>
+                <a:latin typeface="Aptos"/>
+              </a:rPr>
+              <a:t>Исследователь</a:t>
+            </a:r>
+            <a:r>
+              <a:rPr sz="1400" b="0" dirty="0">
+                <a:solidFill>
+                  <a:srgbClr val="172033"/>
+                </a:solidFill>
+                <a:latin typeface="Aptos"/>
+              </a:rPr>
+              <a:t> </a:t>
+            </a:r>
+            <a:r>
+              <a:rPr sz="1400" b="0" dirty="0" err="1">
+                <a:solidFill>
+                  <a:srgbClr val="172033"/>
+                </a:solidFill>
+                <a:latin typeface="Aptos"/>
+              </a:rPr>
+              <a:t>запросил</a:t>
+            </a:r>
+            <a:r>
+              <a:rPr sz="1400" b="0" dirty="0">
+                <a:solidFill>
+                  <a:srgbClr val="172033"/>
+                </a:solidFill>
+                <a:latin typeface="Aptos"/>
+              </a:rPr>
+              <a:t> </a:t>
+            </a:r>
+            <a:r>
+              <a:rPr sz="1400" b="0" dirty="0" err="1">
+                <a:solidFill>
+                  <a:srgbClr val="172033"/>
+                </a:solidFill>
+                <a:latin typeface="Aptos"/>
+              </a:rPr>
+              <a:t>тест</a:t>
+            </a:r>
+            <a:r>
+              <a:rPr sz="1400" b="0" dirty="0">
+                <a:solidFill>
+                  <a:srgbClr val="172033"/>
+                </a:solidFill>
+                <a:latin typeface="Aptos"/>
+              </a:rPr>
+              <a:t>, </a:t>
+            </a:r>
+            <a:r>
+              <a:rPr sz="1400" b="0" dirty="0" err="1">
+                <a:solidFill>
+                  <a:srgbClr val="172033"/>
+                </a:solidFill>
+                <a:latin typeface="Aptos"/>
+              </a:rPr>
+              <a:t>запуск</a:t>
+            </a:r>
+            <a:r>
+              <a:rPr sz="1400" b="0" dirty="0">
+                <a:solidFill>
+                  <a:srgbClr val="172033"/>
+                </a:solidFill>
+                <a:latin typeface="Aptos"/>
+              </a:rPr>
+              <a:t> и </a:t>
+            </a:r>
+            <a:r>
+              <a:rPr sz="1400" b="0" dirty="0" err="1">
+                <a:solidFill>
+                  <a:srgbClr val="172033"/>
+                </a:solidFill>
+                <a:latin typeface="Aptos"/>
+              </a:rPr>
+              <a:t>две</a:t>
+            </a:r>
+            <a:r>
+              <a:rPr sz="1400" b="0" dirty="0">
+                <a:solidFill>
+                  <a:srgbClr val="172033"/>
+                </a:solidFill>
+                <a:latin typeface="Aptos"/>
+              </a:rPr>
+              <a:t> </a:t>
+            </a:r>
+            <a:r>
+              <a:rPr sz="1400" b="0" dirty="0" err="1">
+                <a:solidFill>
+                  <a:srgbClr val="172033"/>
+                </a:solidFill>
+                <a:latin typeface="Aptos"/>
+              </a:rPr>
+              <a:t>трассировки</a:t>
+            </a:r>
+            <a:r>
+              <a:rPr sz="1400" b="0" dirty="0">
+                <a:solidFill>
+                  <a:srgbClr val="172033"/>
+                </a:solidFill>
+                <a:latin typeface="Aptos"/>
+              </a:rPr>
+              <a:t>.</a:t>
             </a:r>
           </a:p>
         </p:txBody>
@@ -8554,7 +12392,7 @@
         <p:spPr>
           <a:xfrm>
             <a:off x="8412480" y="3035808"/>
-            <a:ext cx="2962656" cy="676656"/>
+            <a:ext cx="2962656" cy="822960"/>
           </a:xfrm>
           <a:prstGeom prst="roundRect">
             <a:avLst>
@@ -8602,7 +12440,7 @@
         <p:spPr>
           <a:xfrm>
             <a:off x="8522208" y="3154680"/>
-            <a:ext cx="2743200" cy="420624"/>
+            <a:ext cx="2743200" cy="627864"/>
           </a:xfrm>
           <a:prstGeom prst="rect">
             <a:avLst/>
@@ -8617,24 +12455,95 @@
           <a:p>
             <a:pPr algn="l"/>
             <a:r>
-              <a:rPr sz="900" b="0">
+              <a:rPr sz="1200" b="0" dirty="0" err="1">
                 <a:solidFill>
                   <a:srgbClr val="617087"/>
                 </a:solidFill>
                 <a:latin typeface="Consolas"/>
               </a:rPr>
-              <a:t>get_test + run_program + trace ×2</a:t>
-            </a:r>
-            <a:br/>
-            <a:r>
-              <a:rPr sz="900" b="0">
+              <a:t>get_test</a:t>
+            </a:r>
+            <a:r>
+              <a:rPr sz="1200" b="0" dirty="0">
                 <a:solidFill>
                   <a:srgbClr val="617087"/>
                 </a:solidFill>
                 <a:latin typeface="Consolas"/>
               </a:rPr>
-              <a:t>до fixer не дошло</a:t>
-            </a:r>
+              <a:t> + </a:t>
+            </a:r>
+            <a:r>
+              <a:rPr sz="1200" b="0" dirty="0" err="1">
+                <a:solidFill>
+                  <a:srgbClr val="617087"/>
+                </a:solidFill>
+                <a:latin typeface="Consolas"/>
+              </a:rPr>
+              <a:t>run_program</a:t>
+            </a:r>
+            <a:r>
+              <a:rPr sz="1200" b="0" dirty="0">
+                <a:solidFill>
+                  <a:srgbClr val="617087"/>
+                </a:solidFill>
+                <a:latin typeface="Consolas"/>
+              </a:rPr>
+              <a:t> + trace ×2</a:t>
+            </a:r>
+            <a:br>
+              <a:rPr sz="1200" dirty="0"/>
+            </a:br>
+            <a:r>
+              <a:rPr sz="1200" b="0" dirty="0" err="1">
+                <a:solidFill>
+                  <a:srgbClr val="617087"/>
+                </a:solidFill>
+                <a:latin typeface="Consolas"/>
+              </a:rPr>
+              <a:t>до</a:t>
+            </a:r>
+            <a:r>
+              <a:rPr sz="1200" b="0" dirty="0">
+                <a:solidFill>
+                  <a:srgbClr val="617087"/>
+                </a:solidFill>
+                <a:latin typeface="Consolas"/>
+              </a:rPr>
+              <a:t> fixer </a:t>
+            </a:r>
+            <a:r>
+              <a:rPr sz="1200" b="0" dirty="0" err="1">
+                <a:solidFill>
+                  <a:srgbClr val="617087"/>
+                </a:solidFill>
+                <a:latin typeface="Consolas"/>
+              </a:rPr>
+              <a:t>не</a:t>
+            </a:r>
+            <a:r>
+              <a:rPr sz="1200" b="0" dirty="0">
+                <a:solidFill>
+                  <a:srgbClr val="617087"/>
+                </a:solidFill>
+                <a:latin typeface="Consolas"/>
+              </a:rPr>
+              <a:t> </a:t>
+            </a:r>
+            <a:r>
+              <a:rPr sz="1200" b="0" dirty="0" err="1">
+                <a:solidFill>
+                  <a:srgbClr val="617087"/>
+                </a:solidFill>
+                <a:latin typeface="Consolas"/>
+              </a:rPr>
+              <a:t>дошло</a:t>
+            </a:r>
+            <a:endParaRPr sz="1200" b="0" dirty="0">
+              <a:solidFill>
+                <a:srgbClr val="617087"/>
+              </a:solidFill>
+              <a:latin typeface="Consolas"/>
+            </a:endParaRPr>
           </a:p>
         </p:txBody>
       </p:sp>
@@ -8647,7 +12556,7 @@
         <p:spPr>
           <a:xfrm>
             <a:off x="8412480" y="3977639"/>
-            <a:ext cx="2971800" cy="621792"/>
+            <a:ext cx="2971800" cy="504754"/>
           </a:xfrm>
           <a:prstGeom prst="rect">
             <a:avLst/>
@@ -8662,13 +12571,112 @@
           <a:p>
             <a:pPr algn="l"/>
             <a:r>
-              <a:rPr sz="1200" b="0">
-                <a:solidFill>
-                  <a:srgbClr val="172033"/>
-                </a:solidFill>
-                <a:latin typeface="Aptos"/>
-              </a:rPr>
-              <a:t>После четвёртого ответа расход превысил лимит.</a:t>
+              <a:rPr sz="1400" b="0" dirty="0" err="1">
+                <a:solidFill>
+                  <a:srgbClr val="172033"/>
+                </a:solidFill>
+                <a:latin typeface="Aptos"/>
+              </a:rPr>
+              <a:t>После</a:t>
+            </a:r>
+            <a:r>
+              <a:rPr sz="1400" b="0" dirty="0">
+                <a:solidFill>
+                  <a:srgbClr val="172033"/>
+                </a:solidFill>
+                <a:latin typeface="Aptos"/>
+              </a:rPr>
+              <a:t> </a:t>
+            </a:r>
+            <a:r>
+              <a:rPr sz="1400" b="0" dirty="0" err="1">
+                <a:solidFill>
+                  <a:srgbClr val="172033"/>
+                </a:solidFill>
+                <a:latin typeface="Aptos"/>
+              </a:rPr>
+              <a:t>четвёртого</a:t>
+            </a:r>
+            <a:r>
+              <a:rPr sz="1400" b="0" dirty="0">
+                <a:solidFill>
+                  <a:srgbClr val="172033"/>
+                </a:solidFill>
+                <a:latin typeface="Aptos"/>
+              </a:rPr>
+              <a:t> </a:t>
+            </a:r>
+            <a:r>
+              <a:rPr sz="1400" b="0" dirty="0" err="1">
+                <a:solidFill>
+                  <a:srgbClr val="172033"/>
+                </a:solidFill>
+                <a:latin typeface="Aptos"/>
+              </a:rPr>
+              <a:t>ответа</a:t>
+            </a:r>
+            <a:r>
+              <a:rPr sz="1400" b="0" dirty="0">
+                <a:solidFill>
+                  <a:srgbClr val="172033"/>
+                </a:solidFill>
+                <a:latin typeface="Aptos"/>
+              </a:rPr>
+              <a:t> </a:t>
+            </a:r>
+            <a:r>
+              <a:rPr sz="1400" b="0" dirty="0" err="1">
+                <a:solidFill>
+                  <a:srgbClr val="172033"/>
+                </a:solidFill>
+                <a:latin typeface="Aptos"/>
+              </a:rPr>
+              <a:t>расход</a:t>
+            </a:r>
+            <a:r>
+              <a:rPr sz="1400" b="0" dirty="0">
+                <a:solidFill>
+                  <a:srgbClr val="172033"/>
+                </a:solidFill>
+                <a:latin typeface="Aptos"/>
+              </a:rPr>
+              <a:t> </a:t>
+            </a:r>
+            <a:r>
+              <a:rPr sz="1400" b="0" dirty="0" err="1">
+                <a:solidFill>
+                  <a:srgbClr val="172033"/>
+                </a:solidFill>
+                <a:latin typeface="Aptos"/>
+              </a:rPr>
+              <a:t>превысил</a:t>
+            </a:r>
+            <a:r>
+              <a:rPr sz="1400" b="0" dirty="0">
+                <a:solidFill>
+                  <a:srgbClr val="172033"/>
+                </a:solidFill>
+                <a:latin typeface="Aptos"/>
+              </a:rPr>
+              <a:t> </a:t>
+            </a:r>
+            <a:r>
+              <a:rPr sz="1400" b="0" dirty="0" err="1">
+                <a:solidFill>
+                  <a:srgbClr val="172033"/>
+                </a:solidFill>
+                <a:latin typeface="Aptos"/>
+              </a:rPr>
+              <a:t>лимит</a:t>
+            </a:r>
+            <a:r>
+              <a:rPr sz="1400" b="0" dirty="0">
+                <a:solidFill>
+                  <a:srgbClr val="172033"/>
+                </a:solidFill>
+                <a:latin typeface="Aptos"/>
+              </a:rPr>
+              <a:t>.</a:t>
             </a:r>
           </a:p>
         </p:txBody>
@@ -8704,41 +12712,6 @@
                 <a:latin typeface="Aptos"/>
               </a:rPr>
               <a:t>Остановка: 71 192 / 60 000 токенов</a:t>
-            </a:r>
-          </a:p>
-        </p:txBody>
-      </p:sp>
-      <p:sp>
-        <p:nvSpPr>
-          <p:cNvPr id="31" name="TextBox 30"/>
-          <p:cNvSpPr txBox="1"/>
-          <p:nvPr/>
-        </p:nvSpPr>
-        <p:spPr>
-          <a:xfrm>
-            <a:off x="658368" y="6144768"/>
-            <a:ext cx="7315200" cy="164592"/>
-          </a:xfrm>
-          <a:prstGeom prst="rect">
-            <a:avLst/>
-          </a:prstGeom>
-          <a:noFill/>
-        </p:spPr>
-        <p:txBody>
-          <a:bodyPr wrap="square" lIns="36576" tIns="36576" rIns="36576" bIns="36576">
-            <a:spAutoFit/>
-          </a:bodyPr>
-          <a:lstStyle/>
-          <a:p>
-            <a:pPr algn="l"/>
-            <a:r>
-              <a:rPr sz="900" b="0">
-                <a:solidFill>
-                  <a:srgbClr val="617087"/>
-                </a:solidFill>
-                <a:latin typeface="Aptos"/>
-              </a:rPr>
-              <a:t>Карточки: реальные трассы основного пилота на 30 задачах, лимит 60 000 токенов.</a:t>
             </a:r>
           </a:p>
         </p:txBody>
@@ -8886,41 +12859,6 @@
       </p:sp>
       <p:sp>
         <p:nvSpPr>
-          <p:cNvPr id="5" name="TextBox 4"/>
-          <p:cNvSpPr txBox="1"/>
-          <p:nvPr/>
-        </p:nvSpPr>
-        <p:spPr>
-          <a:xfrm>
-            <a:off x="658368" y="6492240"/>
-            <a:ext cx="7315200" cy="164592"/>
-          </a:xfrm>
-          <a:prstGeom prst="rect">
-            <a:avLst/>
-          </a:prstGeom>
-          <a:noFill/>
-        </p:spPr>
-        <p:txBody>
-          <a:bodyPr wrap="square" lIns="36576" tIns="36576" rIns="36576" bIns="36576">
-            <a:spAutoFit/>
-          </a:bodyPr>
-          <a:lstStyle/>
-          <a:p>
-            <a:pPr algn="l"/>
-            <a:r>
-              <a:rPr sz="800" b="0">
-                <a:solidFill>
-                  <a:srgbClr val="617087"/>
-                </a:solidFill>
-                <a:latin typeface="Aptos"/>
-              </a:rPr>
-              <a:t>LLM-отладчик Python-программ · промежуточный показ</a:t>
-            </a:r>
-          </a:p>
-        </p:txBody>
-      </p:sp>
-      <p:sp>
-        <p:nvSpPr>
           <p:cNvPr id="6" name="TextBox 5"/>
           <p:cNvSpPr txBox="1"/>
           <p:nvPr/>
@@ -8998,7 +12936,7 @@
         <p:spPr>
           <a:xfrm>
             <a:off x="804672" y="2148840"/>
-            <a:ext cx="4023360" cy="274320"/>
+            <a:ext cx="4023360" cy="381643"/>
           </a:xfrm>
           <a:prstGeom prst="rect">
             <a:avLst/>
@@ -9013,14 +12951,65 @@
           <a:p>
             <a:pPr algn="l"/>
             <a:r>
-              <a:rPr sz="1600" b="1">
-                <a:solidFill>
-                  <a:srgbClr val="172033"/>
-                </a:solidFill>
-                <a:latin typeface="Aptos"/>
-              </a:rPr>
-              <a:t>Workflow лидирует по качеству</a:t>
-            </a:r>
+              <a:rPr sz="2000" b="1" dirty="0">
+                <a:solidFill>
+                  <a:srgbClr val="172033"/>
+                </a:solidFill>
+                <a:latin typeface="Aptos"/>
+              </a:rPr>
+              <a:t>Workflow </a:t>
+            </a:r>
+            <a:r>
+              <a:rPr sz="2000" b="1" dirty="0" err="1">
+                <a:solidFill>
+                  <a:srgbClr val="172033"/>
+                </a:solidFill>
+                <a:latin typeface="Aptos"/>
+              </a:rPr>
+              <a:t>лидирует</a:t>
+            </a:r>
+            <a:r>
+              <a:rPr sz="2000" b="1" dirty="0">
+                <a:solidFill>
+                  <a:srgbClr val="172033"/>
+                </a:solidFill>
+                <a:latin typeface="Aptos"/>
+              </a:rPr>
+              <a:t> </a:t>
+            </a:r>
+            <a:r>
+              <a:rPr sz="2000" b="1" dirty="0" err="1">
+                <a:solidFill>
+                  <a:srgbClr val="172033"/>
+                </a:solidFill>
+                <a:latin typeface="Aptos"/>
+              </a:rPr>
+              <a:t>по</a:t>
+            </a:r>
+            <a:r>
+              <a:rPr sz="2000" b="1" dirty="0">
+                <a:solidFill>
+                  <a:srgbClr val="172033"/>
+                </a:solidFill>
+                <a:latin typeface="Aptos"/>
+              </a:rPr>
+              <a:t> </a:t>
+            </a:r>
+            <a:r>
+              <a:rPr sz="2000" b="1" dirty="0" err="1">
+                <a:solidFill>
+                  <a:srgbClr val="172033"/>
+                </a:solidFill>
+                <a:latin typeface="Aptos"/>
+              </a:rPr>
+              <a:t>качеству</a:t>
+            </a:r>
+            <a:endParaRPr sz="2000" b="1" dirty="0">
+              <a:solidFill>
+                <a:srgbClr val="172033"/>
+              </a:solidFill>
+              <a:latin typeface="Aptos"/>
+            </a:endParaRPr>
           </a:p>
         </p:txBody>
       </p:sp>
@@ -9032,7 +13021,7 @@
         </p:nvSpPr>
         <p:spPr>
           <a:xfrm>
-            <a:off x="804672" y="2514600"/>
+            <a:off x="804672" y="2660904"/>
             <a:ext cx="4114800" cy="548640"/>
           </a:xfrm>
           <a:prstGeom prst="rect">
@@ -9048,27 +13037,126 @@
           <a:p>
             <a:pPr algn="l"/>
             <a:r>
-              <a:rPr sz="1400" b="0">
-                <a:solidFill>
-                  <a:srgbClr val="617087"/>
-                </a:solidFill>
-                <a:latin typeface="Aptos"/>
-              </a:rPr>
-              <a:t>На 30 задачах: 17/30 против 13/30 у двух агентных вариантов.</a:t>
-            </a:r>
-          </a:p>
-        </p:txBody>
-      </p:sp>
-      <p:sp>
-        <p:nvSpPr>
-          <p:cNvPr id="10" name="TextBox 9"/>
+              <a:rPr sz="1400" b="0" dirty="0" err="1">
+                <a:solidFill>
+                  <a:srgbClr val="617087"/>
+                </a:solidFill>
+                <a:latin typeface="Aptos"/>
+              </a:rPr>
+              <a:t>На</a:t>
+            </a:r>
+            <a:r>
+              <a:rPr sz="1400" b="0" dirty="0">
+                <a:solidFill>
+                  <a:srgbClr val="617087"/>
+                </a:solidFill>
+                <a:latin typeface="Aptos"/>
+              </a:rPr>
+              <a:t> 30 </a:t>
+            </a:r>
+            <a:r>
+              <a:rPr sz="1400" b="0" dirty="0" err="1">
+                <a:solidFill>
+                  <a:srgbClr val="617087"/>
+                </a:solidFill>
+                <a:latin typeface="Aptos"/>
+              </a:rPr>
+              <a:t>задачах</a:t>
+            </a:r>
+            <a:r>
+              <a:rPr sz="1400" b="0" dirty="0">
+                <a:solidFill>
+                  <a:srgbClr val="617087"/>
+                </a:solidFill>
+                <a:latin typeface="Aptos"/>
+              </a:rPr>
+              <a:t>: 17/30 </a:t>
+            </a:r>
+            <a:r>
+              <a:rPr sz="1400" b="0" dirty="0" err="1">
+                <a:solidFill>
+                  <a:srgbClr val="617087"/>
+                </a:solidFill>
+                <a:latin typeface="Aptos"/>
+              </a:rPr>
+              <a:t>против</a:t>
+            </a:r>
+            <a:r>
+              <a:rPr sz="1400" b="0" dirty="0">
+                <a:solidFill>
+                  <a:srgbClr val="617087"/>
+                </a:solidFill>
+                <a:latin typeface="Aptos"/>
+              </a:rPr>
+              <a:t> 13/30 у </a:t>
+            </a:r>
+            <a:r>
+              <a:rPr sz="1400" b="0" dirty="0" err="1">
+                <a:solidFill>
+                  <a:srgbClr val="617087"/>
+                </a:solidFill>
+                <a:latin typeface="Aptos"/>
+              </a:rPr>
+              <a:t>двух</a:t>
+            </a:r>
+            <a:r>
+              <a:rPr sz="1400" b="0" dirty="0">
+                <a:solidFill>
+                  <a:srgbClr val="617087"/>
+                </a:solidFill>
+                <a:latin typeface="Aptos"/>
+              </a:rPr>
+              <a:t> </a:t>
+            </a:r>
+            <a:r>
+              <a:rPr sz="1400" b="0" dirty="0" err="1">
+                <a:solidFill>
+                  <a:srgbClr val="617087"/>
+                </a:solidFill>
+                <a:latin typeface="Aptos"/>
+              </a:rPr>
+              <a:t>агентных</a:t>
+            </a:r>
+            <a:r>
+              <a:rPr sz="1400" b="0" dirty="0">
+                <a:solidFill>
+                  <a:srgbClr val="617087"/>
+                </a:solidFill>
+                <a:latin typeface="Aptos"/>
+              </a:rPr>
+              <a:t> </a:t>
+            </a:r>
+            <a:r>
+              <a:rPr sz="1400" b="0" dirty="0" err="1">
+                <a:solidFill>
+                  <a:srgbClr val="617087"/>
+                </a:solidFill>
+                <a:latin typeface="Aptos"/>
+              </a:rPr>
+              <a:t>вариантов</a:t>
+            </a:r>
+            <a:r>
+              <a:rPr sz="1400" b="0" dirty="0">
+                <a:solidFill>
+                  <a:srgbClr val="617087"/>
+                </a:solidFill>
+                <a:latin typeface="Aptos"/>
+              </a:rPr>
+              <a:t>.</a:t>
+            </a:r>
+          </a:p>
+        </p:txBody>
+      </p:sp>
+      <p:sp>
+        <p:nvSpPr>
+          <p:cNvPr id="11" name="TextBox 10"/>
           <p:cNvSpPr txBox="1"/>
           <p:nvPr/>
         </p:nvSpPr>
         <p:spPr>
           <a:xfrm>
-            <a:off x="777240" y="3429000"/>
-            <a:ext cx="1188720" cy="457200"/>
+            <a:off x="804672" y="3977639"/>
+            <a:ext cx="4023360" cy="381643"/>
           </a:xfrm>
           <a:prstGeom prst="rect">
             <a:avLst/>
@@ -9083,48 +13171,40 @@
           <a:p>
             <a:pPr algn="l"/>
             <a:r>
-              <a:rPr sz="3100" b="1">
-                <a:solidFill>
-                  <a:srgbClr val="315EFB"/>
-                </a:solidFill>
-                <a:latin typeface="Aptos"/>
-              </a:rPr>
-              <a:t>1</a:t>
-            </a:r>
-          </a:p>
-        </p:txBody>
-      </p:sp>
-      <p:sp>
-        <p:nvSpPr>
-          <p:cNvPr id="11" name="TextBox 10"/>
-          <p:cNvSpPr txBox="1"/>
-          <p:nvPr/>
-        </p:nvSpPr>
-        <p:spPr>
-          <a:xfrm>
-            <a:off x="804672" y="3977639"/>
-            <a:ext cx="4023360" cy="274320"/>
-          </a:xfrm>
-          <a:prstGeom prst="rect">
-            <a:avLst/>
-          </a:prstGeom>
-          <a:noFill/>
-        </p:spPr>
-        <p:txBody>
-          <a:bodyPr wrap="square" lIns="36576" tIns="36576" rIns="36576" bIns="36576">
-            <a:spAutoFit/>
-          </a:bodyPr>
-          <a:lstStyle/>
-          <a:p>
-            <a:pPr algn="l"/>
-            <a:r>
-              <a:rPr sz="1600" b="1">
-                <a:solidFill>
-                  <a:srgbClr val="172033"/>
-                </a:solidFill>
-                <a:latin typeface="Aptos"/>
-              </a:rPr>
-              <a:t>Наблюдение по MAS</a:t>
+              <a:rPr sz="2000" b="1" dirty="0" err="1">
+                <a:solidFill>
+                  <a:srgbClr val="172033"/>
+                </a:solidFill>
+                <a:latin typeface="Aptos"/>
+              </a:rPr>
+              <a:t>Наблюдение</a:t>
+            </a:r>
+            <a:r>
+              <a:rPr sz="2000" b="1" dirty="0">
+                <a:solidFill>
+                  <a:srgbClr val="172033"/>
+                </a:solidFill>
+                <a:latin typeface="Aptos"/>
+              </a:rPr>
+              <a:t> </a:t>
+            </a:r>
+            <a:r>
+              <a:rPr sz="2000" b="1" dirty="0" err="1">
+                <a:solidFill>
+                  <a:srgbClr val="172033"/>
+                </a:solidFill>
+                <a:latin typeface="Aptos"/>
+              </a:rPr>
+              <a:t>по</a:t>
+            </a:r>
+            <a:r>
+              <a:rPr sz="2000" b="1" dirty="0">
+                <a:solidFill>
+                  <a:srgbClr val="172033"/>
+                </a:solidFill>
+                <a:latin typeface="Aptos"/>
+              </a:rPr>
+              <a:t> MAS</a:t>
             </a:r>
           </a:p>
         </p:txBody>
@@ -9153,13 +13233,139 @@
           <a:p>
             <a:pPr algn="l"/>
             <a:r>
-              <a:rPr sz="1400" b="0">
-                <a:solidFill>
-                  <a:srgbClr val="617087"/>
-                </a:solidFill>
-                <a:latin typeface="Aptos"/>
-              </a:rPr>
-              <a:t>MAS решила 13/30, но 17 задач остановились по токенному лимиту.</a:t>
+              <a:rPr sz="1400" b="0" dirty="0">
+                <a:solidFill>
+                  <a:srgbClr val="617087"/>
+                </a:solidFill>
+                <a:latin typeface="Aptos"/>
+              </a:rPr>
+              <a:t>MAS </a:t>
+            </a:r>
+            <a:r>
+              <a:rPr sz="1400" b="0" dirty="0" err="1">
+                <a:solidFill>
+                  <a:srgbClr val="617087"/>
+                </a:solidFill>
+                <a:latin typeface="Aptos"/>
+              </a:rPr>
+              <a:t>решила</a:t>
+            </a:r>
+            <a:r>
+              <a:rPr sz="1400" b="0" dirty="0">
+                <a:solidFill>
+                  <a:srgbClr val="617087"/>
+                </a:solidFill>
+                <a:latin typeface="Aptos"/>
+              </a:rPr>
+              <a:t> 13/30, </a:t>
+            </a:r>
+            <a:r>
+              <a:rPr sz="1400" b="0" dirty="0" err="1">
+                <a:solidFill>
+                  <a:srgbClr val="617087"/>
+                </a:solidFill>
+                <a:latin typeface="Aptos"/>
+              </a:rPr>
+              <a:t>но</a:t>
+            </a:r>
+            <a:r>
+              <a:rPr sz="1400" b="0" dirty="0">
+                <a:solidFill>
+                  <a:srgbClr val="617087"/>
+                </a:solidFill>
+                <a:latin typeface="Aptos"/>
+              </a:rPr>
+              <a:t> 17 </a:t>
+            </a:r>
+            <a:r>
+              <a:rPr sz="1400" b="0" dirty="0" err="1">
+                <a:solidFill>
+                  <a:srgbClr val="617087"/>
+                </a:solidFill>
+                <a:latin typeface="Aptos"/>
+              </a:rPr>
+              <a:t>задач</a:t>
+            </a:r>
+            <a:r>
+              <a:rPr sz="1400" b="0" dirty="0">
+                <a:solidFill>
+                  <a:srgbClr val="617087"/>
+                </a:solidFill>
+                <a:latin typeface="Aptos"/>
+              </a:rPr>
+              <a:t> </a:t>
+            </a:r>
+            <a:r>
+              <a:rPr sz="1400" b="0" dirty="0" err="1">
+                <a:solidFill>
+                  <a:srgbClr val="617087"/>
+                </a:solidFill>
+                <a:latin typeface="Aptos"/>
+              </a:rPr>
+              <a:t>остановились</a:t>
+            </a:r>
+            <a:r>
+              <a:rPr sz="1400" b="0" dirty="0">
+                <a:solidFill>
+                  <a:srgbClr val="617087"/>
+                </a:solidFill>
+                <a:latin typeface="Aptos"/>
+              </a:rPr>
+              <a:t> </a:t>
+            </a:r>
+            <a:r>
+              <a:rPr sz="1400" b="0" dirty="0" err="1">
+                <a:solidFill>
+                  <a:srgbClr val="617087"/>
+                </a:solidFill>
+                <a:latin typeface="Aptos"/>
+              </a:rPr>
+              <a:t>по</a:t>
+            </a:r>
+            <a:r>
+              <a:rPr sz="1400" b="0" dirty="0">
+                <a:solidFill>
+                  <a:srgbClr val="617087"/>
+                </a:solidFill>
+                <a:latin typeface="Aptos"/>
+              </a:rPr>
+              <a:t> </a:t>
+            </a:r>
+            <a:r>
+              <a:rPr sz="1400" b="0" dirty="0" err="1">
+                <a:solidFill>
+                  <a:srgbClr val="617087"/>
+                </a:solidFill>
+                <a:latin typeface="Aptos"/>
+              </a:rPr>
+              <a:t>токенному</a:t>
+            </a:r>
+            <a:r>
+              <a:rPr sz="1400" b="0" dirty="0">
+                <a:solidFill>
+                  <a:srgbClr val="617087"/>
+                </a:solidFill>
+                <a:latin typeface="Aptos"/>
+              </a:rPr>
+              <a:t> </a:t>
+            </a:r>
+            <a:r>
+              <a:rPr sz="1400" b="0" dirty="0" err="1">
+                <a:solidFill>
+                  <a:srgbClr val="617087"/>
+                </a:solidFill>
+                <a:latin typeface="Aptos"/>
+              </a:rPr>
+              <a:t>лимиту</a:t>
+            </a:r>
+            <a:r>
+              <a:rPr sz="1400" b="0" dirty="0">
+                <a:solidFill>
+                  <a:srgbClr val="617087"/>
+                </a:solidFill>
+                <a:latin typeface="Aptos"/>
+              </a:rPr>
+              <a:t>.</a:t>
             </a:r>
           </a:p>
         </p:txBody>
@@ -9177,7 +13383,7 @@
           </a:xfrm>
           <a:prstGeom prst="roundRect">
             <a:avLst>
-              <a:gd name="adj" fmla="val 12000"/>
+              <a:gd name="adj" fmla="val 5978"/>
             </a:avLst>
           </a:prstGeom>
           <a:solidFill>
@@ -9221,7 +13427,7 @@
         <p:spPr>
           <a:xfrm>
             <a:off x="6355080" y="1828800"/>
-            <a:ext cx="4389120" cy="256032"/>
+            <a:ext cx="4389120" cy="381643"/>
           </a:xfrm>
           <a:prstGeom prst="rect">
             <a:avLst/>
@@ -9236,14 +13442,23 @@
           <a:p>
             <a:pPr algn="l"/>
             <a:r>
-              <a:rPr sz="1800" b="1">
-                <a:solidFill>
-                  <a:srgbClr val="172033"/>
-                </a:solidFill>
-                <a:latin typeface="Aptos"/>
-              </a:rPr>
-              <a:t>Следующий эксперимент</a:t>
-            </a:r>
+              <a:rPr sz="2000" b="1" dirty="0" err="1"/>
+              <a:t>Следующие</a:t>
+            </a:r>
+            <a:r>
+              <a:rPr sz="2000" b="1" dirty="0"/>
+              <a:t> </a:t>
+            </a:r>
+            <a:r>
+              <a:rPr sz="2000" b="1" dirty="0" err="1"/>
+              <a:t>эксперименты</a:t>
+            </a:r>
+            <a:endParaRPr sz="2000" b="1" dirty="0">
+              <a:solidFill>
+                <a:srgbClr val="172033"/>
+              </a:solidFill>
+              <a:latin typeface="Aptos"/>
+            </a:endParaRPr>
           </a:p>
         </p:txBody>
       </p:sp>
@@ -9255,8 +13470,8 @@
         </p:nvSpPr>
         <p:spPr>
           <a:xfrm>
-            <a:off x="6382512" y="2423160"/>
-            <a:ext cx="4389120" cy="438912"/>
+            <a:off x="6355080" y="2773608"/>
+            <a:ext cx="4389120" cy="2536079"/>
           </a:xfrm>
           <a:prstGeom prst="rect">
             <a:avLst/>
@@ -9271,202 +13486,110 @@
           <a:p>
             <a:pPr algn="l"/>
             <a:r>
-              <a:rPr sz="1300" b="0">
-                <a:solidFill>
-                  <a:srgbClr val="172033"/>
-                </a:solidFill>
-                <a:latin typeface="Aptos"/>
-              </a:rPr>
-              <a:t>1. Сделать общий токенный лимит жёстким до нового вызова модели.</a:t>
-            </a:r>
-          </a:p>
-        </p:txBody>
-      </p:sp>
-      <p:sp>
-        <p:nvSpPr>
-          <p:cNvPr id="16" name="TextBox 15"/>
-          <p:cNvSpPr txBox="1"/>
-          <p:nvPr/>
-        </p:nvSpPr>
-        <p:spPr>
-          <a:xfrm>
-            <a:off x="6382512" y="3063240"/>
-            <a:ext cx="4389120" cy="438912"/>
-          </a:xfrm>
-          <a:prstGeom prst="rect">
-            <a:avLst/>
-          </a:prstGeom>
-          <a:noFill/>
-        </p:spPr>
-        <p:txBody>
-          <a:bodyPr wrap="square" lIns="36576" tIns="36576" rIns="36576" bIns="36576">
-            <a:spAutoFit/>
-          </a:bodyPr>
-          <a:lstStyle/>
+              <a:rPr sz="1600" dirty="0"/>
+              <a:t>1. Compaction: </a:t>
+            </a:r>
+            <a:r>
+              <a:rPr sz="1600" dirty="0" err="1"/>
+              <a:t>сжимать</a:t>
+            </a:r>
+            <a:r>
+              <a:rPr sz="1600" dirty="0"/>
+              <a:t> </a:t>
+            </a:r>
+            <a:r>
+              <a:rPr sz="1600" dirty="0" err="1"/>
+              <a:t>старые</a:t>
+            </a:r>
+            <a:r>
+              <a:rPr sz="1600" dirty="0"/>
+              <a:t> </a:t>
+            </a:r>
+            <a:r>
+              <a:rPr sz="1600" dirty="0" err="1"/>
+              <a:t>результаты</a:t>
+            </a:r>
+            <a:r>
+              <a:rPr sz="1600" dirty="0"/>
+              <a:t> </a:t>
+            </a:r>
+            <a:r>
+              <a:rPr sz="1600" dirty="0" err="1"/>
+              <a:t>инструментов</a:t>
+            </a:r>
+            <a:r>
+              <a:rPr sz="1600" dirty="0"/>
+              <a:t> в </a:t>
+            </a:r>
+            <a:r>
+              <a:rPr sz="1600" dirty="0" err="1"/>
+              <a:t>краткое</a:t>
+            </a:r>
+            <a:r>
+              <a:rPr sz="1600" dirty="0"/>
+              <a:t> </a:t>
+            </a:r>
+            <a:r>
+              <a:rPr sz="1600" dirty="0" err="1"/>
+              <a:t>резюме</a:t>
+            </a:r>
+            <a:r>
+              <a:rPr sz="1600" dirty="0"/>
+              <a:t>.</a:t>
+            </a:r>
+            <a:endParaRPr lang="en-US" sz="1600" dirty="0"/>
+          </a:p>
           <a:p>
             <a:pPr algn="l"/>
-            <a:r>
-              <a:rPr sz="1300" b="0">
-                <a:solidFill>
-                  <a:srgbClr val="172033"/>
-                </a:solidFill>
-                <a:latin typeface="Aptos"/>
-              </a:rPr>
-              <a:t>2. Ужать историю исследования и повторить ту же выборку.</a:t>
-            </a:r>
-          </a:p>
-        </p:txBody>
-      </p:sp>
-      <p:sp>
-        <p:nvSpPr>
-          <p:cNvPr id="17" name="TextBox 16"/>
-          <p:cNvSpPr txBox="1"/>
-          <p:nvPr/>
-        </p:nvSpPr>
-        <p:spPr>
-          <a:xfrm>
-            <a:off x="6382512" y="3703320"/>
-            <a:ext cx="4389120" cy="438912"/>
-          </a:xfrm>
-          <a:prstGeom prst="rect">
-            <a:avLst/>
-          </a:prstGeom>
-          <a:noFill/>
-        </p:spPr>
-        <p:txBody>
-          <a:bodyPr wrap="square" lIns="36576" tIns="36576" rIns="36576" bIns="36576">
-            <a:spAutoFit/>
-          </a:bodyPr>
-          <a:lstStyle/>
+            <a:endParaRPr lang="en-US" sz="1600" dirty="0"/>
+          </a:p>
+          <a:p>
+            <a:r>
+              <a:rPr lang="ru-RU" sz="1600" dirty="0"/>
+              <a:t>2. Резерв бюджета: оставить токены для </a:t>
+            </a:r>
+            <a:r>
+              <a:rPr lang="ru-RU" sz="1600" dirty="0" err="1"/>
+              <a:t>fixer</a:t>
+            </a:r>
+            <a:r>
+              <a:rPr lang="ru-RU" sz="1600" dirty="0"/>
+              <a:t> и </a:t>
+            </a:r>
+            <a:r>
+              <a:rPr lang="ru-RU" sz="1600" dirty="0" err="1"/>
+              <a:t>checker</a:t>
+            </a:r>
+            <a:r>
+              <a:rPr lang="ru-RU" sz="1600" dirty="0"/>
+              <a:t>.</a:t>
+            </a:r>
+          </a:p>
           <a:p>
             <a:pPr algn="l"/>
-            <a:r>
-              <a:rPr sz="1300" b="0">
-                <a:solidFill>
-                  <a:srgbClr val="172033"/>
-                </a:solidFill>
-                <a:latin typeface="Aptos"/>
-              </a:rPr>
-              <a:t>3. Разобрать реальные успехи и провалы по сохранённым трассам.</a:t>
-            </a:r>
-          </a:p>
-        </p:txBody>
-      </p:sp>
-      <p:sp>
-        <p:nvSpPr>
-          <p:cNvPr id="18" name="Rounded Rectangle 17"/>
-          <p:cNvSpPr/>
-          <p:nvPr/>
-        </p:nvSpPr>
-        <p:spPr>
-          <a:xfrm>
-            <a:off x="6355080" y="4526280"/>
-            <a:ext cx="4526280" cy="841248"/>
-          </a:xfrm>
-          <a:prstGeom prst="roundRect">
-            <a:avLst>
-              <a:gd name="adj" fmla="val 12000"/>
-            </a:avLst>
-          </a:prstGeom>
-          <a:solidFill>
-            <a:srgbClr val="FFF2DF"/>
-          </a:solidFill>
-          <a:ln>
-            <a:solidFill>
-              <a:srgbClr val="ED8B27"/>
-            </a:solidFill>
-          </a:ln>
-        </p:spPr>
-        <p:style>
-          <a:lnRef idx="1">
-            <a:schemeClr val="accent1"/>
-          </a:lnRef>
-          <a:fillRef idx="3">
-            <a:schemeClr val="accent1"/>
-          </a:fillRef>
-          <a:effectRef idx="2">
-            <a:schemeClr val="accent1"/>
-          </a:effectRef>
-          <a:fontRef idx="minor">
-            <a:schemeClr val="lt1"/>
-          </a:fontRef>
-        </p:style>
-        <p:txBody>
-          <a:bodyPr rtlCol="0" anchor="ctr"/>
-          <a:lstStyle/>
-          <a:p>
-            <a:pPr algn="ctr"/>
-            <a:endParaRPr/>
-          </a:p>
-        </p:txBody>
-      </p:sp>
-      <p:sp>
-        <p:nvSpPr>
-          <p:cNvPr id="19" name="TextBox 18"/>
-          <p:cNvSpPr txBox="1"/>
-          <p:nvPr/>
-        </p:nvSpPr>
-        <p:spPr>
-          <a:xfrm>
-            <a:off x="6510528" y="4663440"/>
-            <a:ext cx="4206240" cy="512064"/>
-          </a:xfrm>
-          <a:prstGeom prst="rect">
-            <a:avLst/>
-          </a:prstGeom>
-          <a:noFill/>
-        </p:spPr>
-        <p:txBody>
-          <a:bodyPr wrap="square" lIns="36576" tIns="36576" rIns="36576" bIns="36576">
-            <a:spAutoFit/>
-          </a:bodyPr>
-          <a:lstStyle/>
+            <a:endParaRPr lang="en-US" sz="1600" dirty="0"/>
+          </a:p>
           <a:p>
             <a:pPr algn="l"/>
-            <a:r>
-              <a:rPr sz="1100" b="0">
-                <a:solidFill>
-                  <a:srgbClr val="172033"/>
-                </a:solidFill>
-                <a:latin typeface="Aptos"/>
-              </a:rPr>
-              <a:t>17 задач MAS и 16 задач single_agent остановились по токенному лимиту.</a:t>
-            </a:r>
-          </a:p>
-        </p:txBody>
-      </p:sp>
-      <p:sp>
-        <p:nvSpPr>
-          <p:cNvPr id="20" name="TextBox 19"/>
-          <p:cNvSpPr txBox="1"/>
-          <p:nvPr/>
-        </p:nvSpPr>
-        <p:spPr>
-          <a:xfrm>
-            <a:off x="658368" y="6144768"/>
-            <a:ext cx="7315200" cy="164592"/>
-          </a:xfrm>
-          <a:prstGeom prst="rect">
-            <a:avLst/>
-          </a:prstGeom>
-          <a:noFill/>
-        </p:spPr>
-        <p:txBody>
-          <a:bodyPr wrap="square" lIns="36576" tIns="36576" rIns="36576" bIns="36576">
-            <a:spAutoFit/>
-          </a:bodyPr>
-          <a:lstStyle/>
+            <a:endParaRPr lang="en-US" sz="1600" dirty="0"/>
+          </a:p>
+          <a:p>
+            <a:r>
+              <a:rPr lang="ru-RU" sz="1600" dirty="0"/>
+              <a:t>Проверка: те же 30 задач; сравнить успех, </a:t>
+            </a:r>
+            <a:r>
+              <a:rPr lang="ru-RU" sz="1600" dirty="0" err="1"/>
+              <a:t>token-limit</a:t>
+            </a:r>
+            <a:r>
+              <a:rPr lang="ru-RU" sz="1600" dirty="0"/>
+              <a:t>, токены и стоимость.</a:t>
+            </a:r>
+          </a:p>
           <a:p>
             <a:pPr algn="l"/>
-            <a:r>
-              <a:rPr sz="900" b="0">
-                <a:solidFill>
-                  <a:srgbClr val="617087"/>
-                </a:solidFill>
-                <a:latin typeface="Aptos"/>
-              </a:rPr>
-              <a:t>Выводы предварительные: выборка dev из 30 задач</a:t>
-            </a:r>
+            <a:endParaRPr sz="1600" dirty="0"/>
           </a:p>
         </p:txBody>
       </p:sp>
